--- a/report/BIO395_Presentation_DRAFT.pptx
+++ b/report/BIO395_Presentation_DRAFT.pptx
@@ -18,6 +18,11 @@
     <p:sldId id="266" r:id="rId17"/>
     <p:sldId id="267" r:id="rId18"/>
     <p:sldId id="268" r:id="rId19"/>
+    <p:sldId id="269" r:id="rId20"/>
+    <p:sldId id="270" r:id="rId21"/>
+    <p:sldId id="271" r:id="rId22"/>
+    <p:sldId id="272" r:id="rId23"/>
+    <p:sldId id="273" r:id="rId24"/>
   </p:sldIdLst>
   <p:sldSz cx="12191695" cy="6858000" type="screen4x3"/>
   <p:notesSz cx="6858000" cy="9144000"/>
@@ -3102,14 +3107,102 @@
       <p:grpSpPr/>
       <p:sp>
         <p:nvSpPr>
-          <p:cNvPr id="2" name="TextBox 1"/>
+          <p:cNvPr id="2" name="Rectangle 1"/>
+          <p:cNvSpPr/>
+          <p:nvPr/>
+        </p:nvSpPr>
+        <p:spPr>
+          <a:xfrm>
+            <a:off x="0" y="0"/>
+            <a:ext cx="12191695" cy="6858000"/>
+          </a:xfrm>
+          <a:prstGeom prst="rect">
+            <a:avLst/>
+          </a:prstGeom>
+          <a:solidFill>
+            <a:srgbClr val="0E1117"/>
+          </a:solidFill>
+          <a:ln>
+            <a:noFill/>
+          </a:ln>
+          <a:effectLst/>
+        </p:spPr>
+        <p:style>
+          <a:lnRef idx="1">
+            <a:schemeClr val="accent1"/>
+          </a:lnRef>
+          <a:fillRef idx="3">
+            <a:schemeClr val="accent1"/>
+          </a:fillRef>
+          <a:effectRef idx="2">
+            <a:schemeClr val="accent1"/>
+          </a:effectRef>
+          <a:fontRef idx="minor">
+            <a:schemeClr val="lt1"/>
+          </a:fontRef>
+        </p:style>
+        <p:txBody>
+          <a:bodyPr rtlCol="0" anchor="ctr"/>
+          <a:lstStyle/>
+          <a:p>
+            <a:pPr algn="ctr"/>
+          </a:p>
+        </p:txBody>
+      </p:sp>
+      <p:sp>
+        <p:nvSpPr>
+          <p:cNvPr id="3" name="Rectangle 2"/>
+          <p:cNvSpPr/>
+          <p:nvPr/>
+        </p:nvSpPr>
+        <p:spPr>
+          <a:xfrm>
+            <a:off x="0" y="0"/>
+            <a:ext cx="100584" cy="6858000"/>
+          </a:xfrm>
+          <a:prstGeom prst="rect">
+            <a:avLst/>
+          </a:prstGeom>
+          <a:solidFill>
+            <a:srgbClr val="5B9BD5"/>
+          </a:solidFill>
+          <a:ln>
+            <a:noFill/>
+          </a:ln>
+          <a:effectLst/>
+        </p:spPr>
+        <p:style>
+          <a:lnRef idx="1">
+            <a:schemeClr val="accent1"/>
+          </a:lnRef>
+          <a:fillRef idx="3">
+            <a:schemeClr val="accent1"/>
+          </a:fillRef>
+          <a:effectRef idx="2">
+            <a:schemeClr val="accent1"/>
+          </a:effectRef>
+          <a:fontRef idx="minor">
+            <a:schemeClr val="lt1"/>
+          </a:fontRef>
+        </p:style>
+        <p:txBody>
+          <a:bodyPr rtlCol="0" anchor="ctr"/>
+          <a:lstStyle/>
+          <a:p>
+            <a:pPr algn="ctr"/>
+          </a:p>
+        </p:txBody>
+      </p:sp>
+      <p:sp>
+        <p:nvSpPr>
+          <p:cNvPr id="4" name="TextBox 3"/>
           <p:cNvSpPr txBox="1"/>
           <p:nvPr/>
         </p:nvSpPr>
         <p:spPr>
           <a:xfrm>
-            <a:off x="822960" y="1920240"/>
-            <a:ext cx="10515600" cy="2377440"/>
+            <a:off x="1051560" y="1965960"/>
+            <a:ext cx="10058400" cy="1920240"/>
           </a:xfrm>
           <a:prstGeom prst="rect">
             <a:avLst/>
@@ -3123,54 +3216,82 @@
           <a:lstStyle/>
           <a:p>
             <a:r>
-              <a:rPr sz="4000" b="1" i="0">
-                <a:solidFill>
-                  <a:srgbClr val="1F4E79"/>
-                </a:solidFill>
-                <a:latin typeface="Times New Roman"/>
-              </a:rPr>
-              <a:t>Educational DNA–RNA Tumour Profiling</a:t>
-            </a:r>
-          </a:p>
-          <a:p>
-            <a:r>
-              <a:rPr sz="4000" b="1" i="0">
-                <a:solidFill>
-                  <a:srgbClr val="1F4E79"/>
-                </a:solidFill>
-                <a:latin typeface="Times New Roman"/>
-              </a:rPr>
-              <a:t>Pipeline and Visualization Platform</a:t>
-            </a:r>
-          </a:p>
-          <a:p>
-            <a:pPr>
-              <a:spcBef>
-                <a:spcPts val="1800"/>
-              </a:spcBef>
-            </a:pPr>
-            <a:r>
-              <a:rPr sz="1700" b="0" i="1">
-                <a:solidFill>
-                  <a:srgbClr val="555555"/>
-                </a:solidFill>
-                <a:latin typeface="Times New Roman"/>
-              </a:rPr>
-              <a:t>Building a clinical-grade genomic workflow in the open, and measuring it against an accredited laboratory</a:t>
-            </a:r>
-          </a:p>
-        </p:txBody>
-      </p:sp>
-      <p:sp>
-        <p:nvSpPr>
-          <p:cNvPr id="3" name="TextBox 2"/>
+              <a:rPr sz="4400" b="1" i="0">
+                <a:solidFill>
+                  <a:srgbClr val="ECEFF4"/>
+                </a:solidFill>
+                <a:latin typeface="Times New Roman"/>
+              </a:rPr>
+              <a:t>Educational DNA–RNA</a:t>
+            </a:r>
+          </a:p>
+          <a:p>
+            <a:r>
+              <a:rPr sz="4400" b="1" i="0">
+                <a:solidFill>
+                  <a:srgbClr val="ECEFF4"/>
+                </a:solidFill>
+                <a:latin typeface="Times New Roman"/>
+              </a:rPr>
+              <a:t>Tumour Profiling Pipeline</a:t>
+            </a:r>
+          </a:p>
+        </p:txBody>
+      </p:sp>
+      <p:sp>
+        <p:nvSpPr>
+          <p:cNvPr id="5" name="Rectangle 4"/>
+          <p:cNvSpPr/>
+          <p:nvPr/>
+        </p:nvSpPr>
+        <p:spPr>
+          <a:xfrm>
+            <a:off x="1078992" y="3950208"/>
+            <a:ext cx="1828800" cy="45720"/>
+          </a:xfrm>
+          <a:prstGeom prst="rect">
+            <a:avLst/>
+          </a:prstGeom>
+          <a:solidFill>
+            <a:srgbClr val="5B9BD5"/>
+          </a:solidFill>
+          <a:ln>
+            <a:noFill/>
+          </a:ln>
+          <a:effectLst/>
+        </p:spPr>
+        <p:style>
+          <a:lnRef idx="1">
+            <a:schemeClr val="accent1"/>
+          </a:lnRef>
+          <a:fillRef idx="3">
+            <a:schemeClr val="accent1"/>
+          </a:fillRef>
+          <a:effectRef idx="2">
+            <a:schemeClr val="accent1"/>
+          </a:effectRef>
+          <a:fontRef idx="minor">
+            <a:schemeClr val="lt1"/>
+          </a:fontRef>
+        </p:style>
+        <p:txBody>
+          <a:bodyPr rtlCol="0" anchor="ctr"/>
+          <a:lstStyle/>
+          <a:p>
+            <a:pPr algn="ctr"/>
+          </a:p>
+        </p:txBody>
+      </p:sp>
+      <p:sp>
+        <p:nvSpPr>
+          <p:cNvPr id="6" name="TextBox 5"/>
           <p:cNvSpPr txBox="1"/>
           <p:nvPr/>
         </p:nvSpPr>
         <p:spPr>
           <a:xfrm>
-            <a:off x="685800" y="4937760"/>
-            <a:ext cx="10881360" cy="502920"/>
+            <a:off x="1051560" y="4160520"/>
+            <a:ext cx="9692640" cy="1097280"/>
           </a:xfrm>
           <a:prstGeom prst="rect">
             <a:avLst/>
@@ -3184,13 +3305,82 @@
           <a:lstStyle/>
           <a:p>
             <a:r>
-              <a:rPr sz="1300" b="0" i="1">
+              <a:rPr sz="1600" b="0" i="1">
+                <a:solidFill>
+                  <a:srgbClr val="9AA4B2"/>
+                </a:solidFill>
+                <a:latin typeface="Times New Roman"/>
+              </a:rPr>
+              <a:t>Building a clinical-grade genomic workflow in the open — and measuring it against an accredited laboratory</a:t>
+            </a:r>
+          </a:p>
+        </p:txBody>
+      </p:sp>
+      <p:sp>
+        <p:nvSpPr>
+          <p:cNvPr id="7" name="TextBox 6"/>
+          <p:cNvSpPr txBox="1"/>
+          <p:nvPr/>
+        </p:nvSpPr>
+        <p:spPr>
+          <a:xfrm>
+            <a:off x="1051560" y="5532120"/>
+            <a:ext cx="9692640" cy="822960"/>
+          </a:xfrm>
+          <a:prstGeom prst="rect">
+            <a:avLst/>
+          </a:prstGeom>
+          <a:noFill/>
+        </p:spPr>
+        <p:txBody>
+          <a:bodyPr wrap="square">
+            <a:spAutoFit/>
+          </a:bodyPr>
+          <a:lstStyle/>
+          <a:p>
+            <a:r>
+              <a:rPr sz="1300" b="1" i="0">
                 <a:solidFill>
                   <a:srgbClr val="C00000"/>
                 </a:solidFill>
                 <a:latin typeface="Times New Roman"/>
               </a:rPr>
-              <a:t>[TO COMPLETE] Your name, programme, company, internship dates, supervisor</a:t>
+              <a:t>[NAME · PROGRAMME]   ·   [COMPANY]   ·   [DATES]   ·   supervisor [NAME]</a:t>
+            </a:r>
+          </a:p>
+        </p:txBody>
+      </p:sp>
+      <p:sp>
+        <p:nvSpPr>
+          <p:cNvPr id="8" name="TextBox 7"/>
+          <p:cNvSpPr txBox="1"/>
+          <p:nvPr/>
+        </p:nvSpPr>
+        <p:spPr>
+          <a:xfrm>
+            <a:off x="10607040" y="6382512"/>
+            <a:ext cx="1097280" cy="320040"/>
+          </a:xfrm>
+          <a:prstGeom prst="rect">
+            <a:avLst/>
+          </a:prstGeom>
+          <a:noFill/>
+        </p:spPr>
+        <p:txBody>
+          <a:bodyPr wrap="square">
+            <a:spAutoFit/>
+          </a:bodyPr>
+          <a:lstStyle/>
+          <a:p>
+            <a:pPr algn="r"/>
+            <a:r>
+              <a:rPr sz="1000" b="0" i="0">
+                <a:solidFill>
+                  <a:srgbClr val="9AA4B2"/>
+                </a:solidFill>
+                <a:latin typeface="Times New Roman"/>
+              </a:rPr>
+              <a:t>1 / 18</a:t>
             </a:r>
           </a:p>
         </p:txBody>
@@ -3215,14 +3405,58 @@
       <p:grpSpPr/>
       <p:sp>
         <p:nvSpPr>
-          <p:cNvPr id="2" name="TextBox 1"/>
+          <p:cNvPr id="2" name="Rectangle 1"/>
+          <p:cNvSpPr/>
+          <p:nvPr/>
+        </p:nvSpPr>
+        <p:spPr>
+          <a:xfrm>
+            <a:off x="0" y="0"/>
+            <a:ext cx="12191695" cy="6858000"/>
+          </a:xfrm>
+          <a:prstGeom prst="rect">
+            <a:avLst/>
+          </a:prstGeom>
+          <a:solidFill>
+            <a:srgbClr val="0E1117"/>
+          </a:solidFill>
+          <a:ln>
+            <a:noFill/>
+          </a:ln>
+          <a:effectLst/>
+        </p:spPr>
+        <p:style>
+          <a:lnRef idx="1">
+            <a:schemeClr val="accent1"/>
+          </a:lnRef>
+          <a:fillRef idx="3">
+            <a:schemeClr val="accent1"/>
+          </a:fillRef>
+          <a:effectRef idx="2">
+            <a:schemeClr val="accent1"/>
+          </a:effectRef>
+          <a:fontRef idx="minor">
+            <a:schemeClr val="lt1"/>
+          </a:fontRef>
+        </p:style>
+        <p:txBody>
+          <a:bodyPr rtlCol="0" anchor="ctr"/>
+          <a:lstStyle/>
+          <a:p>
+            <a:pPr algn="ctr"/>
+          </a:p>
+        </p:txBody>
+      </p:sp>
+      <p:sp>
+        <p:nvSpPr>
+          <p:cNvPr id="3" name="TextBox 2"/>
           <p:cNvSpPr txBox="1"/>
           <p:nvPr/>
         </p:nvSpPr>
         <p:spPr>
           <a:xfrm>
-            <a:off x="548640" y="320040"/>
-            <a:ext cx="11064240" cy="822960"/>
+            <a:off x="685800" y="384048"/>
+            <a:ext cx="10789920" cy="320040"/>
           </a:xfrm>
           <a:prstGeom prst="rect">
             <a:avLst/>
@@ -3236,38 +3470,27 @@
           <a:lstStyle/>
           <a:p>
             <a:r>
-              <a:rPr sz="3000" b="1" i="0">
-                <a:solidFill>
-                  <a:srgbClr val="1F4E79"/>
-                </a:solidFill>
-                <a:latin typeface="Times New Roman"/>
-              </a:rPr>
-              <a:t>One artefact with two faces</a:t>
-            </a:r>
-          </a:p>
-          <a:p>
-            <a:r>
-              <a:rPr sz="1500" b="0" i="1">
-                <a:solidFill>
-                  <a:srgbClr val="555555"/>
-                </a:solidFill>
-                <a:latin typeface="Times New Roman"/>
-              </a:rPr>
-              <a:t>Cross-priming between amplicons amplified in the same reaction</a:t>
-            </a:r>
-          </a:p>
-        </p:txBody>
-      </p:sp>
-      <p:sp>
-        <p:nvSpPr>
-          <p:cNvPr id="3" name="TextBox 2"/>
+              <a:rPr sz="1200" b="1" i="0">
+                <a:solidFill>
+                  <a:srgbClr val="4CAF7D"/>
+                </a:solidFill>
+                <a:latin typeface="Times New Roman"/>
+              </a:rPr>
+              <a:t>VALIDATION</a:t>
+            </a:r>
+          </a:p>
+        </p:txBody>
+      </p:sp>
+      <p:sp>
+        <p:nvSpPr>
+          <p:cNvPr id="4" name="TextBox 3"/>
           <p:cNvSpPr txBox="1"/>
           <p:nvPr/>
         </p:nvSpPr>
         <p:spPr>
           <a:xfrm>
-            <a:off x="685800" y="1554480"/>
-            <a:ext cx="5212080" cy="4023360"/>
+            <a:off x="685800" y="713232"/>
+            <a:ext cx="10789920" cy="777240"/>
           </a:xfrm>
           <a:prstGeom prst="rect">
             <a:avLst/>
@@ -3281,75 +3504,115 @@
           <a:lstStyle/>
           <a:p>
             <a:r>
-              <a:rPr sz="2000" b="1" i="0">
-                <a:solidFill>
-                  <a:srgbClr val="1F4E79"/>
-                </a:solidFill>
-                <a:latin typeface="Times New Roman"/>
-              </a:rPr>
-              <a:t>DNA arm</a:t>
-            </a:r>
-          </a:p>
-          <a:p>
-            <a:pPr>
-              <a:spcAft>
-                <a:spcPts val="800"/>
-              </a:spcAft>
-            </a:pPr>
-            <a:r>
-              <a:rPr sz="1600" b="0" i="0">
-                <a:solidFill>
-                  <a:srgbClr val="1A1A1A"/>
-                </a:solidFill>
-                <a:latin typeface="Times New Roman"/>
-              </a:rPr>
-              <a:t>•  58 % of somatic SNVs share one substitution class</a:t>
-            </a:r>
-          </a:p>
-          <a:p>
-            <a:pPr>
-              <a:spcAft>
-                <a:spcPts val="800"/>
-              </a:spcAft>
-            </a:pPr>
-            <a:r>
-              <a:rPr sz="1600" b="0" i="0">
-                <a:solidFill>
-                  <a:srgbClr val="1A1A1A"/>
-                </a:solidFill>
-                <a:latin typeface="Times New Roman"/>
-              </a:rPr>
-              <a:t>•  Four “independent mutations” within 35 bases in one gene</a:t>
-            </a:r>
-          </a:p>
-          <a:p>
-            <a:pPr>
-              <a:spcAft>
-                <a:spcPts val="800"/>
-              </a:spcAft>
-            </a:pPr>
-            <a:r>
-              <a:rPr sz="1600" b="0" i="0">
-                <a:solidFill>
-                  <a:srgbClr val="1A1A1A"/>
-                </a:solidFill>
-                <a:latin typeface="Times New Roman"/>
-              </a:rPr>
-              <a:t>•  23 of 39 candidates flagged</a:t>
-            </a:r>
-          </a:p>
-        </p:txBody>
-      </p:sp>
-      <p:sp>
-        <p:nvSpPr>
-          <p:cNvPr id="4" name="TextBox 3"/>
+              <a:rPr sz="3000" b="1" i="0">
+                <a:solidFill>
+                  <a:srgbClr val="ECEFF4"/>
+                </a:solidFill>
+                <a:latin typeface="Times New Roman"/>
+              </a:rPr>
+              <a:t>The pipeline recovered the laboratory's finding</a:t>
+            </a:r>
+          </a:p>
+        </p:txBody>
+      </p:sp>
+      <p:sp>
+        <p:nvSpPr>
+          <p:cNvPr id="5" name="Rectangle 4"/>
+          <p:cNvSpPr/>
+          <p:nvPr/>
+        </p:nvSpPr>
+        <p:spPr>
+          <a:xfrm>
+            <a:off x="713232" y="1554480"/>
+            <a:ext cx="1371600" cy="41148"/>
+          </a:xfrm>
+          <a:prstGeom prst="rect">
+            <a:avLst/>
+          </a:prstGeom>
+          <a:solidFill>
+            <a:srgbClr val="4CAF7D"/>
+          </a:solidFill>
+          <a:ln>
+            <a:noFill/>
+          </a:ln>
+          <a:effectLst/>
+        </p:spPr>
+        <p:style>
+          <a:lnRef idx="1">
+            <a:schemeClr val="accent1"/>
+          </a:lnRef>
+          <a:fillRef idx="3">
+            <a:schemeClr val="accent1"/>
+          </a:fillRef>
+          <a:effectRef idx="2">
+            <a:schemeClr val="accent1"/>
+          </a:effectRef>
+          <a:fontRef idx="minor">
+            <a:schemeClr val="lt1"/>
+          </a:fontRef>
+        </p:style>
+        <p:txBody>
+          <a:bodyPr rtlCol="0" anchor="ctr"/>
+          <a:lstStyle/>
+          <a:p>
+            <a:pPr algn="ctr"/>
+          </a:p>
+        </p:txBody>
+      </p:sp>
+      <p:sp>
+        <p:nvSpPr>
+          <p:cNvPr id="6" name="Rectangle 5"/>
+          <p:cNvSpPr/>
+          <p:nvPr/>
+        </p:nvSpPr>
+        <p:spPr>
+          <a:xfrm>
+            <a:off x="685800" y="1856232"/>
+            <a:ext cx="3383280" cy="1600200"/>
+          </a:xfrm>
+          <a:prstGeom prst="rect">
+            <a:avLst/>
+          </a:prstGeom>
+          <a:solidFill>
+            <a:srgbClr val="181D27"/>
+          </a:solidFill>
+          <a:ln>
+            <a:noFill/>
+          </a:ln>
+          <a:effectLst/>
+        </p:spPr>
+        <p:style>
+          <a:lnRef idx="1">
+            <a:schemeClr val="accent1"/>
+          </a:lnRef>
+          <a:fillRef idx="3">
+            <a:schemeClr val="accent1"/>
+          </a:fillRef>
+          <a:effectRef idx="2">
+            <a:schemeClr val="accent1"/>
+          </a:effectRef>
+          <a:fontRef idx="minor">
+            <a:schemeClr val="lt1"/>
+          </a:fontRef>
+        </p:style>
+        <p:txBody>
+          <a:bodyPr rtlCol="0" anchor="ctr"/>
+          <a:lstStyle/>
+          <a:p>
+            <a:pPr algn="ctr"/>
+          </a:p>
+        </p:txBody>
+      </p:sp>
+      <p:sp>
+        <p:nvSpPr>
+          <p:cNvPr id="7" name="TextBox 6"/>
           <p:cNvSpPr txBox="1"/>
           <p:nvPr/>
         </p:nvSpPr>
         <p:spPr>
           <a:xfrm>
-            <a:off x="6309360" y="1554480"/>
-            <a:ext cx="5212080" cy="4023360"/>
+            <a:off x="914400" y="2020824"/>
+            <a:ext cx="2926080" cy="777240"/>
           </a:xfrm>
           <a:prstGeom prst="rect">
             <a:avLst/>
@@ -3363,75 +3626,27 @@
           <a:lstStyle/>
           <a:p>
             <a:r>
-              <a:rPr sz="2000" b="1" i="0">
-                <a:solidFill>
-                  <a:srgbClr val="1F4E79"/>
-                </a:solidFill>
-                <a:latin typeface="Times New Roman"/>
-              </a:rPr>
-              <a:t>RNA arm</a:t>
-            </a:r>
-          </a:p>
-          <a:p>
-            <a:pPr>
-              <a:spcAft>
-                <a:spcPts val="800"/>
-              </a:spcAft>
-            </a:pPr>
-            <a:r>
-              <a:rPr sz="1600" b="0" i="0">
-                <a:solidFill>
-                  <a:srgbClr val="1A1A1A"/>
-                </a:solidFill>
-                <a:latin typeface="Times New Roman"/>
-              </a:rPr>
-              <a:t>•  20 fusions called, 166,694 discarded</a:t>
-            </a:r>
-          </a:p>
-          <a:p>
-            <a:pPr>
-              <a:spcAft>
-                <a:spcPts val="800"/>
-              </a:spcAft>
-            </a:pPr>
-            <a:r>
-              <a:rPr sz="1600" b="0" i="0">
-                <a:solidFill>
-                  <a:srgbClr val="1A1A1A"/>
-                </a:solidFill>
-                <a:latin typeface="Times New Roman"/>
-              </a:rPr>
-              <a:t>•  FGFR1/2/3 joined in every combination, in both orientations</a:t>
-            </a:r>
-          </a:p>
-          <a:p>
-            <a:pPr>
-              <a:spcAft>
-                <a:spcPts val="800"/>
-              </a:spcAft>
-            </a:pPr>
-            <a:r>
-              <a:rPr sz="1600" b="0" i="0">
-                <a:solidFill>
-                  <a:srgbClr val="1A1A1A"/>
-                </a:solidFill>
-                <a:latin typeface="Times New Roman"/>
-              </a:rPr>
-              <a:t>•  All 20 flagged; the laboratory reported none — we agree</a:t>
-            </a:r>
-          </a:p>
-        </p:txBody>
-      </p:sp>
-      <p:sp>
-        <p:nvSpPr>
-          <p:cNvPr id="5" name="TextBox 4"/>
+              <a:rPr sz="4000" b="1" i="0">
+                <a:solidFill>
+                  <a:srgbClr val="4CAF7D"/>
+                </a:solidFill>
+                <a:latin typeface="Times New Roman"/>
+              </a:rPr>
+              <a:t>0.281</a:t>
+            </a:r>
+          </a:p>
+        </p:txBody>
+      </p:sp>
+      <p:sp>
+        <p:nvSpPr>
+          <p:cNvPr id="8" name="TextBox 7"/>
           <p:cNvSpPr txBox="1"/>
           <p:nvPr/>
         </p:nvSpPr>
         <p:spPr>
           <a:xfrm>
-            <a:off x="685800" y="5669280"/>
-            <a:ext cx="10881360" cy="502920"/>
+            <a:off x="914400" y="2843784"/>
+            <a:ext cx="2926080" cy="548640"/>
           </a:xfrm>
           <a:prstGeom prst="rect">
             <a:avLst/>
@@ -3445,13 +3660,467 @@
           <a:lstStyle/>
           <a:p>
             <a:r>
-              <a:rPr sz="1500" b="0" i="1">
-                <a:solidFill>
-                  <a:srgbClr val="C00000"/>
-                </a:solidFill>
-                <a:latin typeface="Times New Roman"/>
-              </a:rPr>
-              <a:t>An unscreened reading would have reported an FGFR2 fusion — the single most consequential false positive available in this cancer type.</a:t>
+              <a:rPr sz="1200" b="0" i="0">
+                <a:solidFill>
+                  <a:srgbClr val="9AA4B2"/>
+                </a:solidFill>
+                <a:latin typeface="Times New Roman"/>
+              </a:rPr>
+              <a:t>laboratory allele fraction</a:t>
+            </a:r>
+          </a:p>
+        </p:txBody>
+      </p:sp>
+      <p:sp>
+        <p:nvSpPr>
+          <p:cNvPr id="9" name="Rectangle 8"/>
+          <p:cNvSpPr/>
+          <p:nvPr/>
+        </p:nvSpPr>
+        <p:spPr>
+          <a:xfrm>
+            <a:off x="4389120" y="1856232"/>
+            <a:ext cx="3383280" cy="1600200"/>
+          </a:xfrm>
+          <a:prstGeom prst="rect">
+            <a:avLst/>
+          </a:prstGeom>
+          <a:solidFill>
+            <a:srgbClr val="181D27"/>
+          </a:solidFill>
+          <a:ln>
+            <a:noFill/>
+          </a:ln>
+          <a:effectLst/>
+        </p:spPr>
+        <p:style>
+          <a:lnRef idx="1">
+            <a:schemeClr val="accent1"/>
+          </a:lnRef>
+          <a:fillRef idx="3">
+            <a:schemeClr val="accent1"/>
+          </a:fillRef>
+          <a:effectRef idx="2">
+            <a:schemeClr val="accent1"/>
+          </a:effectRef>
+          <a:fontRef idx="minor">
+            <a:schemeClr val="lt1"/>
+          </a:fontRef>
+        </p:style>
+        <p:txBody>
+          <a:bodyPr rtlCol="0" anchor="ctr"/>
+          <a:lstStyle/>
+          <a:p>
+            <a:pPr algn="ctr"/>
+          </a:p>
+        </p:txBody>
+      </p:sp>
+      <p:sp>
+        <p:nvSpPr>
+          <p:cNvPr id="10" name="TextBox 9"/>
+          <p:cNvSpPr txBox="1"/>
+          <p:nvPr/>
+        </p:nvSpPr>
+        <p:spPr>
+          <a:xfrm>
+            <a:off x="4617720" y="2020824"/>
+            <a:ext cx="2926080" cy="777240"/>
+          </a:xfrm>
+          <a:prstGeom prst="rect">
+            <a:avLst/>
+          </a:prstGeom>
+          <a:noFill/>
+        </p:spPr>
+        <p:txBody>
+          <a:bodyPr wrap="square">
+            <a:spAutoFit/>
+          </a:bodyPr>
+          <a:lstStyle/>
+          <a:p>
+            <a:r>
+              <a:rPr sz="4000" b="1" i="0">
+                <a:solidFill>
+                  <a:srgbClr val="4CAF7D"/>
+                </a:solidFill>
+                <a:latin typeface="Times New Roman"/>
+              </a:rPr>
+              <a:t>0.2814</a:t>
+            </a:r>
+          </a:p>
+        </p:txBody>
+      </p:sp>
+      <p:sp>
+        <p:nvSpPr>
+          <p:cNvPr id="11" name="TextBox 10"/>
+          <p:cNvSpPr txBox="1"/>
+          <p:nvPr/>
+        </p:nvSpPr>
+        <p:spPr>
+          <a:xfrm>
+            <a:off x="4617720" y="2843784"/>
+            <a:ext cx="2926080" cy="548640"/>
+          </a:xfrm>
+          <a:prstGeom prst="rect">
+            <a:avLst/>
+          </a:prstGeom>
+          <a:noFill/>
+        </p:spPr>
+        <p:txBody>
+          <a:bodyPr wrap="square">
+            <a:spAutoFit/>
+          </a:bodyPr>
+          <a:lstStyle/>
+          <a:p>
+            <a:r>
+              <a:rPr sz="1200" b="0" i="0">
+                <a:solidFill>
+                  <a:srgbClr val="9AA4B2"/>
+                </a:solidFill>
+                <a:latin typeface="Times New Roman"/>
+              </a:rPr>
+              <a:t>measured here</a:t>
+            </a:r>
+          </a:p>
+        </p:txBody>
+      </p:sp>
+      <p:sp>
+        <p:nvSpPr>
+          <p:cNvPr id="12" name="Rectangle 11"/>
+          <p:cNvSpPr/>
+          <p:nvPr/>
+        </p:nvSpPr>
+        <p:spPr>
+          <a:xfrm>
+            <a:off x="8092440" y="1856232"/>
+            <a:ext cx="3383280" cy="1600200"/>
+          </a:xfrm>
+          <a:prstGeom prst="rect">
+            <a:avLst/>
+          </a:prstGeom>
+          <a:solidFill>
+            <a:srgbClr val="181D27"/>
+          </a:solidFill>
+          <a:ln>
+            <a:noFill/>
+          </a:ln>
+          <a:effectLst/>
+        </p:spPr>
+        <p:style>
+          <a:lnRef idx="1">
+            <a:schemeClr val="accent1"/>
+          </a:lnRef>
+          <a:fillRef idx="3">
+            <a:schemeClr val="accent1"/>
+          </a:fillRef>
+          <a:effectRef idx="2">
+            <a:schemeClr val="accent1"/>
+          </a:effectRef>
+          <a:fontRef idx="minor">
+            <a:schemeClr val="lt1"/>
+          </a:fontRef>
+        </p:style>
+        <p:txBody>
+          <a:bodyPr rtlCol="0" anchor="ctr"/>
+          <a:lstStyle/>
+          <a:p>
+            <a:pPr algn="ctr"/>
+          </a:p>
+        </p:txBody>
+      </p:sp>
+      <p:sp>
+        <p:nvSpPr>
+          <p:cNvPr id="13" name="TextBox 12"/>
+          <p:cNvSpPr txBox="1"/>
+          <p:nvPr/>
+        </p:nvSpPr>
+        <p:spPr>
+          <a:xfrm>
+            <a:off x="8321040" y="2020824"/>
+            <a:ext cx="2926080" cy="777240"/>
+          </a:xfrm>
+          <a:prstGeom prst="rect">
+            <a:avLst/>
+          </a:prstGeom>
+          <a:noFill/>
+        </p:spPr>
+        <p:txBody>
+          <a:bodyPr wrap="square">
+            <a:spAutoFit/>
+          </a:bodyPr>
+          <a:lstStyle/>
+          <a:p>
+            <a:r>
+              <a:rPr sz="4000" b="1" i="0">
+                <a:solidFill>
+                  <a:srgbClr val="4CAF7D"/>
+                </a:solidFill>
+                <a:latin typeface="Times New Roman"/>
+              </a:rPr>
+              <a:t>1 / 1</a:t>
+            </a:r>
+          </a:p>
+        </p:txBody>
+      </p:sp>
+      <p:sp>
+        <p:nvSpPr>
+          <p:cNvPr id="14" name="TextBox 13"/>
+          <p:cNvSpPr txBox="1"/>
+          <p:nvPr/>
+        </p:nvSpPr>
+        <p:spPr>
+          <a:xfrm>
+            <a:off x="8321040" y="2843784"/>
+            <a:ext cx="2926080" cy="548640"/>
+          </a:xfrm>
+          <a:prstGeom prst="rect">
+            <a:avLst/>
+          </a:prstGeom>
+          <a:noFill/>
+        </p:spPr>
+        <p:txBody>
+          <a:bodyPr wrap="square">
+            <a:spAutoFit/>
+          </a:bodyPr>
+          <a:lstStyle/>
+          <a:p>
+            <a:r>
+              <a:rPr sz="1200" b="0" i="0">
+                <a:solidFill>
+                  <a:srgbClr val="9AA4B2"/>
+                </a:solidFill>
+                <a:latin typeface="Times New Roman"/>
+              </a:rPr>
+              <a:t>reported variants recovered</a:t>
+            </a:r>
+          </a:p>
+        </p:txBody>
+      </p:sp>
+      <p:sp>
+        <p:nvSpPr>
+          <p:cNvPr id="15" name="Rectangle 14"/>
+          <p:cNvSpPr/>
+          <p:nvPr/>
+        </p:nvSpPr>
+        <p:spPr>
+          <a:xfrm>
+            <a:off x="685800" y="3685032"/>
+            <a:ext cx="10789920" cy="822960"/>
+          </a:xfrm>
+          <a:prstGeom prst="rect">
+            <a:avLst/>
+          </a:prstGeom>
+          <a:solidFill>
+            <a:srgbClr val="181D27"/>
+          </a:solidFill>
+          <a:ln>
+            <a:noFill/>
+          </a:ln>
+          <a:effectLst/>
+        </p:spPr>
+        <p:style>
+          <a:lnRef idx="1">
+            <a:schemeClr val="accent1"/>
+          </a:lnRef>
+          <a:fillRef idx="3">
+            <a:schemeClr val="accent1"/>
+          </a:fillRef>
+          <a:effectRef idx="2">
+            <a:schemeClr val="accent1"/>
+          </a:effectRef>
+          <a:fontRef idx="minor">
+            <a:schemeClr val="lt1"/>
+          </a:fontRef>
+        </p:style>
+        <p:txBody>
+          <a:bodyPr rtlCol="0" anchor="ctr"/>
+          <a:lstStyle/>
+          <a:p>
+            <a:pPr algn="ctr"/>
+          </a:p>
+        </p:txBody>
+      </p:sp>
+      <p:sp>
+        <p:nvSpPr>
+          <p:cNvPr id="16" name="Rectangle 15"/>
+          <p:cNvSpPr/>
+          <p:nvPr/>
+        </p:nvSpPr>
+        <p:spPr>
+          <a:xfrm>
+            <a:off x="685800" y="3685032"/>
+            <a:ext cx="50292" cy="822960"/>
+          </a:xfrm>
+          <a:prstGeom prst="rect">
+            <a:avLst/>
+          </a:prstGeom>
+          <a:solidFill>
+            <a:srgbClr val="4CAF7D"/>
+          </a:solidFill>
+          <a:ln>
+            <a:noFill/>
+          </a:ln>
+          <a:effectLst/>
+        </p:spPr>
+        <p:style>
+          <a:lnRef idx="1">
+            <a:schemeClr val="accent1"/>
+          </a:lnRef>
+          <a:fillRef idx="3">
+            <a:schemeClr val="accent1"/>
+          </a:fillRef>
+          <a:effectRef idx="2">
+            <a:schemeClr val="accent1"/>
+          </a:effectRef>
+          <a:fontRef idx="minor">
+            <a:schemeClr val="lt1"/>
+          </a:fontRef>
+        </p:style>
+        <p:txBody>
+          <a:bodyPr rtlCol="0" anchor="ctr"/>
+          <a:lstStyle/>
+          <a:p>
+            <a:pPr algn="ctr"/>
+          </a:p>
+        </p:txBody>
+      </p:sp>
+      <p:sp>
+        <p:nvSpPr>
+          <p:cNvPr id="17" name="TextBox 16"/>
+          <p:cNvSpPr txBox="1"/>
+          <p:nvPr/>
+        </p:nvSpPr>
+        <p:spPr>
+          <a:xfrm>
+            <a:off x="932688" y="3803904"/>
+            <a:ext cx="10424160" cy="640080"/>
+          </a:xfrm>
+          <a:prstGeom prst="rect">
+            <a:avLst/>
+          </a:prstGeom>
+          <a:noFill/>
+        </p:spPr>
+        <p:txBody>
+          <a:bodyPr wrap="square">
+            <a:spAutoFit/>
+          </a:bodyPr>
+          <a:lstStyle/>
+          <a:p>
+            <a:r>
+              <a:rPr sz="1600" b="0" i="0">
+                <a:solidFill>
+                  <a:srgbClr val="ECEFF4"/>
+                </a:solidFill>
+                <a:latin typeface="Times New Roman"/>
+              </a:rPr>
+              <a:t>IDH1 p.Arg132Cys — supported by all three callers. Different aligners, different callers, different reference builds, different deduplication: the same answer to three decimals.</a:t>
+            </a:r>
+          </a:p>
+        </p:txBody>
+      </p:sp>
+      <p:sp>
+        <p:nvSpPr>
+          <p:cNvPr id="18" name="TextBox 17"/>
+          <p:cNvSpPr txBox="1"/>
+          <p:nvPr/>
+        </p:nvSpPr>
+        <p:spPr>
+          <a:xfrm>
+            <a:off x="777240" y="4690872"/>
+            <a:ext cx="10607040" cy="1618487"/>
+          </a:xfrm>
+          <a:prstGeom prst="rect">
+            <a:avLst/>
+          </a:prstGeom>
+          <a:noFill/>
+        </p:spPr>
+        <p:txBody>
+          <a:bodyPr wrap="square">
+            <a:spAutoFit/>
+          </a:bodyPr>
+          <a:lstStyle/>
+          <a:p>
+            <a:pPr>
+              <a:spcAft>
+                <a:spcPts val="1100"/>
+              </a:spcAft>
+            </a:pPr>
+            <a:r>
+              <a:rPr sz="1600" b="0" i="0">
+                <a:solidFill>
+                  <a:srgbClr val="4CAF7D"/>
+                </a:solidFill>
+                <a:latin typeface="Times New Roman"/>
+              </a:rPr>
+              <a:t>▪   </a:t>
+            </a:r>
+            <a:r>
+              <a:rPr sz="1600" b="0" i="0">
+                <a:solidFill>
+                  <a:srgbClr val="ECEFF4"/>
+                </a:solidFill>
+                <a:latin typeface="Times New Roman"/>
+              </a:rPr>
+              <a:t>The laboratory used GRCh37 with the vendor's closed software; this pipeline used GRCh38 with three open callers.</a:t>
+            </a:r>
+          </a:p>
+          <a:p>
+            <a:pPr>
+              <a:spcAft>
+                <a:spcPts val="1100"/>
+              </a:spcAft>
+            </a:pPr>
+            <a:r>
+              <a:rPr sz="1600" b="0" i="0">
+                <a:solidFill>
+                  <a:srgbClr val="4CAF7D"/>
+                </a:solidFill>
+                <a:latin typeface="Times New Roman"/>
+              </a:rPr>
+              <a:t>▪   </a:t>
+            </a:r>
+            <a:r>
+              <a:rPr sz="1600" b="0" i="0">
+                <a:solidFill>
+                  <a:srgbClr val="ECEFF4"/>
+                </a:solidFill>
+                <a:latin typeface="Times New Roman"/>
+              </a:rPr>
+              <a:t>Primer clipping alone moved the estimate from 0.2636 to 0.2814 — measured, not assumed.</a:t>
+            </a:r>
+          </a:p>
+        </p:txBody>
+      </p:sp>
+      <p:sp>
+        <p:nvSpPr>
+          <p:cNvPr id="19" name="TextBox 18"/>
+          <p:cNvSpPr txBox="1"/>
+          <p:nvPr/>
+        </p:nvSpPr>
+        <p:spPr>
+          <a:xfrm>
+            <a:off x="10607040" y="6382512"/>
+            <a:ext cx="1097280" cy="320040"/>
+          </a:xfrm>
+          <a:prstGeom prst="rect">
+            <a:avLst/>
+          </a:prstGeom>
+          <a:noFill/>
+        </p:spPr>
+        <p:txBody>
+          <a:bodyPr wrap="square">
+            <a:spAutoFit/>
+          </a:bodyPr>
+          <a:lstStyle/>
+          <a:p>
+            <a:pPr algn="r"/>
+            <a:r>
+              <a:rPr sz="1000" b="0" i="0">
+                <a:solidFill>
+                  <a:srgbClr val="9AA4B2"/>
+                </a:solidFill>
+                <a:latin typeface="Times New Roman"/>
+              </a:rPr>
+              <a:t>10 / 18</a:t>
             </a:r>
           </a:p>
         </p:txBody>
@@ -3476,14 +4145,58 @@
       <p:grpSpPr/>
       <p:sp>
         <p:nvSpPr>
-          <p:cNvPr id="2" name="TextBox 1"/>
+          <p:cNvPr id="2" name="Rectangle 1"/>
+          <p:cNvSpPr/>
+          <p:nvPr/>
+        </p:nvSpPr>
+        <p:spPr>
+          <a:xfrm>
+            <a:off x="0" y="0"/>
+            <a:ext cx="12191695" cy="6858000"/>
+          </a:xfrm>
+          <a:prstGeom prst="rect">
+            <a:avLst/>
+          </a:prstGeom>
+          <a:solidFill>
+            <a:srgbClr val="0E1117"/>
+          </a:solidFill>
+          <a:ln>
+            <a:noFill/>
+          </a:ln>
+          <a:effectLst/>
+        </p:spPr>
+        <p:style>
+          <a:lnRef idx="1">
+            <a:schemeClr val="accent1"/>
+          </a:lnRef>
+          <a:fillRef idx="3">
+            <a:schemeClr val="accent1"/>
+          </a:fillRef>
+          <a:effectRef idx="2">
+            <a:schemeClr val="accent1"/>
+          </a:effectRef>
+          <a:fontRef idx="minor">
+            <a:schemeClr val="lt1"/>
+          </a:fontRef>
+        </p:style>
+        <p:txBody>
+          <a:bodyPr rtlCol="0" anchor="ctr"/>
+          <a:lstStyle/>
+          <a:p>
+            <a:pPr algn="ctr"/>
+          </a:p>
+        </p:txBody>
+      </p:sp>
+      <p:sp>
+        <p:nvSpPr>
+          <p:cNvPr id="3" name="TextBox 2"/>
           <p:cNvSpPr txBox="1"/>
           <p:nvPr/>
         </p:nvSpPr>
         <p:spPr>
           <a:xfrm>
-            <a:off x="548640" y="320040"/>
-            <a:ext cx="11064240" cy="822960"/>
+            <a:off x="685800" y="292608"/>
+            <a:ext cx="10789920" cy="274320"/>
           </a:xfrm>
           <a:prstGeom prst="rect">
             <a:avLst/>
@@ -3497,38 +4210,27 @@
           <a:lstStyle/>
           <a:p>
             <a:r>
-              <a:rPr sz="3000" b="1" i="0">
-                <a:solidFill>
-                  <a:srgbClr val="1F4E79"/>
-                </a:solidFill>
-                <a:latin typeface="Times New Roman"/>
-              </a:rPr>
-              <a:t>What this data cannot tell us</a:t>
-            </a:r>
-          </a:p>
-          <a:p>
-            <a:r>
-              <a:rPr sz="1500" b="0" i="1">
-                <a:solidFill>
-                  <a:srgbClr val="555555"/>
-                </a:solidFill>
-                <a:latin typeface="Times New Roman"/>
-              </a:rPr>
-              <a:t>The limits are the point, not a disclaimer</a:t>
-            </a:r>
-          </a:p>
-        </p:txBody>
-      </p:sp>
-      <p:sp>
-        <p:nvSpPr>
-          <p:cNvPr id="3" name="TextBox 2"/>
+              <a:rPr sz="1100" b="1" i="0">
+                <a:solidFill>
+                  <a:srgbClr val="4CAF7D"/>
+                </a:solidFill>
+                <a:latin typeface="Times New Roman"/>
+              </a:rPr>
+              <a:t>DASHBOARD · VARIANTS</a:t>
+            </a:r>
+          </a:p>
+        </p:txBody>
+      </p:sp>
+      <p:sp>
+        <p:nvSpPr>
+          <p:cNvPr id="4" name="TextBox 3"/>
           <p:cNvSpPr txBox="1"/>
           <p:nvPr/>
         </p:nvSpPr>
         <p:spPr>
           <a:xfrm>
-            <a:off x="685800" y="1645920"/>
-            <a:ext cx="10881360" cy="4937760"/>
+            <a:off x="685800" y="548640"/>
+            <a:ext cx="10789920" cy="530352"/>
           </a:xfrm>
           <a:prstGeom prst="rect">
             <a:avLst/>
@@ -3541,83 +4243,152 @@
           </a:bodyPr>
           <a:lstStyle/>
           <a:p>
-            <a:pPr>
-              <a:spcAft>
-                <a:spcPts val="600"/>
-              </a:spcAft>
-            </a:pPr>
-            <a:r>
-              <a:rPr sz="1700" b="0" i="0">
-                <a:solidFill>
-                  <a:srgbClr val="1A1A1A"/>
-                </a:solidFill>
-                <a:latin typeface="Times New Roman"/>
-              </a:rPr>
-              <a:t>•  Whether a variant is inherited — no normal tissue was sequenced.</a:t>
-            </a:r>
-          </a:p>
-          <a:p>
-            <a:pPr>
-              <a:spcAft>
-                <a:spcPts val="600"/>
-              </a:spcAft>
-            </a:pPr>
-            <a:r>
-              <a:rPr sz="1700" b="0" i="0">
-                <a:solidFill>
-                  <a:srgbClr val="1A1A1A"/>
-                </a:solidFill>
-                <a:latin typeface="Times New Roman"/>
-              </a:rPr>
-              <a:t>•  Roughly half of the nominal target territory had no coverage at all.</a:t>
-            </a:r>
-          </a:p>
-          <a:p>
-            <a:pPr>
-              <a:spcAft>
-                <a:spcPts val="600"/>
-              </a:spcAft>
-            </a:pPr>
-            <a:r>
-              <a:rPr sz="1700" b="0" i="0">
-                <a:solidFill>
-                  <a:srgbClr val="1A1A1A"/>
-                </a:solidFill>
-                <a:latin typeface="Times New Roman"/>
-              </a:rPr>
-              <a:t>•  Genes frequently mutated in this cancer type are absent from the panel entirely: a negative there is an untested region, not an absence of mutation.</a:t>
-            </a:r>
-          </a:p>
-          <a:p>
-            <a:pPr>
-              <a:spcAft>
-                <a:spcPts val="600"/>
-              </a:spcAft>
-            </a:pPr>
-            <a:r>
-              <a:rPr sz="1700" b="0" i="0">
-                <a:solidFill>
-                  <a:srgbClr val="1A1A1A"/>
-                </a:solidFill>
-                <a:latin typeface="Times New Roman"/>
-              </a:rPr>
-              <a:t>•  Mutational burden: 115.18 → 47.12 per Mb after screening; both implausible for this tumour type, and the assessable territory is far too small.</a:t>
-            </a:r>
-          </a:p>
-          <a:p>
-            <a:pPr>
-              <a:spcAft>
-                <a:spcPts val="600"/>
-              </a:spcAft>
-            </a:pPr>
-            <a:r>
-              <a:rPr sz="1700" b="0" i="0">
-                <a:solidFill>
-                  <a:srgbClr val="1A1A1A"/>
-                </a:solidFill>
-                <a:latin typeface="Times New Roman"/>
-              </a:rPr>
-              <a:t>•  Microsatellite status: not determinable — as the accredited laboratory also concluded.</a:t>
+            <a:r>
+              <a:rPr sz="2500" b="1" i="0">
+                <a:solidFill>
+                  <a:srgbClr val="ECEFF4"/>
+                </a:solidFill>
+                <a:latin typeface="Times New Roman"/>
+              </a:rPr>
+              <a:t>Every call keeps the reason it was classified</a:t>
+            </a:r>
+          </a:p>
+        </p:txBody>
+      </p:sp>
+      <p:pic>
+        <p:nvPicPr>
+          <p:cNvPr id="5" name="Picture 4" descr="crop_03_variants.png"/>
+          <p:cNvPicPr>
+            <a:picLocks noChangeAspect="1"/>
+          </p:cNvPicPr>
+          <p:nvPr/>
+        </p:nvPicPr>
+        <p:blipFill>
+          <a:blip r:embed="rId2"/>
+          <a:stretch>
+            <a:fillRect/>
+          </a:stretch>
+        </p:blipFill>
+        <p:spPr>
+          <a:xfrm>
+            <a:off x="777240" y="1512102"/>
+            <a:ext cx="10607040" cy="4117259"/>
+          </a:xfrm>
+          <a:prstGeom prst="rect">
+            <a:avLst/>
+          </a:prstGeom>
+        </p:spPr>
+      </p:pic>
+      <p:sp>
+        <p:nvSpPr>
+          <p:cNvPr id="6" name="Rectangle 5"/>
+          <p:cNvSpPr/>
+          <p:nvPr/>
+        </p:nvSpPr>
+        <p:spPr>
+          <a:xfrm>
+            <a:off x="777240" y="1512102"/>
+            <a:ext cx="10607040" cy="4117259"/>
+          </a:xfrm>
+          <a:prstGeom prst="rect">
+            <a:avLst/>
+          </a:prstGeom>
+          <a:noFill/>
+          <a:ln w="15875">
+            <a:solidFill>
+              <a:srgbClr val="181D27"/>
+            </a:solidFill>
+          </a:ln>
+          <a:effectLst/>
+        </p:spPr>
+        <p:style>
+          <a:lnRef idx="1">
+            <a:schemeClr val="accent1"/>
+          </a:lnRef>
+          <a:fillRef idx="3">
+            <a:schemeClr val="accent1"/>
+          </a:fillRef>
+          <a:effectRef idx="2">
+            <a:schemeClr val="accent1"/>
+          </a:effectRef>
+          <a:fontRef idx="minor">
+            <a:schemeClr val="lt1"/>
+          </a:fontRef>
+        </p:style>
+        <p:txBody>
+          <a:bodyPr rtlCol="0" anchor="ctr"/>
+          <a:lstStyle/>
+          <a:p>
+            <a:pPr algn="ctr"/>
+          </a:p>
+        </p:txBody>
+      </p:sp>
+      <p:sp>
+        <p:nvSpPr>
+          <p:cNvPr id="7" name="TextBox 6"/>
+          <p:cNvSpPr txBox="1"/>
+          <p:nvPr/>
+        </p:nvSpPr>
+        <p:spPr>
+          <a:xfrm>
+            <a:off x="777240" y="6007608"/>
+            <a:ext cx="10607040" cy="384048"/>
+          </a:xfrm>
+          <a:prstGeom prst="rect">
+            <a:avLst/>
+          </a:prstGeom>
+          <a:noFill/>
+        </p:spPr>
+        <p:txBody>
+          <a:bodyPr wrap="square">
+            <a:spAutoFit/>
+          </a:bodyPr>
+          <a:lstStyle/>
+          <a:p>
+            <a:pPr algn="ctr"/>
+            <a:r>
+              <a:rPr sz="1150" b="0" i="1">
+                <a:solidFill>
+                  <a:srgbClr val="9AA4B2"/>
+                </a:solidFill>
+                <a:latin typeface="Times New Roman"/>
+              </a:rPr>
+              <a:t>39 likely somatic, 136 likely germline, 1,543 with insufficient evidence — nothing is silently deleted.</a:t>
+            </a:r>
+          </a:p>
+        </p:txBody>
+      </p:sp>
+      <p:sp>
+        <p:nvSpPr>
+          <p:cNvPr id="8" name="TextBox 7"/>
+          <p:cNvSpPr txBox="1"/>
+          <p:nvPr/>
+        </p:nvSpPr>
+        <p:spPr>
+          <a:xfrm>
+            <a:off x="10607040" y="6382512"/>
+            <a:ext cx="1097280" cy="320040"/>
+          </a:xfrm>
+          <a:prstGeom prst="rect">
+            <a:avLst/>
+          </a:prstGeom>
+          <a:noFill/>
+        </p:spPr>
+        <p:txBody>
+          <a:bodyPr wrap="square">
+            <a:spAutoFit/>
+          </a:bodyPr>
+          <a:lstStyle/>
+          <a:p>
+            <a:pPr algn="r"/>
+            <a:r>
+              <a:rPr sz="1000" b="0" i="0">
+                <a:solidFill>
+                  <a:srgbClr val="9AA4B2"/>
+                </a:solidFill>
+                <a:latin typeface="Times New Roman"/>
+              </a:rPr>
+              <a:t>11 / 18</a:t>
             </a:r>
           </a:p>
         </p:txBody>
@@ -3642,14 +4413,58 @@
       <p:grpSpPr/>
       <p:sp>
         <p:nvSpPr>
-          <p:cNvPr id="2" name="TextBox 1"/>
+          <p:cNvPr id="2" name="Rectangle 1"/>
+          <p:cNvSpPr/>
+          <p:nvPr/>
+        </p:nvSpPr>
+        <p:spPr>
+          <a:xfrm>
+            <a:off x="0" y="0"/>
+            <a:ext cx="12191695" cy="6858000"/>
+          </a:xfrm>
+          <a:prstGeom prst="rect">
+            <a:avLst/>
+          </a:prstGeom>
+          <a:solidFill>
+            <a:srgbClr val="0E1117"/>
+          </a:solidFill>
+          <a:ln>
+            <a:noFill/>
+          </a:ln>
+          <a:effectLst/>
+        </p:spPr>
+        <p:style>
+          <a:lnRef idx="1">
+            <a:schemeClr val="accent1"/>
+          </a:lnRef>
+          <a:fillRef idx="3">
+            <a:schemeClr val="accent1"/>
+          </a:fillRef>
+          <a:effectRef idx="2">
+            <a:schemeClr val="accent1"/>
+          </a:effectRef>
+          <a:fontRef idx="minor">
+            <a:schemeClr val="lt1"/>
+          </a:fontRef>
+        </p:style>
+        <p:txBody>
+          <a:bodyPr rtlCol="0" anchor="ctr"/>
+          <a:lstStyle/>
+          <a:p>
+            <a:pPr algn="ctr"/>
+          </a:p>
+        </p:txBody>
+      </p:sp>
+      <p:sp>
+        <p:nvSpPr>
+          <p:cNvPr id="3" name="TextBox 2"/>
           <p:cNvSpPr txBox="1"/>
           <p:nvPr/>
         </p:nvSpPr>
         <p:spPr>
           <a:xfrm>
-            <a:off x="548640" y="320040"/>
-            <a:ext cx="11064240" cy="822960"/>
+            <a:off x="685800" y="384048"/>
+            <a:ext cx="10789920" cy="320040"/>
           </a:xfrm>
           <a:prstGeom prst="rect">
             <a:avLst/>
@@ -3663,27 +4478,27 @@
           <a:lstStyle/>
           <a:p>
             <a:r>
-              <a:rPr sz="3000" b="1" i="0">
-                <a:solidFill>
-                  <a:srgbClr val="1F4E79"/>
-                </a:solidFill>
-                <a:latin typeface="Times New Roman"/>
-              </a:rPr>
-              <a:t>Deliverables</a:t>
-            </a:r>
-          </a:p>
-        </p:txBody>
-      </p:sp>
-      <p:sp>
-        <p:nvSpPr>
-          <p:cNvPr id="3" name="TextBox 2"/>
+              <a:rPr sz="1200" b="1" i="0">
+                <a:solidFill>
+                  <a:srgbClr val="D89B3C"/>
+                </a:solidFill>
+                <a:latin typeface="Times New Roman"/>
+              </a:rPr>
+              <a:t>INTERPRETATION</a:t>
+            </a:r>
+          </a:p>
+        </p:txBody>
+      </p:sp>
+      <p:sp>
+        <p:nvSpPr>
+          <p:cNvPr id="4" name="TextBox 3"/>
           <p:cNvSpPr txBox="1"/>
           <p:nvPr/>
         </p:nvSpPr>
         <p:spPr>
           <a:xfrm>
-            <a:off x="685800" y="1600200"/>
-            <a:ext cx="10881360" cy="4937760"/>
+            <a:off x="685800" y="713232"/>
+            <a:ext cx="10789920" cy="777240"/>
           </a:xfrm>
           <a:prstGeom prst="rect">
             <a:avLst/>
@@ -3696,129 +4511,116 @@
           </a:bodyPr>
           <a:lstStyle/>
           <a:p>
-            <a:pPr>
-              <a:spcAft>
-                <a:spcPts val="600"/>
-              </a:spcAft>
-            </a:pPr>
-            <a:r>
-              <a:rPr sz="1700" b="0" i="0">
-                <a:solidFill>
-                  <a:srgbClr val="1A1A1A"/>
-                </a:solidFill>
-                <a:latin typeface="Times New Roman"/>
-              </a:rPr>
-              <a:t>•  Reproducible Snakemake + Bioconda pipeline, two execution modes (local example, Galaxy patient).</a:t>
-            </a:r>
-          </a:p>
-          <a:p>
-            <a:pPr>
-              <a:spcAft>
-                <a:spcPts val="600"/>
-              </a:spcAft>
-            </a:pPr>
-            <a:r>
-              <a:rPr sz="1700" b="0" i="0">
-                <a:solidFill>
-                  <a:srgbClr val="1A1A1A"/>
-                </a:solidFill>
-                <a:latin typeface="Times New Roman"/>
-              </a:rPr>
-              <a:t>•  Public repository with setup instructions and worked examples.</a:t>
-            </a:r>
-          </a:p>
-          <a:p>
-            <a:pPr>
-              <a:spcAft>
-                <a:spcPts val="600"/>
-              </a:spcAft>
-            </a:pPr>
-            <a:r>
-              <a:rPr sz="1700" b="0" i="0">
-                <a:solidFill>
-                  <a:srgbClr val="1A1A1A"/>
-                </a:solidFill>
-                <a:latin typeface="Times New Roman"/>
-              </a:rPr>
-              <a:t>•  Synthetic example dataset built over a real mini-reference, with a truth set — the whole workflow runs and is tested without any patient data.</a:t>
-            </a:r>
-          </a:p>
-          <a:p>
-            <a:pPr>
-              <a:spcAft>
-                <a:spcPts val="600"/>
-              </a:spcAft>
-            </a:pPr>
-            <a:r>
-              <a:rPr sz="1700" b="0" i="0">
-                <a:solidFill>
-                  <a:srgbClr val="1A1A1A"/>
-                </a:solidFill>
-                <a:latin typeface="Times New Roman"/>
-              </a:rPr>
-              <a:t>•  38 automated tests and continuous integration.</a:t>
-            </a:r>
-          </a:p>
-          <a:p>
-            <a:pPr>
-              <a:spcAft>
-                <a:spcPts val="600"/>
-              </a:spcAft>
-            </a:pPr>
-            <a:r>
-              <a:rPr sz="1700" b="0" i="0">
-                <a:solidFill>
-                  <a:srgbClr val="1A1A1A"/>
-                </a:solidFill>
-                <a:latin typeface="Times New Roman"/>
-              </a:rPr>
-              <a:t>•  Six-page interactive dashboard.</a:t>
-            </a:r>
-          </a:p>
-          <a:p>
-            <a:pPr>
-              <a:spcAft>
-                <a:spcPts val="600"/>
-              </a:spcAft>
-            </a:pPr>
-            <a:r>
-              <a:rPr sz="1700" b="0" i="0">
-                <a:solidFill>
-                  <a:srgbClr val="1A1A1A"/>
-                </a:solidFill>
-                <a:latin typeface="Times New Roman"/>
-              </a:rPr>
-              <a:t>•  Fourteen documentation pages: what each step measures, what it means, how it misleads.</a:t>
-            </a:r>
-          </a:p>
-          <a:p>
-            <a:pPr>
-              <a:spcAft>
-                <a:spcPts val="600"/>
-              </a:spcAft>
-            </a:pPr>
-            <a:r>
-              <a:rPr sz="1700" b="0" i="0">
-                <a:solidFill>
-                  <a:srgbClr val="1A1A1A"/>
-                </a:solidFill>
-                <a:latin typeface="Times New Roman"/>
-              </a:rPr>
-              <a:t>•  Validation against an accredited laboratory report.</a:t>
-            </a:r>
-          </a:p>
-        </p:txBody>
-      </p:sp>
-      <p:sp>
-        <p:nvSpPr>
-          <p:cNvPr id="4" name="TextBox 3"/>
+            <a:r>
+              <a:rPr sz="3000" b="1" i="0">
+                <a:solidFill>
+                  <a:srgbClr val="ECEFF4"/>
+                </a:solidFill>
+                <a:latin typeface="Times New Roman"/>
+              </a:rPr>
+              <a:t>Where the two disagree</a:t>
+            </a:r>
+          </a:p>
+        </p:txBody>
+      </p:sp>
+      <p:sp>
+        <p:nvSpPr>
+          <p:cNvPr id="5" name="Rectangle 4"/>
+          <p:cNvSpPr/>
+          <p:nvPr/>
+        </p:nvSpPr>
+        <p:spPr>
+          <a:xfrm>
+            <a:off x="713232" y="1554480"/>
+            <a:ext cx="1371600" cy="41148"/>
+          </a:xfrm>
+          <a:prstGeom prst="rect">
+            <a:avLst/>
+          </a:prstGeom>
+          <a:solidFill>
+            <a:srgbClr val="D89B3C"/>
+          </a:solidFill>
+          <a:ln>
+            <a:noFill/>
+          </a:ln>
+          <a:effectLst/>
+        </p:spPr>
+        <p:style>
+          <a:lnRef idx="1">
+            <a:schemeClr val="accent1"/>
+          </a:lnRef>
+          <a:fillRef idx="3">
+            <a:schemeClr val="accent1"/>
+          </a:fillRef>
+          <a:effectRef idx="2">
+            <a:schemeClr val="accent1"/>
+          </a:effectRef>
+          <a:fontRef idx="minor">
+            <a:schemeClr val="lt1"/>
+          </a:fontRef>
+        </p:style>
+        <p:txBody>
+          <a:bodyPr rtlCol="0" anchor="ctr"/>
+          <a:lstStyle/>
+          <a:p>
+            <a:pPr algn="ctr"/>
+          </a:p>
+        </p:txBody>
+      </p:sp>
+      <p:sp>
+        <p:nvSpPr>
+          <p:cNvPr id="6" name="Rectangle 5"/>
+          <p:cNvSpPr/>
+          <p:nvPr/>
+        </p:nvSpPr>
+        <p:spPr>
+          <a:xfrm>
+            <a:off x="685800" y="1856232"/>
+            <a:ext cx="5257800" cy="1325880"/>
+          </a:xfrm>
+          <a:prstGeom prst="rect">
+            <a:avLst/>
+          </a:prstGeom>
+          <a:solidFill>
+            <a:srgbClr val="181D27"/>
+          </a:solidFill>
+          <a:ln>
+            <a:noFill/>
+          </a:ln>
+          <a:effectLst/>
+        </p:spPr>
+        <p:style>
+          <a:lnRef idx="1">
+            <a:schemeClr val="accent1"/>
+          </a:lnRef>
+          <a:fillRef idx="3">
+            <a:schemeClr val="accent1"/>
+          </a:fillRef>
+          <a:effectRef idx="2">
+            <a:schemeClr val="accent1"/>
+          </a:effectRef>
+          <a:fontRef idx="minor">
+            <a:schemeClr val="lt1"/>
+          </a:fontRef>
+        </p:style>
+        <p:txBody>
+          <a:bodyPr rtlCol="0" anchor="ctr"/>
+          <a:lstStyle/>
+          <a:p>
+            <a:pPr algn="ctr"/>
+          </a:p>
+        </p:txBody>
+      </p:sp>
+      <p:sp>
+        <p:nvSpPr>
+          <p:cNvPr id="7" name="TextBox 6"/>
           <p:cNvSpPr txBox="1"/>
           <p:nvPr/>
         </p:nvSpPr>
         <p:spPr>
           <a:xfrm>
-            <a:off x="685800" y="5852160"/>
-            <a:ext cx="10881360" cy="502920"/>
+            <a:off x="914400" y="2039112"/>
+            <a:ext cx="4846320" cy="1097280"/>
           </a:xfrm>
           <a:prstGeom prst="rect">
             <a:avLst/>
@@ -3832,13 +4634,246 @@
           <a:lstStyle/>
           <a:p>
             <a:r>
-              <a:rPr sz="1300" b="0" i="1">
-                <a:solidFill>
-                  <a:srgbClr val="C00000"/>
-                </a:solidFill>
-                <a:latin typeface="Times New Roman"/>
-              </a:rPr>
-              <a:t>[TO COMPLETE] Insert the repository URL</a:t>
+              <a:rPr sz="2000" b="1" i="0">
+                <a:solidFill>
+                  <a:srgbClr val="ECEFF4"/>
+                </a:solidFill>
+                <a:latin typeface="Times New Roman"/>
+              </a:rPr>
+              <a:t>Laboratory:  Tier I-A</a:t>
+            </a:r>
+          </a:p>
+          <a:p>
+            <a:r>
+              <a:rPr sz="1300" b="0" i="0">
+                <a:solidFill>
+                  <a:srgbClr val="9AA4B2"/>
+                </a:solidFill>
+                <a:latin typeface="Times New Roman"/>
+              </a:rPr>
+              <a:t>cited a clinical guideline for this tumour type</a:t>
+            </a:r>
+          </a:p>
+        </p:txBody>
+      </p:sp>
+      <p:sp>
+        <p:nvSpPr>
+          <p:cNvPr id="8" name="Rectangle 7"/>
+          <p:cNvSpPr/>
+          <p:nvPr/>
+        </p:nvSpPr>
+        <p:spPr>
+          <a:xfrm>
+            <a:off x="6217920" y="1856232"/>
+            <a:ext cx="5257800" cy="1325880"/>
+          </a:xfrm>
+          <a:prstGeom prst="rect">
+            <a:avLst/>
+          </a:prstGeom>
+          <a:solidFill>
+            <a:srgbClr val="181D27"/>
+          </a:solidFill>
+          <a:ln>
+            <a:noFill/>
+          </a:ln>
+          <a:effectLst/>
+        </p:spPr>
+        <p:style>
+          <a:lnRef idx="1">
+            <a:schemeClr val="accent1"/>
+          </a:lnRef>
+          <a:fillRef idx="3">
+            <a:schemeClr val="accent1"/>
+          </a:fillRef>
+          <a:effectRef idx="2">
+            <a:schemeClr val="accent1"/>
+          </a:effectRef>
+          <a:fontRef idx="minor">
+            <a:schemeClr val="lt1"/>
+          </a:fontRef>
+        </p:style>
+        <p:txBody>
+          <a:bodyPr rtlCol="0" anchor="ctr"/>
+          <a:lstStyle/>
+          <a:p>
+            <a:pPr algn="ctr"/>
+          </a:p>
+        </p:txBody>
+      </p:sp>
+      <p:sp>
+        <p:nvSpPr>
+          <p:cNvPr id="9" name="TextBox 8"/>
+          <p:cNvSpPr txBox="1"/>
+          <p:nvPr/>
+        </p:nvSpPr>
+        <p:spPr>
+          <a:xfrm>
+            <a:off x="6446520" y="2039112"/>
+            <a:ext cx="4846320" cy="1097280"/>
+          </a:xfrm>
+          <a:prstGeom prst="rect">
+            <a:avLst/>
+          </a:prstGeom>
+          <a:noFill/>
+        </p:spPr>
+        <p:txBody>
+          <a:bodyPr wrap="square">
+            <a:spAutoFit/>
+          </a:bodyPr>
+          <a:lstStyle/>
+          <a:p>
+            <a:r>
+              <a:rPr sz="2000" b="1" i="0">
+                <a:solidFill>
+                  <a:srgbClr val="D89B3C"/>
+                </a:solidFill>
+                <a:latin typeface="Times New Roman"/>
+              </a:rPr>
+              <a:t>This pipeline:  Tier II</a:t>
+            </a:r>
+          </a:p>
+          <a:p>
+            <a:r>
+              <a:rPr sz="1300" b="0" i="0">
+                <a:solidFill>
+                  <a:srgbClr val="9AA4B2"/>
+                </a:solidFill>
+                <a:latin typeface="Times New Roman"/>
+              </a:rPr>
+              <a:t>open evidence exists only for other tumour types</a:t>
+            </a:r>
+          </a:p>
+        </p:txBody>
+      </p:sp>
+      <p:sp>
+        <p:nvSpPr>
+          <p:cNvPr id="10" name="TextBox 9"/>
+          <p:cNvSpPr txBox="1"/>
+          <p:nvPr/>
+        </p:nvSpPr>
+        <p:spPr>
+          <a:xfrm>
+            <a:off x="777240" y="3502152"/>
+            <a:ext cx="10607040" cy="2807208"/>
+          </a:xfrm>
+          <a:prstGeom prst="rect">
+            <a:avLst/>
+          </a:prstGeom>
+          <a:noFill/>
+        </p:spPr>
+        <p:txBody>
+          <a:bodyPr wrap="square">
+            <a:spAutoFit/>
+          </a:bodyPr>
+          <a:lstStyle/>
+          <a:p>
+            <a:pPr>
+              <a:spcAft>
+                <a:spcPts val="1100"/>
+              </a:spcAft>
+            </a:pPr>
+            <a:r>
+              <a:rPr sz="1600" b="0" i="0">
+                <a:solidFill>
+                  <a:srgbClr val="D89B3C"/>
+                </a:solidFill>
+                <a:latin typeface="Times New Roman"/>
+              </a:rPr>
+              <a:t>▪   </a:t>
+            </a:r>
+            <a:r>
+              <a:rPr sz="1600" b="0" i="0">
+                <a:solidFill>
+                  <a:srgbClr val="ECEFF4"/>
+                </a:solidFill>
+                <a:latin typeface="Times New Roman"/>
+              </a:rPr>
+              <a:t>Both are defensible. The tiering rule refuses Tier I on evidence from a different disease — which is what the AMP/ASCO/CAP guideline requires.</a:t>
+            </a:r>
+          </a:p>
+          <a:p>
+            <a:pPr>
+              <a:spcAft>
+                <a:spcPts val="1100"/>
+              </a:spcAft>
+            </a:pPr>
+            <a:r>
+              <a:rPr sz="1600" b="0" i="0">
+                <a:solidFill>
+                  <a:srgbClr val="D89B3C"/>
+                </a:solidFill>
+                <a:latin typeface="Times New Roman"/>
+              </a:rPr>
+              <a:t>▪   </a:t>
+            </a:r>
+            <a:r>
+              <a:rPr sz="1600" b="0" i="0">
+                <a:solidFill>
+                  <a:srgbClr val="ECEFF4"/>
+                </a:solidFill>
+                <a:latin typeface="Times New Roman"/>
+              </a:rPr>
+              <a:t>The gap measures the uneven tumour-type coverage of free knowledge bases, not a disagreement about biology.</a:t>
+            </a:r>
+          </a:p>
+          <a:p>
+            <a:pPr>
+              <a:spcAft>
+                <a:spcPts val="1100"/>
+              </a:spcAft>
+            </a:pPr>
+            <a:r>
+              <a:rPr sz="1600" b="0" i="0">
+                <a:solidFill>
+                  <a:srgbClr val="D89B3C"/>
+                </a:solidFill>
+                <a:latin typeface="Times New Roman"/>
+              </a:rPr>
+              <a:t>▪   </a:t>
+            </a:r>
+            <a:r>
+              <a:rPr sz="1600" b="0" i="0">
+                <a:solidFill>
+                  <a:srgbClr val="ECEFF4"/>
+                </a:solidFill>
+                <a:latin typeface="Times New Roman"/>
+              </a:rPr>
+              <a:t>This is the project's clearest argument for why automated tiering needs curated knowledge or expert review.</a:t>
+            </a:r>
+          </a:p>
+        </p:txBody>
+      </p:sp>
+      <p:sp>
+        <p:nvSpPr>
+          <p:cNvPr id="11" name="TextBox 10"/>
+          <p:cNvSpPr txBox="1"/>
+          <p:nvPr/>
+        </p:nvSpPr>
+        <p:spPr>
+          <a:xfrm>
+            <a:off x="10607040" y="6382512"/>
+            <a:ext cx="1097280" cy="320040"/>
+          </a:xfrm>
+          <a:prstGeom prst="rect">
+            <a:avLst/>
+          </a:prstGeom>
+          <a:noFill/>
+        </p:spPr>
+        <p:txBody>
+          <a:bodyPr wrap="square">
+            <a:spAutoFit/>
+          </a:bodyPr>
+          <a:lstStyle/>
+          <a:p>
+            <a:pPr algn="r"/>
+            <a:r>
+              <a:rPr sz="1000" b="0" i="0">
+                <a:solidFill>
+                  <a:srgbClr val="9AA4B2"/>
+                </a:solidFill>
+                <a:latin typeface="Times New Roman"/>
+              </a:rPr>
+              <a:t>12 / 18</a:t>
             </a:r>
           </a:p>
         </p:txBody>
@@ -3863,14 +4898,58 @@
       <p:grpSpPr/>
       <p:sp>
         <p:nvSpPr>
-          <p:cNvPr id="2" name="TextBox 1"/>
+          <p:cNvPr id="2" name="Rectangle 1"/>
+          <p:cNvSpPr/>
+          <p:nvPr/>
+        </p:nvSpPr>
+        <p:spPr>
+          <a:xfrm>
+            <a:off x="0" y="0"/>
+            <a:ext cx="12191695" cy="6858000"/>
+          </a:xfrm>
+          <a:prstGeom prst="rect">
+            <a:avLst/>
+          </a:prstGeom>
+          <a:solidFill>
+            <a:srgbClr val="0E1117"/>
+          </a:solidFill>
+          <a:ln>
+            <a:noFill/>
+          </a:ln>
+          <a:effectLst/>
+        </p:spPr>
+        <p:style>
+          <a:lnRef idx="1">
+            <a:schemeClr val="accent1"/>
+          </a:lnRef>
+          <a:fillRef idx="3">
+            <a:schemeClr val="accent1"/>
+          </a:fillRef>
+          <a:effectRef idx="2">
+            <a:schemeClr val="accent1"/>
+          </a:effectRef>
+          <a:fontRef idx="minor">
+            <a:schemeClr val="lt1"/>
+          </a:fontRef>
+        </p:style>
+        <p:txBody>
+          <a:bodyPr rtlCol="0" anchor="ctr"/>
+          <a:lstStyle/>
+          <a:p>
+            <a:pPr algn="ctr"/>
+          </a:p>
+        </p:txBody>
+      </p:sp>
+      <p:sp>
+        <p:nvSpPr>
+          <p:cNvPr id="3" name="TextBox 2"/>
           <p:cNvSpPr txBox="1"/>
           <p:nvPr/>
         </p:nvSpPr>
         <p:spPr>
           <a:xfrm>
-            <a:off x="548640" y="320040"/>
-            <a:ext cx="11064240" cy="822960"/>
+            <a:off x="685800" y="384048"/>
+            <a:ext cx="10789920" cy="320040"/>
           </a:xfrm>
           <a:prstGeom prst="rect">
             <a:avLst/>
@@ -3884,27 +4963,27 @@
           <a:lstStyle/>
           <a:p>
             <a:r>
-              <a:rPr sz="3000" b="1" i="0">
-                <a:solidFill>
-                  <a:srgbClr val="1F4E79"/>
-                </a:solidFill>
-                <a:latin typeface="Times New Roman"/>
-              </a:rPr>
-              <a:t>Conclusions</a:t>
-            </a:r>
-          </a:p>
-        </p:txBody>
-      </p:sp>
-      <p:sp>
-        <p:nvSpPr>
-          <p:cNvPr id="3" name="TextBox 2"/>
+              <a:rPr sz="1200" b="1" i="0">
+                <a:solidFill>
+                  <a:srgbClr val="C55A5A"/>
+                </a:solidFill>
+                <a:latin typeface="Times New Roman"/>
+              </a:rPr>
+              <a:t>QUALITY</a:t>
+            </a:r>
+          </a:p>
+        </p:txBody>
+      </p:sp>
+      <p:sp>
+        <p:nvSpPr>
+          <p:cNvPr id="4" name="TextBox 3"/>
           <p:cNvSpPr txBox="1"/>
           <p:nvPr/>
         </p:nvSpPr>
         <p:spPr>
           <a:xfrm>
-            <a:off x="685800" y="1737360"/>
-            <a:ext cx="10881360" cy="4937760"/>
+            <a:off x="685800" y="713232"/>
+            <a:ext cx="10789920" cy="777240"/>
           </a:xfrm>
           <a:prstGeom prst="rect">
             <a:avLst/>
@@ -3917,65 +4996,116 @@
           </a:bodyPr>
           <a:lstStyle/>
           <a:p>
-            <a:pPr>
-              <a:spcAft>
-                <a:spcPts val="600"/>
-              </a:spcAft>
-            </a:pPr>
-            <a:r>
-              <a:rPr sz="1900" b="0" i="0">
-                <a:solidFill>
-                  <a:srgbClr val="1A1A1A"/>
-                </a:solidFill>
-                <a:latin typeface="Times New Roman"/>
-              </a:rPr>
-              <a:t>•  An open pipeline, on a laptop plus a free public service, reproduced an accredited laboratory's finding to three decimal places.</a:t>
-            </a:r>
-          </a:p>
-          <a:p>
-            <a:pPr>
-              <a:spcAft>
-                <a:spcPts val="600"/>
-              </a:spcAft>
-            </a:pPr>
-            <a:r>
-              <a:rPr sz="1900" b="0" i="0">
-                <a:solidFill>
-                  <a:srgbClr val="1A1A1A"/>
-                </a:solidFill>
-                <a:latin typeface="Times New Roman"/>
-              </a:rPr>
-              <a:t>•  Every disagreement was explicable and measurable: evidence coverage, reporting thresholds, and one identifiable chemistry artefact.</a:t>
-            </a:r>
-          </a:p>
-          <a:p>
-            <a:pPr>
-              <a:spcAft>
-                <a:spcPts val="600"/>
-              </a:spcAft>
-            </a:pPr>
-            <a:r>
-              <a:rPr sz="1900" b="0" i="0">
-                <a:solidFill>
-                  <a:srgbClr val="1A1A1A"/>
-                </a:solidFill>
-                <a:latin typeface="Times New Roman"/>
-              </a:rPr>
-              <a:t>•  The most useful property is not the agreement but the capacity to state precisely where the answers stop — which is what makes it a teaching object rather than a black box.</a:t>
-            </a:r>
-          </a:p>
-        </p:txBody>
-      </p:sp>
-      <p:sp>
-        <p:nvSpPr>
-          <p:cNvPr id="4" name="TextBox 3"/>
+            <a:r>
+              <a:rPr sz="3000" b="1" i="0">
+                <a:solidFill>
+                  <a:srgbClr val="ECEFF4"/>
+                </a:solidFill>
+                <a:latin typeface="Times New Roman"/>
+              </a:rPr>
+              <a:t>One artefact with two faces</a:t>
+            </a:r>
+          </a:p>
+        </p:txBody>
+      </p:sp>
+      <p:sp>
+        <p:nvSpPr>
+          <p:cNvPr id="5" name="Rectangle 4"/>
+          <p:cNvSpPr/>
+          <p:nvPr/>
+        </p:nvSpPr>
+        <p:spPr>
+          <a:xfrm>
+            <a:off x="713232" y="1554480"/>
+            <a:ext cx="1371600" cy="41148"/>
+          </a:xfrm>
+          <a:prstGeom prst="rect">
+            <a:avLst/>
+          </a:prstGeom>
+          <a:solidFill>
+            <a:srgbClr val="C55A5A"/>
+          </a:solidFill>
+          <a:ln>
+            <a:noFill/>
+          </a:ln>
+          <a:effectLst/>
+        </p:spPr>
+        <p:style>
+          <a:lnRef idx="1">
+            <a:schemeClr val="accent1"/>
+          </a:lnRef>
+          <a:fillRef idx="3">
+            <a:schemeClr val="accent1"/>
+          </a:fillRef>
+          <a:effectRef idx="2">
+            <a:schemeClr val="accent1"/>
+          </a:effectRef>
+          <a:fontRef idx="minor">
+            <a:schemeClr val="lt1"/>
+          </a:fontRef>
+        </p:style>
+        <p:txBody>
+          <a:bodyPr rtlCol="0" anchor="ctr"/>
+          <a:lstStyle/>
+          <a:p>
+            <a:pPr algn="ctr"/>
+          </a:p>
+        </p:txBody>
+      </p:sp>
+      <p:sp>
+        <p:nvSpPr>
+          <p:cNvPr id="6" name="Rectangle 5"/>
+          <p:cNvSpPr/>
+          <p:nvPr/>
+        </p:nvSpPr>
+        <p:spPr>
+          <a:xfrm>
+            <a:off x="685800" y="1856232"/>
+            <a:ext cx="5257800" cy="1783080"/>
+          </a:xfrm>
+          <a:prstGeom prst="rect">
+            <a:avLst/>
+          </a:prstGeom>
+          <a:solidFill>
+            <a:srgbClr val="181D27"/>
+          </a:solidFill>
+          <a:ln>
+            <a:noFill/>
+          </a:ln>
+          <a:effectLst/>
+        </p:spPr>
+        <p:style>
+          <a:lnRef idx="1">
+            <a:schemeClr val="accent1"/>
+          </a:lnRef>
+          <a:fillRef idx="3">
+            <a:schemeClr val="accent1"/>
+          </a:fillRef>
+          <a:effectRef idx="2">
+            <a:schemeClr val="accent1"/>
+          </a:effectRef>
+          <a:fontRef idx="minor">
+            <a:schemeClr val="lt1"/>
+          </a:fontRef>
+        </p:style>
+        <p:txBody>
+          <a:bodyPr rtlCol="0" anchor="ctr"/>
+          <a:lstStyle/>
+          <a:p>
+            <a:pPr algn="ctr"/>
+          </a:p>
+        </p:txBody>
+      </p:sp>
+      <p:sp>
+        <p:nvSpPr>
+          <p:cNvPr id="7" name="TextBox 6"/>
           <p:cNvSpPr txBox="1"/>
           <p:nvPr/>
         </p:nvSpPr>
         <p:spPr>
           <a:xfrm>
-            <a:off x="685800" y="5394960"/>
-            <a:ext cx="10881360" cy="502920"/>
+            <a:off x="914400" y="2002536"/>
+            <a:ext cx="4846320" cy="1554480"/>
           </a:xfrm>
           <a:prstGeom prst="rect">
             <a:avLst/>
@@ -3989,13 +5119,2509 @@
           <a:lstStyle/>
           <a:p>
             <a:r>
-              <a:rPr sz="1500" b="0" i="1">
+              <a:rPr sz="1900" b="1" i="0">
+                <a:solidFill>
+                  <a:srgbClr val="C55A5A"/>
+                </a:solidFill>
+                <a:latin typeface="Times New Roman"/>
+              </a:rPr>
+              <a:t>DNA arm</a:t>
+            </a:r>
+          </a:p>
+          <a:p>
+            <a:pPr>
+              <a:spcBef>
+                <a:spcPts val="700"/>
+              </a:spcBef>
+            </a:pPr>
+            <a:r>
+              <a:rPr sz="1400" b="0" i="0">
+                <a:solidFill>
+                  <a:srgbClr val="ECEFF4"/>
+                </a:solidFill>
+                <a:latin typeface="Times New Roman"/>
+              </a:rPr>
+              <a:t>▪  58 % of somatic SNVs share one substitution class</a:t>
+            </a:r>
+          </a:p>
+          <a:p>
+            <a:pPr>
+              <a:spcBef>
+                <a:spcPts val="700"/>
+              </a:spcBef>
+            </a:pPr>
+            <a:r>
+              <a:rPr sz="1400" b="0" i="0">
+                <a:solidFill>
+                  <a:srgbClr val="ECEFF4"/>
+                </a:solidFill>
+                <a:latin typeface="Times New Roman"/>
+              </a:rPr>
+              <a:t>▪  Four “independent mutations” within 35 bases in one gene</a:t>
+            </a:r>
+          </a:p>
+          <a:p>
+            <a:pPr>
+              <a:spcBef>
+                <a:spcPts val="700"/>
+              </a:spcBef>
+            </a:pPr>
+            <a:r>
+              <a:rPr sz="1400" b="0" i="0">
+                <a:solidFill>
+                  <a:srgbClr val="ECEFF4"/>
+                </a:solidFill>
+                <a:latin typeface="Times New Roman"/>
+              </a:rPr>
+              <a:t>▪  23 of 39 candidates flagged</a:t>
+            </a:r>
+          </a:p>
+        </p:txBody>
+      </p:sp>
+      <p:sp>
+        <p:nvSpPr>
+          <p:cNvPr id="8" name="Rectangle 7"/>
+          <p:cNvSpPr/>
+          <p:nvPr/>
+        </p:nvSpPr>
+        <p:spPr>
+          <a:xfrm>
+            <a:off x="6217920" y="1856232"/>
+            <a:ext cx="5257800" cy="1783080"/>
+          </a:xfrm>
+          <a:prstGeom prst="rect">
+            <a:avLst/>
+          </a:prstGeom>
+          <a:solidFill>
+            <a:srgbClr val="181D27"/>
+          </a:solidFill>
+          <a:ln>
+            <a:noFill/>
+          </a:ln>
+          <a:effectLst/>
+        </p:spPr>
+        <p:style>
+          <a:lnRef idx="1">
+            <a:schemeClr val="accent1"/>
+          </a:lnRef>
+          <a:fillRef idx="3">
+            <a:schemeClr val="accent1"/>
+          </a:fillRef>
+          <a:effectRef idx="2">
+            <a:schemeClr val="accent1"/>
+          </a:effectRef>
+          <a:fontRef idx="minor">
+            <a:schemeClr val="lt1"/>
+          </a:fontRef>
+        </p:style>
+        <p:txBody>
+          <a:bodyPr rtlCol="0" anchor="ctr"/>
+          <a:lstStyle/>
+          <a:p>
+            <a:pPr algn="ctr"/>
+          </a:p>
+        </p:txBody>
+      </p:sp>
+      <p:sp>
+        <p:nvSpPr>
+          <p:cNvPr id="9" name="TextBox 8"/>
+          <p:cNvSpPr txBox="1"/>
+          <p:nvPr/>
+        </p:nvSpPr>
+        <p:spPr>
+          <a:xfrm>
+            <a:off x="6446520" y="2002536"/>
+            <a:ext cx="4846320" cy="1554480"/>
+          </a:xfrm>
+          <a:prstGeom prst="rect">
+            <a:avLst/>
+          </a:prstGeom>
+          <a:noFill/>
+        </p:spPr>
+        <p:txBody>
+          <a:bodyPr wrap="square">
+            <a:spAutoFit/>
+          </a:bodyPr>
+          <a:lstStyle/>
+          <a:p>
+            <a:r>
+              <a:rPr sz="1900" b="1" i="0">
+                <a:solidFill>
+                  <a:srgbClr val="C55A5A"/>
+                </a:solidFill>
+                <a:latin typeface="Times New Roman"/>
+              </a:rPr>
+              <a:t>RNA arm</a:t>
+            </a:r>
+          </a:p>
+          <a:p>
+            <a:pPr>
+              <a:spcBef>
+                <a:spcPts val="700"/>
+              </a:spcBef>
+            </a:pPr>
+            <a:r>
+              <a:rPr sz="1400" b="0" i="0">
+                <a:solidFill>
+                  <a:srgbClr val="ECEFF4"/>
+                </a:solidFill>
+                <a:latin typeface="Times New Roman"/>
+              </a:rPr>
+              <a:t>▪  20 fusions called, 166,694 discarded</a:t>
+            </a:r>
+          </a:p>
+          <a:p>
+            <a:pPr>
+              <a:spcBef>
+                <a:spcPts val="700"/>
+              </a:spcBef>
+            </a:pPr>
+            <a:r>
+              <a:rPr sz="1400" b="0" i="0">
+                <a:solidFill>
+                  <a:srgbClr val="ECEFF4"/>
+                </a:solidFill>
+                <a:latin typeface="Times New Roman"/>
+              </a:rPr>
+              <a:t>▪  FGFR1/2/3 joined in every combination, both orientations</a:t>
+            </a:r>
+          </a:p>
+          <a:p>
+            <a:pPr>
+              <a:spcBef>
+                <a:spcPts val="700"/>
+              </a:spcBef>
+            </a:pPr>
+            <a:r>
+              <a:rPr sz="1400" b="0" i="0">
+                <a:solidFill>
+                  <a:srgbClr val="ECEFF4"/>
+                </a:solidFill>
+                <a:latin typeface="Times New Roman"/>
+              </a:rPr>
+              <a:t>▪  All 20 flagged — the laboratory reported none, and we agree</a:t>
+            </a:r>
+          </a:p>
+        </p:txBody>
+      </p:sp>
+      <p:sp>
+        <p:nvSpPr>
+          <p:cNvPr id="10" name="Rectangle 9"/>
+          <p:cNvSpPr/>
+          <p:nvPr/>
+        </p:nvSpPr>
+        <p:spPr>
+          <a:xfrm>
+            <a:off x="685800" y="3867912"/>
+            <a:ext cx="10789920" cy="914400"/>
+          </a:xfrm>
+          <a:prstGeom prst="rect">
+            <a:avLst/>
+          </a:prstGeom>
+          <a:solidFill>
+            <a:srgbClr val="181D27"/>
+          </a:solidFill>
+          <a:ln>
+            <a:noFill/>
+          </a:ln>
+          <a:effectLst/>
+        </p:spPr>
+        <p:style>
+          <a:lnRef idx="1">
+            <a:schemeClr val="accent1"/>
+          </a:lnRef>
+          <a:fillRef idx="3">
+            <a:schemeClr val="accent1"/>
+          </a:fillRef>
+          <a:effectRef idx="2">
+            <a:schemeClr val="accent1"/>
+          </a:effectRef>
+          <a:fontRef idx="minor">
+            <a:schemeClr val="lt1"/>
+          </a:fontRef>
+        </p:style>
+        <p:txBody>
+          <a:bodyPr rtlCol="0" anchor="ctr"/>
+          <a:lstStyle/>
+          <a:p>
+            <a:pPr algn="ctr"/>
+          </a:p>
+        </p:txBody>
+      </p:sp>
+      <p:sp>
+        <p:nvSpPr>
+          <p:cNvPr id="11" name="Rectangle 10"/>
+          <p:cNvSpPr/>
+          <p:nvPr/>
+        </p:nvSpPr>
+        <p:spPr>
+          <a:xfrm>
+            <a:off x="685800" y="3867912"/>
+            <a:ext cx="50292" cy="914400"/>
+          </a:xfrm>
+          <a:prstGeom prst="rect">
+            <a:avLst/>
+          </a:prstGeom>
+          <a:solidFill>
+            <a:srgbClr val="C55A5A"/>
+          </a:solidFill>
+          <a:ln>
+            <a:noFill/>
+          </a:ln>
+          <a:effectLst/>
+        </p:spPr>
+        <p:style>
+          <a:lnRef idx="1">
+            <a:schemeClr val="accent1"/>
+          </a:lnRef>
+          <a:fillRef idx="3">
+            <a:schemeClr val="accent1"/>
+          </a:fillRef>
+          <a:effectRef idx="2">
+            <a:schemeClr val="accent1"/>
+          </a:effectRef>
+          <a:fontRef idx="minor">
+            <a:schemeClr val="lt1"/>
+          </a:fontRef>
+        </p:style>
+        <p:txBody>
+          <a:bodyPr rtlCol="0" anchor="ctr"/>
+          <a:lstStyle/>
+          <a:p>
+            <a:pPr algn="ctr"/>
+          </a:p>
+        </p:txBody>
+      </p:sp>
+      <p:sp>
+        <p:nvSpPr>
+          <p:cNvPr id="12" name="TextBox 11"/>
+          <p:cNvSpPr txBox="1"/>
+          <p:nvPr/>
+        </p:nvSpPr>
+        <p:spPr>
+          <a:xfrm>
+            <a:off x="932688" y="3986784"/>
+            <a:ext cx="10424160" cy="731520"/>
+          </a:xfrm>
+          <a:prstGeom prst="rect">
+            <a:avLst/>
+          </a:prstGeom>
+          <a:noFill/>
+        </p:spPr>
+        <p:txBody>
+          <a:bodyPr wrap="square">
+            <a:spAutoFit/>
+          </a:bodyPr>
+          <a:lstStyle/>
+          <a:p>
+            <a:r>
+              <a:rPr sz="1600" b="0" i="0">
+                <a:solidFill>
+                  <a:srgbClr val="ECEFF4"/>
+                </a:solidFill>
+                <a:latin typeface="Times New Roman"/>
+              </a:rPr>
+              <a:t>One mechanism explains both: cross-priming between the amplicons the assay amplifies in a single tube. An unscreened reading would have reported an FGFR2 fusion — the most consequential false positive available in this cancer type.</a:t>
+            </a:r>
+          </a:p>
+        </p:txBody>
+      </p:sp>
+      <p:sp>
+        <p:nvSpPr>
+          <p:cNvPr id="13" name="TextBox 12"/>
+          <p:cNvSpPr txBox="1"/>
+          <p:nvPr/>
+        </p:nvSpPr>
+        <p:spPr>
+          <a:xfrm>
+            <a:off x="10607040" y="6382512"/>
+            <a:ext cx="1097280" cy="320040"/>
+          </a:xfrm>
+          <a:prstGeom prst="rect">
+            <a:avLst/>
+          </a:prstGeom>
+          <a:noFill/>
+        </p:spPr>
+        <p:txBody>
+          <a:bodyPr wrap="square">
+            <a:spAutoFit/>
+          </a:bodyPr>
+          <a:lstStyle/>
+          <a:p>
+            <a:pPr algn="r"/>
+            <a:r>
+              <a:rPr sz="1000" b="0" i="0">
+                <a:solidFill>
+                  <a:srgbClr val="9AA4B2"/>
+                </a:solidFill>
+                <a:latin typeface="Times New Roman"/>
+              </a:rPr>
+              <a:t>13 / 18</a:t>
+            </a:r>
+          </a:p>
+        </p:txBody>
+      </p:sp>
+    </p:spTree>
+  </p:cSld>
+  <p:clrMapOvr>
+    <a:masterClrMapping/>
+  </p:clrMapOvr>
+</p:sld>
+</file>
+
+<file path=ppt/slides/slide14.xml><?xml version="1.0" encoding="utf-8"?>
+<p:sld xmlns:a="http://schemas.openxmlformats.org/drawingml/2006/main" xmlns:p="http://schemas.openxmlformats.org/presentationml/2006/main" xmlns:r="http://schemas.openxmlformats.org/officeDocument/2006/relationships">
+  <p:cSld>
+    <p:spTree>
+      <p:nvGrpSpPr>
+        <p:cNvPr id="1" name=""/>
+        <p:cNvGrpSpPr/>
+        <p:nvPr/>
+      </p:nvGrpSpPr>
+      <p:grpSpPr/>
+      <p:sp>
+        <p:nvSpPr>
+          <p:cNvPr id="2" name="Rectangle 1"/>
+          <p:cNvSpPr/>
+          <p:nvPr/>
+        </p:nvSpPr>
+        <p:spPr>
+          <a:xfrm>
+            <a:off x="0" y="0"/>
+            <a:ext cx="12191695" cy="6858000"/>
+          </a:xfrm>
+          <a:prstGeom prst="rect">
+            <a:avLst/>
+          </a:prstGeom>
+          <a:solidFill>
+            <a:srgbClr val="0E1117"/>
+          </a:solidFill>
+          <a:ln>
+            <a:noFill/>
+          </a:ln>
+          <a:effectLst/>
+        </p:spPr>
+        <p:style>
+          <a:lnRef idx="1">
+            <a:schemeClr val="accent1"/>
+          </a:lnRef>
+          <a:fillRef idx="3">
+            <a:schemeClr val="accent1"/>
+          </a:fillRef>
+          <a:effectRef idx="2">
+            <a:schemeClr val="accent1"/>
+          </a:effectRef>
+          <a:fontRef idx="minor">
+            <a:schemeClr val="lt1"/>
+          </a:fontRef>
+        </p:style>
+        <p:txBody>
+          <a:bodyPr rtlCol="0" anchor="ctr"/>
+          <a:lstStyle/>
+          <a:p>
+            <a:pPr algn="ctr"/>
+          </a:p>
+        </p:txBody>
+      </p:sp>
+      <p:sp>
+        <p:nvSpPr>
+          <p:cNvPr id="3" name="TextBox 2"/>
+          <p:cNvSpPr txBox="1"/>
+          <p:nvPr/>
+        </p:nvSpPr>
+        <p:spPr>
+          <a:xfrm>
+            <a:off x="685800" y="292608"/>
+            <a:ext cx="10789920" cy="274320"/>
+          </a:xfrm>
+          <a:prstGeom prst="rect">
+            <a:avLst/>
+          </a:prstGeom>
+          <a:noFill/>
+        </p:spPr>
+        <p:txBody>
+          <a:bodyPr wrap="square">
+            <a:spAutoFit/>
+          </a:bodyPr>
+          <a:lstStyle/>
+          <a:p>
+            <a:r>
+              <a:rPr sz="1100" b="1" i="0">
+                <a:solidFill>
+                  <a:srgbClr val="C55A5A"/>
+                </a:solidFill>
+                <a:latin typeface="Times New Roman"/>
+              </a:rPr>
+              <a:t>DASHBOARD · RNA</a:t>
+            </a:r>
+          </a:p>
+        </p:txBody>
+      </p:sp>
+      <p:sp>
+        <p:nvSpPr>
+          <p:cNvPr id="4" name="TextBox 3"/>
+          <p:cNvSpPr txBox="1"/>
+          <p:nvPr/>
+        </p:nvSpPr>
+        <p:spPr>
+          <a:xfrm>
+            <a:off x="685800" y="548640"/>
+            <a:ext cx="10789920" cy="530352"/>
+          </a:xfrm>
+          <a:prstGeom prst="rect">
+            <a:avLst/>
+          </a:prstGeom>
+          <a:noFill/>
+        </p:spPr>
+        <p:txBody>
+          <a:bodyPr wrap="square">
+            <a:spAutoFit/>
+          </a:bodyPr>
+          <a:lstStyle/>
+          <a:p>
+            <a:r>
+              <a:rPr sz="2500" b="1" i="0">
+                <a:solidFill>
+                  <a:srgbClr val="ECEFF4"/>
+                </a:solidFill>
+                <a:latin typeface="Times New Roman"/>
+              </a:rPr>
+              <a:t>Screening turns twenty candidates into a negative</a:t>
+            </a:r>
+          </a:p>
+        </p:txBody>
+      </p:sp>
+      <p:pic>
+        <p:nvPicPr>
+          <p:cNvPr id="5" name="Picture 4" descr="crop_04_rna_fusions.png"/>
+          <p:cNvPicPr>
+            <a:picLocks noChangeAspect="1"/>
+          </p:cNvPicPr>
+          <p:nvPr/>
+        </p:nvPicPr>
+        <p:blipFill>
+          <a:blip r:embed="rId2"/>
+          <a:stretch>
+            <a:fillRect/>
+          </a:stretch>
+        </p:blipFill>
+        <p:spPr>
+          <a:xfrm>
+            <a:off x="777240" y="1471337"/>
+            <a:ext cx="10607040" cy="4198789"/>
+          </a:xfrm>
+          <a:prstGeom prst="rect">
+            <a:avLst/>
+          </a:prstGeom>
+        </p:spPr>
+      </p:pic>
+      <p:sp>
+        <p:nvSpPr>
+          <p:cNvPr id="6" name="Rectangle 5"/>
+          <p:cNvSpPr/>
+          <p:nvPr/>
+        </p:nvSpPr>
+        <p:spPr>
+          <a:xfrm>
+            <a:off x="777240" y="1471337"/>
+            <a:ext cx="10607040" cy="4198789"/>
+          </a:xfrm>
+          <a:prstGeom prst="rect">
+            <a:avLst/>
+          </a:prstGeom>
+          <a:noFill/>
+          <a:ln w="15875">
+            <a:solidFill>
+              <a:srgbClr val="181D27"/>
+            </a:solidFill>
+          </a:ln>
+          <a:effectLst/>
+        </p:spPr>
+        <p:style>
+          <a:lnRef idx="1">
+            <a:schemeClr val="accent1"/>
+          </a:lnRef>
+          <a:fillRef idx="3">
+            <a:schemeClr val="accent1"/>
+          </a:fillRef>
+          <a:effectRef idx="2">
+            <a:schemeClr val="accent1"/>
+          </a:effectRef>
+          <a:fontRef idx="minor">
+            <a:schemeClr val="lt1"/>
+          </a:fontRef>
+        </p:style>
+        <p:txBody>
+          <a:bodyPr rtlCol="0" anchor="ctr"/>
+          <a:lstStyle/>
+          <a:p>
+            <a:pPr algn="ctr"/>
+          </a:p>
+        </p:txBody>
+      </p:sp>
+      <p:sp>
+        <p:nvSpPr>
+          <p:cNvPr id="7" name="TextBox 6"/>
+          <p:cNvSpPr txBox="1"/>
+          <p:nvPr/>
+        </p:nvSpPr>
+        <p:spPr>
+          <a:xfrm>
+            <a:off x="777240" y="6007608"/>
+            <a:ext cx="10607040" cy="384048"/>
+          </a:xfrm>
+          <a:prstGeom prst="rect">
+            <a:avLst/>
+          </a:prstGeom>
+          <a:noFill/>
+        </p:spPr>
+        <p:txBody>
+          <a:bodyPr wrap="square">
+            <a:spAutoFit/>
+          </a:bodyPr>
+          <a:lstStyle/>
+          <a:p>
+            <a:pPr algn="ctr"/>
+            <a:r>
+              <a:rPr sz="1150" b="0" i="1">
+                <a:solidFill>
+                  <a:srgbClr val="9AA4B2"/>
+                </a:solidFill>
+                <a:latin typeface="Times New Roman"/>
+              </a:rPr>
+              <a:t>Each flag names its reason: reciprocal calls, paralogue pairs, joins between two primed panel genes, promiscuous or unnamed partners.</a:t>
+            </a:r>
+          </a:p>
+        </p:txBody>
+      </p:sp>
+      <p:sp>
+        <p:nvSpPr>
+          <p:cNvPr id="8" name="TextBox 7"/>
+          <p:cNvSpPr txBox="1"/>
+          <p:nvPr/>
+        </p:nvSpPr>
+        <p:spPr>
+          <a:xfrm>
+            <a:off x="10607040" y="6382512"/>
+            <a:ext cx="1097280" cy="320040"/>
+          </a:xfrm>
+          <a:prstGeom prst="rect">
+            <a:avLst/>
+          </a:prstGeom>
+          <a:noFill/>
+        </p:spPr>
+        <p:txBody>
+          <a:bodyPr wrap="square">
+            <a:spAutoFit/>
+          </a:bodyPr>
+          <a:lstStyle/>
+          <a:p>
+            <a:pPr algn="r"/>
+            <a:r>
+              <a:rPr sz="1000" b="0" i="0">
+                <a:solidFill>
+                  <a:srgbClr val="9AA4B2"/>
+                </a:solidFill>
+                <a:latin typeface="Times New Roman"/>
+              </a:rPr>
+              <a:t>14 / 18</a:t>
+            </a:r>
+          </a:p>
+        </p:txBody>
+      </p:sp>
+    </p:spTree>
+  </p:cSld>
+  <p:clrMapOvr>
+    <a:masterClrMapping/>
+  </p:clrMapOvr>
+</p:sld>
+</file>
+
+<file path=ppt/slides/slide15.xml><?xml version="1.0" encoding="utf-8"?>
+<p:sld xmlns:a="http://schemas.openxmlformats.org/drawingml/2006/main" xmlns:p="http://schemas.openxmlformats.org/presentationml/2006/main" xmlns:r="http://schemas.openxmlformats.org/officeDocument/2006/relationships">
+  <p:cSld>
+    <p:spTree>
+      <p:nvGrpSpPr>
+        <p:cNvPr id="1" name=""/>
+        <p:cNvGrpSpPr/>
+        <p:nvPr/>
+      </p:nvGrpSpPr>
+      <p:grpSpPr/>
+      <p:sp>
+        <p:nvSpPr>
+          <p:cNvPr id="2" name="Rectangle 1"/>
+          <p:cNvSpPr/>
+          <p:nvPr/>
+        </p:nvSpPr>
+        <p:spPr>
+          <a:xfrm>
+            <a:off x="0" y="0"/>
+            <a:ext cx="12191695" cy="6858000"/>
+          </a:xfrm>
+          <a:prstGeom prst="rect">
+            <a:avLst/>
+          </a:prstGeom>
+          <a:solidFill>
+            <a:srgbClr val="0E1117"/>
+          </a:solidFill>
+          <a:ln>
+            <a:noFill/>
+          </a:ln>
+          <a:effectLst/>
+        </p:spPr>
+        <p:style>
+          <a:lnRef idx="1">
+            <a:schemeClr val="accent1"/>
+          </a:lnRef>
+          <a:fillRef idx="3">
+            <a:schemeClr val="accent1"/>
+          </a:fillRef>
+          <a:effectRef idx="2">
+            <a:schemeClr val="accent1"/>
+          </a:effectRef>
+          <a:fontRef idx="minor">
+            <a:schemeClr val="lt1"/>
+          </a:fontRef>
+        </p:style>
+        <p:txBody>
+          <a:bodyPr rtlCol="0" anchor="ctr"/>
+          <a:lstStyle/>
+          <a:p>
+            <a:pPr algn="ctr"/>
+          </a:p>
+        </p:txBody>
+      </p:sp>
+      <p:sp>
+        <p:nvSpPr>
+          <p:cNvPr id="3" name="TextBox 2"/>
+          <p:cNvSpPr txBox="1"/>
+          <p:nvPr/>
+        </p:nvSpPr>
+        <p:spPr>
+          <a:xfrm>
+            <a:off x="685800" y="292608"/>
+            <a:ext cx="10789920" cy="274320"/>
+          </a:xfrm>
+          <a:prstGeom prst="rect">
+            <a:avLst/>
+          </a:prstGeom>
+          <a:noFill/>
+        </p:spPr>
+        <p:txBody>
+          <a:bodyPr wrap="square">
+            <a:spAutoFit/>
+          </a:bodyPr>
+          <a:lstStyle/>
+          <a:p>
+            <a:r>
+              <a:rPr sz="1100" b="1" i="0">
+                <a:solidFill>
+                  <a:srgbClr val="5B9BD5"/>
+                </a:solidFill>
+                <a:latin typeface="Times New Roman"/>
+              </a:rPr>
+              <a:t>DASHBOARD · PATHWAYS</a:t>
+            </a:r>
+          </a:p>
+        </p:txBody>
+      </p:sp>
+      <p:sp>
+        <p:nvSpPr>
+          <p:cNvPr id="4" name="TextBox 3"/>
+          <p:cNvSpPr txBox="1"/>
+          <p:nvPr/>
+        </p:nvSpPr>
+        <p:spPr>
+          <a:xfrm>
+            <a:off x="685800" y="548640"/>
+            <a:ext cx="10789920" cy="530352"/>
+          </a:xfrm>
+          <a:prstGeom prst="rect">
+            <a:avLst/>
+          </a:prstGeom>
+          <a:noFill/>
+        </p:spPr>
+        <p:txBody>
+          <a:bodyPr wrap="square">
+            <a:spAutoFit/>
+          </a:bodyPr>
+          <a:lstStyle/>
+          <a:p>
+            <a:r>
+              <a:rPr sz="2500" b="1" i="0">
+                <a:solidFill>
+                  <a:srgbClr val="ECEFF4"/>
+                </a:solidFill>
+                <a:latin typeface="Times New Roman"/>
+              </a:rPr>
+              <a:t>From a gene list to a picture of the cell</a:t>
+            </a:r>
+          </a:p>
+        </p:txBody>
+      </p:sp>
+      <p:pic>
+        <p:nvPicPr>
+          <p:cNvPr id="5" name="Picture 4" descr="crop_05_pathways.png"/>
+          <p:cNvPicPr>
+            <a:picLocks noChangeAspect="1"/>
+          </p:cNvPicPr>
+          <p:nvPr/>
+        </p:nvPicPr>
+        <p:blipFill>
+          <a:blip r:embed="rId2"/>
+          <a:stretch>
+            <a:fillRect/>
+          </a:stretch>
+        </p:blipFill>
+        <p:spPr>
+          <a:xfrm>
+            <a:off x="1889095" y="1170432"/>
+            <a:ext cx="8383329" cy="4800600"/>
+          </a:xfrm>
+          <a:prstGeom prst="rect">
+            <a:avLst/>
+          </a:prstGeom>
+        </p:spPr>
+      </p:pic>
+      <p:sp>
+        <p:nvSpPr>
+          <p:cNvPr id="6" name="Rectangle 5"/>
+          <p:cNvSpPr/>
+          <p:nvPr/>
+        </p:nvSpPr>
+        <p:spPr>
+          <a:xfrm>
+            <a:off x="1889095" y="1170432"/>
+            <a:ext cx="8383329" cy="4800600"/>
+          </a:xfrm>
+          <a:prstGeom prst="rect">
+            <a:avLst/>
+          </a:prstGeom>
+          <a:noFill/>
+          <a:ln w="15875">
+            <a:solidFill>
+              <a:srgbClr val="181D27"/>
+            </a:solidFill>
+          </a:ln>
+          <a:effectLst/>
+        </p:spPr>
+        <p:style>
+          <a:lnRef idx="1">
+            <a:schemeClr val="accent1"/>
+          </a:lnRef>
+          <a:fillRef idx="3">
+            <a:schemeClr val="accent1"/>
+          </a:fillRef>
+          <a:effectRef idx="2">
+            <a:schemeClr val="accent1"/>
+          </a:effectRef>
+          <a:fontRef idx="minor">
+            <a:schemeClr val="lt1"/>
+          </a:fontRef>
+        </p:style>
+        <p:txBody>
+          <a:bodyPr rtlCol="0" anchor="ctr"/>
+          <a:lstStyle/>
+          <a:p>
+            <a:pPr algn="ctr"/>
+          </a:p>
+        </p:txBody>
+      </p:sp>
+      <p:sp>
+        <p:nvSpPr>
+          <p:cNvPr id="7" name="TextBox 6"/>
+          <p:cNvSpPr txBox="1"/>
+          <p:nvPr/>
+        </p:nvSpPr>
+        <p:spPr>
+          <a:xfrm>
+            <a:off x="777240" y="6007608"/>
+            <a:ext cx="10607040" cy="384048"/>
+          </a:xfrm>
+          <a:prstGeom prst="rect">
+            <a:avLst/>
+          </a:prstGeom>
+          <a:noFill/>
+        </p:spPr>
+        <p:txBody>
+          <a:bodyPr wrap="square">
+            <a:spAutoFit/>
+          </a:bodyPr>
+          <a:lstStyle/>
+          <a:p>
+            <a:pPr algn="ctr"/>
+            <a:r>
+              <a:rPr sz="1150" b="0" i="1">
+                <a:solidFill>
+                  <a:srgbClr val="9AA4B2"/>
+                </a:solidFill>
+                <a:latin typeface="Times New Roman"/>
+              </a:rPr>
+              <a:t>Membership mapping against the ten canonical oncogenic pathways — deliberately not an enrichment analysis, since the gene universe is fixed by the assay.</a:t>
+            </a:r>
+          </a:p>
+        </p:txBody>
+      </p:sp>
+      <p:sp>
+        <p:nvSpPr>
+          <p:cNvPr id="8" name="TextBox 7"/>
+          <p:cNvSpPr txBox="1"/>
+          <p:nvPr/>
+        </p:nvSpPr>
+        <p:spPr>
+          <a:xfrm>
+            <a:off x="10607040" y="6382512"/>
+            <a:ext cx="1097280" cy="320040"/>
+          </a:xfrm>
+          <a:prstGeom prst="rect">
+            <a:avLst/>
+          </a:prstGeom>
+          <a:noFill/>
+        </p:spPr>
+        <p:txBody>
+          <a:bodyPr wrap="square">
+            <a:spAutoFit/>
+          </a:bodyPr>
+          <a:lstStyle/>
+          <a:p>
+            <a:pPr algn="r"/>
+            <a:r>
+              <a:rPr sz="1000" b="0" i="0">
+                <a:solidFill>
+                  <a:srgbClr val="9AA4B2"/>
+                </a:solidFill>
+                <a:latin typeface="Times New Roman"/>
+              </a:rPr>
+              <a:t>15 / 18</a:t>
+            </a:r>
+          </a:p>
+        </p:txBody>
+      </p:sp>
+    </p:spTree>
+  </p:cSld>
+  <p:clrMapOvr>
+    <a:masterClrMapping/>
+  </p:clrMapOvr>
+</p:sld>
+</file>
+
+<file path=ppt/slides/slide16.xml><?xml version="1.0" encoding="utf-8"?>
+<p:sld xmlns:a="http://schemas.openxmlformats.org/drawingml/2006/main" xmlns:p="http://schemas.openxmlformats.org/presentationml/2006/main" xmlns:r="http://schemas.openxmlformats.org/officeDocument/2006/relationships">
+  <p:cSld>
+    <p:spTree>
+      <p:nvGrpSpPr>
+        <p:cNvPr id="1" name=""/>
+        <p:cNvGrpSpPr/>
+        <p:nvPr/>
+      </p:nvGrpSpPr>
+      <p:grpSpPr/>
+      <p:sp>
+        <p:nvSpPr>
+          <p:cNvPr id="2" name="Rectangle 1"/>
+          <p:cNvSpPr/>
+          <p:nvPr/>
+        </p:nvSpPr>
+        <p:spPr>
+          <a:xfrm>
+            <a:off x="0" y="0"/>
+            <a:ext cx="12191695" cy="6858000"/>
+          </a:xfrm>
+          <a:prstGeom prst="rect">
+            <a:avLst/>
+          </a:prstGeom>
+          <a:solidFill>
+            <a:srgbClr val="0E1117"/>
+          </a:solidFill>
+          <a:ln>
+            <a:noFill/>
+          </a:ln>
+          <a:effectLst/>
+        </p:spPr>
+        <p:style>
+          <a:lnRef idx="1">
+            <a:schemeClr val="accent1"/>
+          </a:lnRef>
+          <a:fillRef idx="3">
+            <a:schemeClr val="accent1"/>
+          </a:fillRef>
+          <a:effectRef idx="2">
+            <a:schemeClr val="accent1"/>
+          </a:effectRef>
+          <a:fontRef idx="minor">
+            <a:schemeClr val="lt1"/>
+          </a:fontRef>
+        </p:style>
+        <p:txBody>
+          <a:bodyPr rtlCol="0" anchor="ctr"/>
+          <a:lstStyle/>
+          <a:p>
+            <a:pPr algn="ctr"/>
+          </a:p>
+        </p:txBody>
+      </p:sp>
+      <p:sp>
+        <p:nvSpPr>
+          <p:cNvPr id="3" name="TextBox 2"/>
+          <p:cNvSpPr txBox="1"/>
+          <p:nvPr/>
+        </p:nvSpPr>
+        <p:spPr>
+          <a:xfrm>
+            <a:off x="685800" y="384048"/>
+            <a:ext cx="10789920" cy="320040"/>
+          </a:xfrm>
+          <a:prstGeom prst="rect">
+            <a:avLst/>
+          </a:prstGeom>
+          <a:noFill/>
+        </p:spPr>
+        <p:txBody>
+          <a:bodyPr wrap="square">
+            <a:spAutoFit/>
+          </a:bodyPr>
+          <a:lstStyle/>
+          <a:p>
+            <a:r>
+              <a:rPr sz="1200" b="1" i="0">
+                <a:solidFill>
+                  <a:srgbClr val="D89B3C"/>
+                </a:solidFill>
+                <a:latin typeface="Times New Roman"/>
+              </a:rPr>
+              <a:t>LIMITS</a:t>
+            </a:r>
+          </a:p>
+        </p:txBody>
+      </p:sp>
+      <p:sp>
+        <p:nvSpPr>
+          <p:cNvPr id="4" name="TextBox 3"/>
+          <p:cNvSpPr txBox="1"/>
+          <p:nvPr/>
+        </p:nvSpPr>
+        <p:spPr>
+          <a:xfrm>
+            <a:off x="685800" y="713232"/>
+            <a:ext cx="10789920" cy="777240"/>
+          </a:xfrm>
+          <a:prstGeom prst="rect">
+            <a:avLst/>
+          </a:prstGeom>
+          <a:noFill/>
+        </p:spPr>
+        <p:txBody>
+          <a:bodyPr wrap="square">
+            <a:spAutoFit/>
+          </a:bodyPr>
+          <a:lstStyle/>
+          <a:p>
+            <a:r>
+              <a:rPr sz="3000" b="1" i="0">
+                <a:solidFill>
+                  <a:srgbClr val="ECEFF4"/>
+                </a:solidFill>
+                <a:latin typeface="Times New Roman"/>
+              </a:rPr>
+              <a:t>What this data cannot tell us</a:t>
+            </a:r>
+          </a:p>
+        </p:txBody>
+      </p:sp>
+      <p:sp>
+        <p:nvSpPr>
+          <p:cNvPr id="5" name="Rectangle 4"/>
+          <p:cNvSpPr/>
+          <p:nvPr/>
+        </p:nvSpPr>
+        <p:spPr>
+          <a:xfrm>
+            <a:off x="713232" y="1554480"/>
+            <a:ext cx="1371600" cy="41148"/>
+          </a:xfrm>
+          <a:prstGeom prst="rect">
+            <a:avLst/>
+          </a:prstGeom>
+          <a:solidFill>
+            <a:srgbClr val="D89B3C"/>
+          </a:solidFill>
+          <a:ln>
+            <a:noFill/>
+          </a:ln>
+          <a:effectLst/>
+        </p:spPr>
+        <p:style>
+          <a:lnRef idx="1">
+            <a:schemeClr val="accent1"/>
+          </a:lnRef>
+          <a:fillRef idx="3">
+            <a:schemeClr val="accent1"/>
+          </a:fillRef>
+          <a:effectRef idx="2">
+            <a:schemeClr val="accent1"/>
+          </a:effectRef>
+          <a:fontRef idx="minor">
+            <a:schemeClr val="lt1"/>
+          </a:fontRef>
+        </p:style>
+        <p:txBody>
+          <a:bodyPr rtlCol="0" anchor="ctr"/>
+          <a:lstStyle/>
+          <a:p>
+            <a:pPr algn="ctr"/>
+          </a:p>
+        </p:txBody>
+      </p:sp>
+      <p:sp>
+        <p:nvSpPr>
+          <p:cNvPr id="6" name="TextBox 5"/>
+          <p:cNvSpPr txBox="1"/>
+          <p:nvPr/>
+        </p:nvSpPr>
+        <p:spPr>
+          <a:xfrm>
+            <a:off x="777240" y="1856232"/>
+            <a:ext cx="10607040" cy="4453128"/>
+          </a:xfrm>
+          <a:prstGeom prst="rect">
+            <a:avLst/>
+          </a:prstGeom>
+          <a:noFill/>
+        </p:spPr>
+        <p:txBody>
+          <a:bodyPr wrap="square">
+            <a:spAutoFit/>
+          </a:bodyPr>
+          <a:lstStyle/>
+          <a:p>
+            <a:pPr>
+              <a:spcAft>
+                <a:spcPts val="1100"/>
+              </a:spcAft>
+            </a:pPr>
+            <a:r>
+              <a:rPr sz="1700" b="0" i="0">
+                <a:solidFill>
+                  <a:srgbClr val="D89B3C"/>
+                </a:solidFill>
+                <a:latin typeface="Times New Roman"/>
+              </a:rPr>
+              <a:t>▪   </a:t>
+            </a:r>
+            <a:r>
+              <a:rPr sz="1700" b="0" i="0">
+                <a:solidFill>
+                  <a:srgbClr val="ECEFF4"/>
+                </a:solidFill>
+                <a:latin typeface="Times New Roman"/>
+              </a:rPr>
+              <a:t>Whether a variant is inherited — no normal tissue was sequenced.</a:t>
+            </a:r>
+          </a:p>
+          <a:p>
+            <a:pPr>
+              <a:spcAft>
+                <a:spcPts val="1100"/>
+              </a:spcAft>
+            </a:pPr>
+            <a:r>
+              <a:rPr sz="1700" b="0" i="0">
+                <a:solidFill>
+                  <a:srgbClr val="D89B3C"/>
+                </a:solidFill>
+                <a:latin typeface="Times New Roman"/>
+              </a:rPr>
+              <a:t>▪   </a:t>
+            </a:r>
+            <a:r>
+              <a:rPr sz="1700" b="0" i="0">
+                <a:solidFill>
+                  <a:srgbClr val="ECEFF4"/>
+                </a:solidFill>
+                <a:latin typeface="Times New Roman"/>
+              </a:rPr>
+              <a:t>Roughly half of the nominal target territory had no coverage at all.</a:t>
+            </a:r>
+          </a:p>
+          <a:p>
+            <a:pPr>
+              <a:spcAft>
+                <a:spcPts val="1100"/>
+              </a:spcAft>
+            </a:pPr>
+            <a:r>
+              <a:rPr sz="1700" b="0" i="0">
+                <a:solidFill>
+                  <a:srgbClr val="D89B3C"/>
+                </a:solidFill>
+                <a:latin typeface="Times New Roman"/>
+              </a:rPr>
+              <a:t>▪   </a:t>
+            </a:r>
+            <a:r>
+              <a:rPr sz="1700" b="0" i="0">
+                <a:solidFill>
+                  <a:srgbClr val="ECEFF4"/>
+                </a:solidFill>
+                <a:latin typeface="Times New Roman"/>
+              </a:rPr>
+              <a:t>Genes frequently mutated in this cancer type are absent from the panel: a negative there is an untested region, not an absence of mutation.</a:t>
+            </a:r>
+          </a:p>
+          <a:p>
+            <a:pPr>
+              <a:spcAft>
+                <a:spcPts val="1100"/>
+              </a:spcAft>
+            </a:pPr>
+            <a:r>
+              <a:rPr sz="1700" b="0" i="0">
+                <a:solidFill>
+                  <a:srgbClr val="D89B3C"/>
+                </a:solidFill>
+                <a:latin typeface="Times New Roman"/>
+              </a:rPr>
+              <a:t>▪   </a:t>
+            </a:r>
+            <a:r>
+              <a:rPr sz="1700" b="0" i="0">
+                <a:solidFill>
+                  <a:srgbClr val="ECEFF4"/>
+                </a:solidFill>
+                <a:latin typeface="Times New Roman"/>
+              </a:rPr>
+              <a:t>Mutational burden — 115.18 → 47.12 per Mb after screening; both implausible, and the assessable territory is far too small.</a:t>
+            </a:r>
+          </a:p>
+          <a:p>
+            <a:pPr>
+              <a:spcAft>
+                <a:spcPts val="1100"/>
+              </a:spcAft>
+            </a:pPr>
+            <a:r>
+              <a:rPr sz="1700" b="0" i="0">
+                <a:solidFill>
+                  <a:srgbClr val="D89B3C"/>
+                </a:solidFill>
+                <a:latin typeface="Times New Roman"/>
+              </a:rPr>
+              <a:t>▪   </a:t>
+            </a:r>
+            <a:r>
+              <a:rPr sz="1700" b="0" i="0">
+                <a:solidFill>
+                  <a:srgbClr val="ECEFF4"/>
+                </a:solidFill>
+                <a:latin typeface="Times New Roman"/>
+              </a:rPr>
+              <a:t>Microsatellite status: not determinable — as the accredited laboratory also concluded.</a:t>
+            </a:r>
+          </a:p>
+        </p:txBody>
+      </p:sp>
+      <p:sp>
+        <p:nvSpPr>
+          <p:cNvPr id="7" name="Rectangle 6"/>
+          <p:cNvSpPr/>
+          <p:nvPr/>
+        </p:nvSpPr>
+        <p:spPr>
+          <a:xfrm>
+            <a:off x="685800" y="5257800"/>
+            <a:ext cx="10789920" cy="731520"/>
+          </a:xfrm>
+          <a:prstGeom prst="rect">
+            <a:avLst/>
+          </a:prstGeom>
+          <a:solidFill>
+            <a:srgbClr val="181D27"/>
+          </a:solidFill>
+          <a:ln>
+            <a:noFill/>
+          </a:ln>
+          <a:effectLst/>
+        </p:spPr>
+        <p:style>
+          <a:lnRef idx="1">
+            <a:schemeClr val="accent1"/>
+          </a:lnRef>
+          <a:fillRef idx="3">
+            <a:schemeClr val="accent1"/>
+          </a:fillRef>
+          <a:effectRef idx="2">
+            <a:schemeClr val="accent1"/>
+          </a:effectRef>
+          <a:fontRef idx="minor">
+            <a:schemeClr val="lt1"/>
+          </a:fontRef>
+        </p:style>
+        <p:txBody>
+          <a:bodyPr rtlCol="0" anchor="ctr"/>
+          <a:lstStyle/>
+          <a:p>
+            <a:pPr algn="ctr"/>
+          </a:p>
+        </p:txBody>
+      </p:sp>
+      <p:sp>
+        <p:nvSpPr>
+          <p:cNvPr id="8" name="Rectangle 7"/>
+          <p:cNvSpPr/>
+          <p:nvPr/>
+        </p:nvSpPr>
+        <p:spPr>
+          <a:xfrm>
+            <a:off x="685800" y="5257800"/>
+            <a:ext cx="50292" cy="731520"/>
+          </a:xfrm>
+          <a:prstGeom prst="rect">
+            <a:avLst/>
+          </a:prstGeom>
+          <a:solidFill>
+            <a:srgbClr val="D89B3C"/>
+          </a:solidFill>
+          <a:ln>
+            <a:noFill/>
+          </a:ln>
+          <a:effectLst/>
+        </p:spPr>
+        <p:style>
+          <a:lnRef idx="1">
+            <a:schemeClr val="accent1"/>
+          </a:lnRef>
+          <a:fillRef idx="3">
+            <a:schemeClr val="accent1"/>
+          </a:fillRef>
+          <a:effectRef idx="2">
+            <a:schemeClr val="accent1"/>
+          </a:effectRef>
+          <a:fontRef idx="minor">
+            <a:schemeClr val="lt1"/>
+          </a:fontRef>
+        </p:style>
+        <p:txBody>
+          <a:bodyPr rtlCol="0" anchor="ctr"/>
+          <a:lstStyle/>
+          <a:p>
+            <a:pPr algn="ctr"/>
+          </a:p>
+        </p:txBody>
+      </p:sp>
+      <p:sp>
+        <p:nvSpPr>
+          <p:cNvPr id="9" name="TextBox 8"/>
+          <p:cNvSpPr txBox="1"/>
+          <p:nvPr/>
+        </p:nvSpPr>
+        <p:spPr>
+          <a:xfrm>
+            <a:off x="932688" y="5376672"/>
+            <a:ext cx="10424160" cy="548640"/>
+          </a:xfrm>
+          <a:prstGeom prst="rect">
+            <a:avLst/>
+          </a:prstGeom>
+          <a:noFill/>
+        </p:spPr>
+        <p:txBody>
+          <a:bodyPr wrap="square">
+            <a:spAutoFit/>
+          </a:bodyPr>
+          <a:lstStyle/>
+          <a:p>
+            <a:r>
+              <a:rPr sz="1600" b="0" i="0">
+                <a:solidFill>
+                  <a:srgbClr val="ECEFF4"/>
+                </a:solidFill>
+                <a:latin typeface="Times New Roman"/>
+              </a:rPr>
+              <a:t>Stating where the answers stop is what makes this a teaching object rather than a black box.</a:t>
+            </a:r>
+          </a:p>
+        </p:txBody>
+      </p:sp>
+      <p:sp>
+        <p:nvSpPr>
+          <p:cNvPr id="10" name="TextBox 9"/>
+          <p:cNvSpPr txBox="1"/>
+          <p:nvPr/>
+        </p:nvSpPr>
+        <p:spPr>
+          <a:xfrm>
+            <a:off x="10607040" y="6382512"/>
+            <a:ext cx="1097280" cy="320040"/>
+          </a:xfrm>
+          <a:prstGeom prst="rect">
+            <a:avLst/>
+          </a:prstGeom>
+          <a:noFill/>
+        </p:spPr>
+        <p:txBody>
+          <a:bodyPr wrap="square">
+            <a:spAutoFit/>
+          </a:bodyPr>
+          <a:lstStyle/>
+          <a:p>
+            <a:pPr algn="r"/>
+            <a:r>
+              <a:rPr sz="1000" b="0" i="0">
+                <a:solidFill>
+                  <a:srgbClr val="9AA4B2"/>
+                </a:solidFill>
+                <a:latin typeface="Times New Roman"/>
+              </a:rPr>
+              <a:t>16 / 18</a:t>
+            </a:r>
+          </a:p>
+        </p:txBody>
+      </p:sp>
+    </p:spTree>
+  </p:cSld>
+  <p:clrMapOvr>
+    <a:masterClrMapping/>
+  </p:clrMapOvr>
+</p:sld>
+</file>
+
+<file path=ppt/slides/slide17.xml><?xml version="1.0" encoding="utf-8"?>
+<p:sld xmlns:a="http://schemas.openxmlformats.org/drawingml/2006/main" xmlns:p="http://schemas.openxmlformats.org/presentationml/2006/main" xmlns:r="http://schemas.openxmlformats.org/officeDocument/2006/relationships">
+  <p:cSld>
+    <p:spTree>
+      <p:nvGrpSpPr>
+        <p:cNvPr id="1" name=""/>
+        <p:cNvGrpSpPr/>
+        <p:nvPr/>
+      </p:nvGrpSpPr>
+      <p:grpSpPr/>
+      <p:sp>
+        <p:nvSpPr>
+          <p:cNvPr id="2" name="Rectangle 1"/>
+          <p:cNvSpPr/>
+          <p:nvPr/>
+        </p:nvSpPr>
+        <p:spPr>
+          <a:xfrm>
+            <a:off x="0" y="0"/>
+            <a:ext cx="12191695" cy="6858000"/>
+          </a:xfrm>
+          <a:prstGeom prst="rect">
+            <a:avLst/>
+          </a:prstGeom>
+          <a:solidFill>
+            <a:srgbClr val="0E1117"/>
+          </a:solidFill>
+          <a:ln>
+            <a:noFill/>
+          </a:ln>
+          <a:effectLst/>
+        </p:spPr>
+        <p:style>
+          <a:lnRef idx="1">
+            <a:schemeClr val="accent1"/>
+          </a:lnRef>
+          <a:fillRef idx="3">
+            <a:schemeClr val="accent1"/>
+          </a:fillRef>
+          <a:effectRef idx="2">
+            <a:schemeClr val="accent1"/>
+          </a:effectRef>
+          <a:fontRef idx="minor">
+            <a:schemeClr val="lt1"/>
+          </a:fontRef>
+        </p:style>
+        <p:txBody>
+          <a:bodyPr rtlCol="0" anchor="ctr"/>
+          <a:lstStyle/>
+          <a:p>
+            <a:pPr algn="ctr"/>
+          </a:p>
+        </p:txBody>
+      </p:sp>
+      <p:sp>
+        <p:nvSpPr>
+          <p:cNvPr id="3" name="TextBox 2"/>
+          <p:cNvSpPr txBox="1"/>
+          <p:nvPr/>
+        </p:nvSpPr>
+        <p:spPr>
+          <a:xfrm>
+            <a:off x="685800" y="502920"/>
+            <a:ext cx="10789920" cy="777240"/>
+          </a:xfrm>
+          <a:prstGeom prst="rect">
+            <a:avLst/>
+          </a:prstGeom>
+          <a:noFill/>
+        </p:spPr>
+        <p:txBody>
+          <a:bodyPr wrap="square">
+            <a:spAutoFit/>
+          </a:bodyPr>
+          <a:lstStyle/>
+          <a:p>
+            <a:r>
+              <a:rPr sz="3000" b="1" i="0">
+                <a:solidFill>
+                  <a:srgbClr val="ECEFF4"/>
+                </a:solidFill>
+                <a:latin typeface="Times New Roman"/>
+              </a:rPr>
+              <a:t>Deliverables</a:t>
+            </a:r>
+          </a:p>
+        </p:txBody>
+      </p:sp>
+      <p:sp>
+        <p:nvSpPr>
+          <p:cNvPr id="4" name="Rectangle 3"/>
+          <p:cNvSpPr/>
+          <p:nvPr/>
+        </p:nvSpPr>
+        <p:spPr>
+          <a:xfrm>
+            <a:off x="713232" y="1344168"/>
+            <a:ext cx="1371600" cy="41148"/>
+          </a:xfrm>
+          <a:prstGeom prst="rect">
+            <a:avLst/>
+          </a:prstGeom>
+          <a:solidFill>
+            <a:srgbClr val="5B9BD5"/>
+          </a:solidFill>
+          <a:ln>
+            <a:noFill/>
+          </a:ln>
+          <a:effectLst/>
+        </p:spPr>
+        <p:style>
+          <a:lnRef idx="1">
+            <a:schemeClr val="accent1"/>
+          </a:lnRef>
+          <a:fillRef idx="3">
+            <a:schemeClr val="accent1"/>
+          </a:fillRef>
+          <a:effectRef idx="2">
+            <a:schemeClr val="accent1"/>
+          </a:effectRef>
+          <a:fontRef idx="minor">
+            <a:schemeClr val="lt1"/>
+          </a:fontRef>
+        </p:style>
+        <p:txBody>
+          <a:bodyPr rtlCol="0" anchor="ctr"/>
+          <a:lstStyle/>
+          <a:p>
+            <a:pPr algn="ctr"/>
+          </a:p>
+        </p:txBody>
+      </p:sp>
+      <p:sp>
+        <p:nvSpPr>
+          <p:cNvPr id="5" name="Rectangle 4"/>
+          <p:cNvSpPr/>
+          <p:nvPr/>
+        </p:nvSpPr>
+        <p:spPr>
+          <a:xfrm>
+            <a:off x="685800" y="1645920"/>
+            <a:ext cx="2457450" cy="1600200"/>
+          </a:xfrm>
+          <a:prstGeom prst="rect">
+            <a:avLst/>
+          </a:prstGeom>
+          <a:solidFill>
+            <a:srgbClr val="181D27"/>
+          </a:solidFill>
+          <a:ln>
+            <a:noFill/>
+          </a:ln>
+          <a:effectLst/>
+        </p:spPr>
+        <p:style>
+          <a:lnRef idx="1">
+            <a:schemeClr val="accent1"/>
+          </a:lnRef>
+          <a:fillRef idx="3">
+            <a:schemeClr val="accent1"/>
+          </a:fillRef>
+          <a:effectRef idx="2">
+            <a:schemeClr val="accent1"/>
+          </a:effectRef>
+          <a:fontRef idx="minor">
+            <a:schemeClr val="lt1"/>
+          </a:fontRef>
+        </p:style>
+        <p:txBody>
+          <a:bodyPr rtlCol="0" anchor="ctr"/>
+          <a:lstStyle/>
+          <a:p>
+            <a:pPr algn="ctr"/>
+          </a:p>
+        </p:txBody>
+      </p:sp>
+      <p:sp>
+        <p:nvSpPr>
+          <p:cNvPr id="6" name="TextBox 5"/>
+          <p:cNvSpPr txBox="1"/>
+          <p:nvPr/>
+        </p:nvSpPr>
+        <p:spPr>
+          <a:xfrm>
+            <a:off x="914400" y="1810512"/>
+            <a:ext cx="2000250" cy="777240"/>
+          </a:xfrm>
+          <a:prstGeom prst="rect">
+            <a:avLst/>
+          </a:prstGeom>
+          <a:noFill/>
+        </p:spPr>
+        <p:txBody>
+          <a:bodyPr wrap="square">
+            <a:spAutoFit/>
+          </a:bodyPr>
+          <a:lstStyle/>
+          <a:p>
+            <a:r>
+              <a:rPr sz="4000" b="1" i="0">
+                <a:solidFill>
+                  <a:srgbClr val="5B9BD5"/>
+                </a:solidFill>
+                <a:latin typeface="Times New Roman"/>
+              </a:rPr>
+              <a:t>38</a:t>
+            </a:r>
+          </a:p>
+        </p:txBody>
+      </p:sp>
+      <p:sp>
+        <p:nvSpPr>
+          <p:cNvPr id="7" name="TextBox 6"/>
+          <p:cNvSpPr txBox="1"/>
+          <p:nvPr/>
+        </p:nvSpPr>
+        <p:spPr>
+          <a:xfrm>
+            <a:off x="914400" y="2633472"/>
+            <a:ext cx="2000250" cy="548640"/>
+          </a:xfrm>
+          <a:prstGeom prst="rect">
+            <a:avLst/>
+          </a:prstGeom>
+          <a:noFill/>
+        </p:spPr>
+        <p:txBody>
+          <a:bodyPr wrap="square">
+            <a:spAutoFit/>
+          </a:bodyPr>
+          <a:lstStyle/>
+          <a:p>
+            <a:r>
+              <a:rPr sz="1200" b="0" i="0">
+                <a:solidFill>
+                  <a:srgbClr val="9AA4B2"/>
+                </a:solidFill>
+                <a:latin typeface="Times New Roman"/>
+              </a:rPr>
+              <a:t>automated tests, run in CI</a:t>
+            </a:r>
+          </a:p>
+        </p:txBody>
+      </p:sp>
+      <p:sp>
+        <p:nvSpPr>
+          <p:cNvPr id="8" name="Rectangle 7"/>
+          <p:cNvSpPr/>
+          <p:nvPr/>
+        </p:nvSpPr>
+        <p:spPr>
+          <a:xfrm>
+            <a:off x="3463290" y="1645920"/>
+            <a:ext cx="2457450" cy="1600200"/>
+          </a:xfrm>
+          <a:prstGeom prst="rect">
+            <a:avLst/>
+          </a:prstGeom>
+          <a:solidFill>
+            <a:srgbClr val="181D27"/>
+          </a:solidFill>
+          <a:ln>
+            <a:noFill/>
+          </a:ln>
+          <a:effectLst/>
+        </p:spPr>
+        <p:style>
+          <a:lnRef idx="1">
+            <a:schemeClr val="accent1"/>
+          </a:lnRef>
+          <a:fillRef idx="3">
+            <a:schemeClr val="accent1"/>
+          </a:fillRef>
+          <a:effectRef idx="2">
+            <a:schemeClr val="accent1"/>
+          </a:effectRef>
+          <a:fontRef idx="minor">
+            <a:schemeClr val="lt1"/>
+          </a:fontRef>
+        </p:style>
+        <p:txBody>
+          <a:bodyPr rtlCol="0" anchor="ctr"/>
+          <a:lstStyle/>
+          <a:p>
+            <a:pPr algn="ctr"/>
+          </a:p>
+        </p:txBody>
+      </p:sp>
+      <p:sp>
+        <p:nvSpPr>
+          <p:cNvPr id="9" name="TextBox 8"/>
+          <p:cNvSpPr txBox="1"/>
+          <p:nvPr/>
+        </p:nvSpPr>
+        <p:spPr>
+          <a:xfrm>
+            <a:off x="3691889" y="1810512"/>
+            <a:ext cx="2000250" cy="777240"/>
+          </a:xfrm>
+          <a:prstGeom prst="rect">
+            <a:avLst/>
+          </a:prstGeom>
+          <a:noFill/>
+        </p:spPr>
+        <p:txBody>
+          <a:bodyPr wrap="square">
+            <a:spAutoFit/>
+          </a:bodyPr>
+          <a:lstStyle/>
+          <a:p>
+            <a:r>
+              <a:rPr sz="4000" b="1" i="0">
+                <a:solidFill>
+                  <a:srgbClr val="5B9BD5"/>
+                </a:solidFill>
+                <a:latin typeface="Times New Roman"/>
+              </a:rPr>
+              <a:t>14</a:t>
+            </a:r>
+          </a:p>
+        </p:txBody>
+      </p:sp>
+      <p:sp>
+        <p:nvSpPr>
+          <p:cNvPr id="10" name="TextBox 9"/>
+          <p:cNvSpPr txBox="1"/>
+          <p:nvPr/>
+        </p:nvSpPr>
+        <p:spPr>
+          <a:xfrm>
+            <a:off x="3691889" y="2633472"/>
+            <a:ext cx="2000250" cy="548640"/>
+          </a:xfrm>
+          <a:prstGeom prst="rect">
+            <a:avLst/>
+          </a:prstGeom>
+          <a:noFill/>
+        </p:spPr>
+        <p:txBody>
+          <a:bodyPr wrap="square">
+            <a:spAutoFit/>
+          </a:bodyPr>
+          <a:lstStyle/>
+          <a:p>
+            <a:r>
+              <a:rPr sz="1200" b="0" i="0">
+                <a:solidFill>
+                  <a:srgbClr val="9AA4B2"/>
+                </a:solidFill>
+                <a:latin typeface="Times New Roman"/>
+              </a:rPr>
+              <a:t>documentation pages</a:t>
+            </a:r>
+          </a:p>
+        </p:txBody>
+      </p:sp>
+      <p:sp>
+        <p:nvSpPr>
+          <p:cNvPr id="11" name="Rectangle 10"/>
+          <p:cNvSpPr/>
+          <p:nvPr/>
+        </p:nvSpPr>
+        <p:spPr>
+          <a:xfrm>
+            <a:off x="6240780" y="1645920"/>
+            <a:ext cx="2457450" cy="1600200"/>
+          </a:xfrm>
+          <a:prstGeom prst="rect">
+            <a:avLst/>
+          </a:prstGeom>
+          <a:solidFill>
+            <a:srgbClr val="181D27"/>
+          </a:solidFill>
+          <a:ln>
+            <a:noFill/>
+          </a:ln>
+          <a:effectLst/>
+        </p:spPr>
+        <p:style>
+          <a:lnRef idx="1">
+            <a:schemeClr val="accent1"/>
+          </a:lnRef>
+          <a:fillRef idx="3">
+            <a:schemeClr val="accent1"/>
+          </a:fillRef>
+          <a:effectRef idx="2">
+            <a:schemeClr val="accent1"/>
+          </a:effectRef>
+          <a:fontRef idx="minor">
+            <a:schemeClr val="lt1"/>
+          </a:fontRef>
+        </p:style>
+        <p:txBody>
+          <a:bodyPr rtlCol="0" anchor="ctr"/>
+          <a:lstStyle/>
+          <a:p>
+            <a:pPr algn="ctr"/>
+          </a:p>
+        </p:txBody>
+      </p:sp>
+      <p:sp>
+        <p:nvSpPr>
+          <p:cNvPr id="12" name="TextBox 11"/>
+          <p:cNvSpPr txBox="1"/>
+          <p:nvPr/>
+        </p:nvSpPr>
+        <p:spPr>
+          <a:xfrm>
+            <a:off x="6469380" y="1810512"/>
+            <a:ext cx="2000250" cy="777240"/>
+          </a:xfrm>
+          <a:prstGeom prst="rect">
+            <a:avLst/>
+          </a:prstGeom>
+          <a:noFill/>
+        </p:spPr>
+        <p:txBody>
+          <a:bodyPr wrap="square">
+            <a:spAutoFit/>
+          </a:bodyPr>
+          <a:lstStyle/>
+          <a:p>
+            <a:r>
+              <a:rPr sz="4000" b="1" i="0">
+                <a:solidFill>
+                  <a:srgbClr val="5B9BD5"/>
+                </a:solidFill>
+                <a:latin typeface="Times New Roman"/>
+              </a:rPr>
+              <a:t>6</a:t>
+            </a:r>
+          </a:p>
+        </p:txBody>
+      </p:sp>
+      <p:sp>
+        <p:nvSpPr>
+          <p:cNvPr id="13" name="TextBox 12"/>
+          <p:cNvSpPr txBox="1"/>
+          <p:nvPr/>
+        </p:nvSpPr>
+        <p:spPr>
+          <a:xfrm>
+            <a:off x="6469380" y="2633472"/>
+            <a:ext cx="2000250" cy="548640"/>
+          </a:xfrm>
+          <a:prstGeom prst="rect">
+            <a:avLst/>
+          </a:prstGeom>
+          <a:noFill/>
+        </p:spPr>
+        <p:txBody>
+          <a:bodyPr wrap="square">
+            <a:spAutoFit/>
+          </a:bodyPr>
+          <a:lstStyle/>
+          <a:p>
+            <a:r>
+              <a:rPr sz="1200" b="0" i="0">
+                <a:solidFill>
+                  <a:srgbClr val="9AA4B2"/>
+                </a:solidFill>
+                <a:latin typeface="Times New Roman"/>
+              </a:rPr>
+              <a:t>dashboard pages</a:t>
+            </a:r>
+          </a:p>
+        </p:txBody>
+      </p:sp>
+      <p:sp>
+        <p:nvSpPr>
+          <p:cNvPr id="14" name="Rectangle 13"/>
+          <p:cNvSpPr/>
+          <p:nvPr/>
+        </p:nvSpPr>
+        <p:spPr>
+          <a:xfrm>
+            <a:off x="9018270" y="1645920"/>
+            <a:ext cx="2457450" cy="1600200"/>
+          </a:xfrm>
+          <a:prstGeom prst="rect">
+            <a:avLst/>
+          </a:prstGeom>
+          <a:solidFill>
+            <a:srgbClr val="181D27"/>
+          </a:solidFill>
+          <a:ln>
+            <a:noFill/>
+          </a:ln>
+          <a:effectLst/>
+        </p:spPr>
+        <p:style>
+          <a:lnRef idx="1">
+            <a:schemeClr val="accent1"/>
+          </a:lnRef>
+          <a:fillRef idx="3">
+            <a:schemeClr val="accent1"/>
+          </a:fillRef>
+          <a:effectRef idx="2">
+            <a:schemeClr val="accent1"/>
+          </a:effectRef>
+          <a:fontRef idx="minor">
+            <a:schemeClr val="lt1"/>
+          </a:fontRef>
+        </p:style>
+        <p:txBody>
+          <a:bodyPr rtlCol="0" anchor="ctr"/>
+          <a:lstStyle/>
+          <a:p>
+            <a:pPr algn="ctr"/>
+          </a:p>
+        </p:txBody>
+      </p:sp>
+      <p:sp>
+        <p:nvSpPr>
+          <p:cNvPr id="15" name="TextBox 14"/>
+          <p:cNvSpPr txBox="1"/>
+          <p:nvPr/>
+        </p:nvSpPr>
+        <p:spPr>
+          <a:xfrm>
+            <a:off x="9246870" y="1810512"/>
+            <a:ext cx="2000250" cy="777240"/>
+          </a:xfrm>
+          <a:prstGeom prst="rect">
+            <a:avLst/>
+          </a:prstGeom>
+          <a:noFill/>
+        </p:spPr>
+        <p:txBody>
+          <a:bodyPr wrap="square">
+            <a:spAutoFit/>
+          </a:bodyPr>
+          <a:lstStyle/>
+          <a:p>
+            <a:r>
+              <a:rPr sz="4000" b="1" i="0">
+                <a:solidFill>
+                  <a:srgbClr val="5B9BD5"/>
+                </a:solidFill>
+                <a:latin typeface="Times New Roman"/>
+              </a:rPr>
+              <a:t>2</a:t>
+            </a:r>
+          </a:p>
+        </p:txBody>
+      </p:sp>
+      <p:sp>
+        <p:nvSpPr>
+          <p:cNvPr id="16" name="TextBox 15"/>
+          <p:cNvSpPr txBox="1"/>
+          <p:nvPr/>
+        </p:nvSpPr>
+        <p:spPr>
+          <a:xfrm>
+            <a:off x="9246870" y="2633472"/>
+            <a:ext cx="2000250" cy="548640"/>
+          </a:xfrm>
+          <a:prstGeom prst="rect">
+            <a:avLst/>
+          </a:prstGeom>
+          <a:noFill/>
+        </p:spPr>
+        <p:txBody>
+          <a:bodyPr wrap="square">
+            <a:spAutoFit/>
+          </a:bodyPr>
+          <a:lstStyle/>
+          <a:p>
+            <a:r>
+              <a:rPr sz="1200" b="0" i="0">
+                <a:solidFill>
+                  <a:srgbClr val="9AA4B2"/>
+                </a:solidFill>
+                <a:latin typeface="Times New Roman"/>
+              </a:rPr>
+              <a:t>execution modes</a:t>
+            </a:r>
+          </a:p>
+        </p:txBody>
+      </p:sp>
+      <p:sp>
+        <p:nvSpPr>
+          <p:cNvPr id="17" name="TextBox 16"/>
+          <p:cNvSpPr txBox="1"/>
+          <p:nvPr/>
+        </p:nvSpPr>
+        <p:spPr>
+          <a:xfrm>
+            <a:off x="777240" y="3611880"/>
+            <a:ext cx="10607040" cy="2697479"/>
+          </a:xfrm>
+          <a:prstGeom prst="rect">
+            <a:avLst/>
+          </a:prstGeom>
+          <a:noFill/>
+        </p:spPr>
+        <p:txBody>
+          <a:bodyPr wrap="square">
+            <a:spAutoFit/>
+          </a:bodyPr>
+          <a:lstStyle/>
+          <a:p>
+            <a:pPr>
+              <a:spcAft>
+                <a:spcPts val="1100"/>
+              </a:spcAft>
+            </a:pPr>
+            <a:r>
+              <a:rPr sz="1600" b="0" i="0">
+                <a:solidFill>
+                  <a:srgbClr val="5B9BD5"/>
+                </a:solidFill>
+                <a:latin typeface="Times New Roman"/>
+              </a:rPr>
+              <a:t>▪   </a:t>
+            </a:r>
+            <a:r>
+              <a:rPr sz="1600" b="0" i="0">
+                <a:solidFill>
+                  <a:srgbClr val="ECEFF4"/>
+                </a:solidFill>
+                <a:latin typeface="Times New Roman"/>
+              </a:rPr>
+              <a:t>Reproducible Snakemake + Bioconda pipeline; heavy steps scripted end-to-end on Galaxy.</a:t>
+            </a:r>
+          </a:p>
+          <a:p>
+            <a:pPr>
+              <a:spcAft>
+                <a:spcPts val="1100"/>
+              </a:spcAft>
+            </a:pPr>
+            <a:r>
+              <a:rPr sz="1600" b="0" i="0">
+                <a:solidFill>
+                  <a:srgbClr val="5B9BD5"/>
+                </a:solidFill>
+                <a:latin typeface="Times New Roman"/>
+              </a:rPr>
+              <a:t>▪   </a:t>
+            </a:r>
+            <a:r>
+              <a:rPr sz="1600" b="0" i="0">
+                <a:solidFill>
+                  <a:srgbClr val="ECEFF4"/>
+                </a:solidFill>
+                <a:latin typeface="Times New Roman"/>
+              </a:rPr>
+              <a:t>Synthetic example dataset over a real mini-reference with a truth set — the whole workflow runs and is tested without any patient data.</a:t>
+            </a:r>
+          </a:p>
+          <a:p>
+            <a:pPr>
+              <a:spcAft>
+                <a:spcPts val="1100"/>
+              </a:spcAft>
+            </a:pPr>
+            <a:r>
+              <a:rPr sz="1600" b="0" i="0">
+                <a:solidFill>
+                  <a:srgbClr val="5B9BD5"/>
+                </a:solidFill>
+                <a:latin typeface="Times New Roman"/>
+              </a:rPr>
+              <a:t>▪   </a:t>
+            </a:r>
+            <a:r>
+              <a:rPr sz="1600" b="0" i="0">
+                <a:solidFill>
+                  <a:srgbClr val="ECEFF4"/>
+                </a:solidFill>
+                <a:latin typeface="Times New Roman"/>
+              </a:rPr>
+              <a:t>Public repository with setup instructions, worked examples and educational documentation.</a:t>
+            </a:r>
+          </a:p>
+        </p:txBody>
+      </p:sp>
+      <p:sp>
+        <p:nvSpPr>
+          <p:cNvPr id="18" name="TextBox 17"/>
+          <p:cNvSpPr txBox="1"/>
+          <p:nvPr/>
+        </p:nvSpPr>
+        <p:spPr>
+          <a:xfrm>
+            <a:off x="777240" y="5806440"/>
+            <a:ext cx="10607040" cy="457200"/>
+          </a:xfrm>
+          <a:prstGeom prst="rect">
+            <a:avLst/>
+          </a:prstGeom>
+          <a:noFill/>
+        </p:spPr>
+        <p:txBody>
+          <a:bodyPr wrap="square">
+            <a:spAutoFit/>
+          </a:bodyPr>
+          <a:lstStyle/>
+          <a:p>
+            <a:r>
+              <a:rPr sz="1300" b="1" i="0">
                 <a:solidFill>
                   <a:srgbClr val="C00000"/>
                 </a:solidFill>
                 <a:latin typeface="Times New Roman"/>
               </a:rPr>
-              <a:t>Not a diagnostic tool. Not validated for clinical use. Educational output only.</a:t>
+              <a:t>[REPOSITORY URL]</a:t>
+            </a:r>
+          </a:p>
+        </p:txBody>
+      </p:sp>
+      <p:sp>
+        <p:nvSpPr>
+          <p:cNvPr id="19" name="TextBox 18"/>
+          <p:cNvSpPr txBox="1"/>
+          <p:nvPr/>
+        </p:nvSpPr>
+        <p:spPr>
+          <a:xfrm>
+            <a:off x="10607040" y="6382512"/>
+            <a:ext cx="1097280" cy="320040"/>
+          </a:xfrm>
+          <a:prstGeom prst="rect">
+            <a:avLst/>
+          </a:prstGeom>
+          <a:noFill/>
+        </p:spPr>
+        <p:txBody>
+          <a:bodyPr wrap="square">
+            <a:spAutoFit/>
+          </a:bodyPr>
+          <a:lstStyle/>
+          <a:p>
+            <a:pPr algn="r"/>
+            <a:r>
+              <a:rPr sz="1000" b="0" i="0">
+                <a:solidFill>
+                  <a:srgbClr val="9AA4B2"/>
+                </a:solidFill>
+                <a:latin typeface="Times New Roman"/>
+              </a:rPr>
+              <a:t>17 / 18</a:t>
+            </a:r>
+          </a:p>
+        </p:txBody>
+      </p:sp>
+    </p:spTree>
+  </p:cSld>
+  <p:clrMapOvr>
+    <a:masterClrMapping/>
+  </p:clrMapOvr>
+</p:sld>
+</file>
+
+<file path=ppt/slides/slide18.xml><?xml version="1.0" encoding="utf-8"?>
+<p:sld xmlns:a="http://schemas.openxmlformats.org/drawingml/2006/main" xmlns:p="http://schemas.openxmlformats.org/presentationml/2006/main" xmlns:r="http://schemas.openxmlformats.org/officeDocument/2006/relationships">
+  <p:cSld>
+    <p:spTree>
+      <p:nvGrpSpPr>
+        <p:cNvPr id="1" name=""/>
+        <p:cNvGrpSpPr/>
+        <p:nvPr/>
+      </p:nvGrpSpPr>
+      <p:grpSpPr/>
+      <p:sp>
+        <p:nvSpPr>
+          <p:cNvPr id="2" name="Rectangle 1"/>
+          <p:cNvSpPr/>
+          <p:nvPr/>
+        </p:nvSpPr>
+        <p:spPr>
+          <a:xfrm>
+            <a:off x="0" y="0"/>
+            <a:ext cx="12191695" cy="6858000"/>
+          </a:xfrm>
+          <a:prstGeom prst="rect">
+            <a:avLst/>
+          </a:prstGeom>
+          <a:solidFill>
+            <a:srgbClr val="0E1117"/>
+          </a:solidFill>
+          <a:ln>
+            <a:noFill/>
+          </a:ln>
+          <a:effectLst/>
+        </p:spPr>
+        <p:style>
+          <a:lnRef idx="1">
+            <a:schemeClr val="accent1"/>
+          </a:lnRef>
+          <a:fillRef idx="3">
+            <a:schemeClr val="accent1"/>
+          </a:fillRef>
+          <a:effectRef idx="2">
+            <a:schemeClr val="accent1"/>
+          </a:effectRef>
+          <a:fontRef idx="minor">
+            <a:schemeClr val="lt1"/>
+          </a:fontRef>
+        </p:style>
+        <p:txBody>
+          <a:bodyPr rtlCol="0" anchor="ctr"/>
+          <a:lstStyle/>
+          <a:p>
+            <a:pPr algn="ctr"/>
+          </a:p>
+        </p:txBody>
+      </p:sp>
+      <p:sp>
+        <p:nvSpPr>
+          <p:cNvPr id="3" name="TextBox 2"/>
+          <p:cNvSpPr txBox="1"/>
+          <p:nvPr/>
+        </p:nvSpPr>
+        <p:spPr>
+          <a:xfrm>
+            <a:off x="685800" y="502920"/>
+            <a:ext cx="10789920" cy="777240"/>
+          </a:xfrm>
+          <a:prstGeom prst="rect">
+            <a:avLst/>
+          </a:prstGeom>
+          <a:noFill/>
+        </p:spPr>
+        <p:txBody>
+          <a:bodyPr wrap="square">
+            <a:spAutoFit/>
+          </a:bodyPr>
+          <a:lstStyle/>
+          <a:p>
+            <a:r>
+              <a:rPr sz="3000" b="1" i="0">
+                <a:solidFill>
+                  <a:srgbClr val="ECEFF4"/>
+                </a:solidFill>
+                <a:latin typeface="Times New Roman"/>
+              </a:rPr>
+              <a:t>Conclusions</a:t>
+            </a:r>
+          </a:p>
+        </p:txBody>
+      </p:sp>
+      <p:sp>
+        <p:nvSpPr>
+          <p:cNvPr id="4" name="Rectangle 3"/>
+          <p:cNvSpPr/>
+          <p:nvPr/>
+        </p:nvSpPr>
+        <p:spPr>
+          <a:xfrm>
+            <a:off x="713232" y="1344168"/>
+            <a:ext cx="1371600" cy="41148"/>
+          </a:xfrm>
+          <a:prstGeom prst="rect">
+            <a:avLst/>
+          </a:prstGeom>
+          <a:solidFill>
+            <a:srgbClr val="4CAF7D"/>
+          </a:solidFill>
+          <a:ln>
+            <a:noFill/>
+          </a:ln>
+          <a:effectLst/>
+        </p:spPr>
+        <p:style>
+          <a:lnRef idx="1">
+            <a:schemeClr val="accent1"/>
+          </a:lnRef>
+          <a:fillRef idx="3">
+            <a:schemeClr val="accent1"/>
+          </a:fillRef>
+          <a:effectRef idx="2">
+            <a:schemeClr val="accent1"/>
+          </a:effectRef>
+          <a:fontRef idx="minor">
+            <a:schemeClr val="lt1"/>
+          </a:fontRef>
+        </p:style>
+        <p:txBody>
+          <a:bodyPr rtlCol="0" anchor="ctr"/>
+          <a:lstStyle/>
+          <a:p>
+            <a:pPr algn="ctr"/>
+          </a:p>
+        </p:txBody>
+      </p:sp>
+      <p:sp>
+        <p:nvSpPr>
+          <p:cNvPr id="5" name="TextBox 4"/>
+          <p:cNvSpPr txBox="1"/>
+          <p:nvPr/>
+        </p:nvSpPr>
+        <p:spPr>
+          <a:xfrm>
+            <a:off x="777240" y="1645920"/>
+            <a:ext cx="10607040" cy="4663440"/>
+          </a:xfrm>
+          <a:prstGeom prst="rect">
+            <a:avLst/>
+          </a:prstGeom>
+          <a:noFill/>
+        </p:spPr>
+        <p:txBody>
+          <a:bodyPr wrap="square">
+            <a:spAutoFit/>
+          </a:bodyPr>
+          <a:lstStyle/>
+          <a:p>
+            <a:pPr>
+              <a:spcAft>
+                <a:spcPts val="1100"/>
+              </a:spcAft>
+            </a:pPr>
+            <a:r>
+              <a:rPr sz="1900" b="0" i="0">
+                <a:solidFill>
+                  <a:srgbClr val="4CAF7D"/>
+                </a:solidFill>
+                <a:latin typeface="Times New Roman"/>
+              </a:rPr>
+              <a:t>▪   </a:t>
+            </a:r>
+            <a:r>
+              <a:rPr sz="1900" b="0" i="0">
+                <a:solidFill>
+                  <a:srgbClr val="ECEFF4"/>
+                </a:solidFill>
+                <a:latin typeface="Times New Roman"/>
+              </a:rPr>
+              <a:t>An open pipeline, on a laptop plus a free public service, reproduced an accredited laboratory's finding to three decimal places.</a:t>
+            </a:r>
+          </a:p>
+          <a:p>
+            <a:pPr>
+              <a:spcAft>
+                <a:spcPts val="1100"/>
+              </a:spcAft>
+            </a:pPr>
+            <a:r>
+              <a:rPr sz="1900" b="0" i="0">
+                <a:solidFill>
+                  <a:srgbClr val="4CAF7D"/>
+                </a:solidFill>
+                <a:latin typeface="Times New Roman"/>
+              </a:rPr>
+              <a:t>▪   </a:t>
+            </a:r>
+            <a:r>
+              <a:rPr sz="1900" b="0" i="0">
+                <a:solidFill>
+                  <a:srgbClr val="ECEFF4"/>
+                </a:solidFill>
+                <a:latin typeface="Times New Roman"/>
+              </a:rPr>
+              <a:t>Every disagreement was explicable and measurable: evidence coverage, reporting thresholds, and one identifiable chemistry artefact.</a:t>
+            </a:r>
+          </a:p>
+          <a:p>
+            <a:pPr>
+              <a:spcAft>
+                <a:spcPts val="1100"/>
+              </a:spcAft>
+            </a:pPr>
+            <a:r>
+              <a:rPr sz="1900" b="0" i="0">
+                <a:solidFill>
+                  <a:srgbClr val="4CAF7D"/>
+                </a:solidFill>
+                <a:latin typeface="Times New Roman"/>
+              </a:rPr>
+              <a:t>▪   </a:t>
+            </a:r>
+            <a:r>
+              <a:rPr sz="1900" b="0" i="0">
+                <a:solidFill>
+                  <a:srgbClr val="ECEFF4"/>
+                </a:solidFill>
+                <a:latin typeface="Times New Roman"/>
+              </a:rPr>
+              <a:t>The most useful property is not the agreement but the capacity to say precisely where the answers stop.</a:t>
+            </a:r>
+          </a:p>
+        </p:txBody>
+      </p:sp>
+      <p:sp>
+        <p:nvSpPr>
+          <p:cNvPr id="6" name="Rectangle 5"/>
+          <p:cNvSpPr/>
+          <p:nvPr/>
+        </p:nvSpPr>
+        <p:spPr>
+          <a:xfrm>
+            <a:off x="685800" y="5120640"/>
+            <a:ext cx="10789920" cy="731520"/>
+          </a:xfrm>
+          <a:prstGeom prst="rect">
+            <a:avLst/>
+          </a:prstGeom>
+          <a:solidFill>
+            <a:srgbClr val="181D27"/>
+          </a:solidFill>
+          <a:ln>
+            <a:noFill/>
+          </a:ln>
+          <a:effectLst/>
+        </p:spPr>
+        <p:style>
+          <a:lnRef idx="1">
+            <a:schemeClr val="accent1"/>
+          </a:lnRef>
+          <a:fillRef idx="3">
+            <a:schemeClr val="accent1"/>
+          </a:fillRef>
+          <a:effectRef idx="2">
+            <a:schemeClr val="accent1"/>
+          </a:effectRef>
+          <a:fontRef idx="minor">
+            <a:schemeClr val="lt1"/>
+          </a:fontRef>
+        </p:style>
+        <p:txBody>
+          <a:bodyPr rtlCol="0" anchor="ctr"/>
+          <a:lstStyle/>
+          <a:p>
+            <a:pPr algn="ctr"/>
+          </a:p>
+        </p:txBody>
+      </p:sp>
+      <p:sp>
+        <p:nvSpPr>
+          <p:cNvPr id="7" name="Rectangle 6"/>
+          <p:cNvSpPr/>
+          <p:nvPr/>
+        </p:nvSpPr>
+        <p:spPr>
+          <a:xfrm>
+            <a:off x="685800" y="5120640"/>
+            <a:ext cx="50292" cy="731520"/>
+          </a:xfrm>
+          <a:prstGeom prst="rect">
+            <a:avLst/>
+          </a:prstGeom>
+          <a:solidFill>
+            <a:srgbClr val="C55A5A"/>
+          </a:solidFill>
+          <a:ln>
+            <a:noFill/>
+          </a:ln>
+          <a:effectLst/>
+        </p:spPr>
+        <p:style>
+          <a:lnRef idx="1">
+            <a:schemeClr val="accent1"/>
+          </a:lnRef>
+          <a:fillRef idx="3">
+            <a:schemeClr val="accent1"/>
+          </a:fillRef>
+          <a:effectRef idx="2">
+            <a:schemeClr val="accent1"/>
+          </a:effectRef>
+          <a:fontRef idx="minor">
+            <a:schemeClr val="lt1"/>
+          </a:fontRef>
+        </p:style>
+        <p:txBody>
+          <a:bodyPr rtlCol="0" anchor="ctr"/>
+          <a:lstStyle/>
+          <a:p>
+            <a:pPr algn="ctr"/>
+          </a:p>
+        </p:txBody>
+      </p:sp>
+      <p:sp>
+        <p:nvSpPr>
+          <p:cNvPr id="8" name="TextBox 7"/>
+          <p:cNvSpPr txBox="1"/>
+          <p:nvPr/>
+        </p:nvSpPr>
+        <p:spPr>
+          <a:xfrm>
+            <a:off x="932688" y="5239512"/>
+            <a:ext cx="10424160" cy="548640"/>
+          </a:xfrm>
+          <a:prstGeom prst="rect">
+            <a:avLst/>
+          </a:prstGeom>
+          <a:noFill/>
+        </p:spPr>
+        <p:txBody>
+          <a:bodyPr wrap="square">
+            <a:spAutoFit/>
+          </a:bodyPr>
+          <a:lstStyle/>
+          <a:p>
+            <a:r>
+              <a:rPr sz="1500" b="0" i="0">
+                <a:solidFill>
+                  <a:srgbClr val="ECEFF4"/>
+                </a:solidFill>
+                <a:latin typeface="Times New Roman"/>
+              </a:rPr>
+              <a:t>Educational output. Not a diagnostic tool, not clinically validated, and not a basis for medical decisions.</a:t>
+            </a:r>
+          </a:p>
+        </p:txBody>
+      </p:sp>
+      <p:sp>
+        <p:nvSpPr>
+          <p:cNvPr id="9" name="TextBox 8"/>
+          <p:cNvSpPr txBox="1"/>
+          <p:nvPr/>
+        </p:nvSpPr>
+        <p:spPr>
+          <a:xfrm>
+            <a:off x="10607040" y="6382512"/>
+            <a:ext cx="1097280" cy="320040"/>
+          </a:xfrm>
+          <a:prstGeom prst="rect">
+            <a:avLst/>
+          </a:prstGeom>
+          <a:noFill/>
+        </p:spPr>
+        <p:txBody>
+          <a:bodyPr wrap="square">
+            <a:spAutoFit/>
+          </a:bodyPr>
+          <a:lstStyle/>
+          <a:p>
+            <a:pPr algn="r"/>
+            <a:r>
+              <a:rPr sz="1000" b="0" i="0">
+                <a:solidFill>
+                  <a:srgbClr val="9AA4B2"/>
+                </a:solidFill>
+                <a:latin typeface="Times New Roman"/>
+              </a:rPr>
+              <a:t>18 / 18</a:t>
             </a:r>
           </a:p>
         </p:txBody>
@@ -4020,14 +7646,146 @@
       <p:grpSpPr/>
       <p:sp>
         <p:nvSpPr>
-          <p:cNvPr id="2" name="TextBox 1"/>
+          <p:cNvPr id="2" name="Rectangle 1"/>
+          <p:cNvSpPr/>
+          <p:nvPr/>
+        </p:nvSpPr>
+        <p:spPr>
+          <a:xfrm>
+            <a:off x="0" y="0"/>
+            <a:ext cx="12191695" cy="6858000"/>
+          </a:xfrm>
+          <a:prstGeom prst="rect">
+            <a:avLst/>
+          </a:prstGeom>
+          <a:solidFill>
+            <a:srgbClr val="0E1117"/>
+          </a:solidFill>
+          <a:ln>
+            <a:noFill/>
+          </a:ln>
+          <a:effectLst/>
+        </p:spPr>
+        <p:style>
+          <a:lnRef idx="1">
+            <a:schemeClr val="accent1"/>
+          </a:lnRef>
+          <a:fillRef idx="3">
+            <a:schemeClr val="accent1"/>
+          </a:fillRef>
+          <a:effectRef idx="2">
+            <a:schemeClr val="accent1"/>
+          </a:effectRef>
+          <a:fontRef idx="minor">
+            <a:schemeClr val="lt1"/>
+          </a:fontRef>
+        </p:style>
+        <p:txBody>
+          <a:bodyPr rtlCol="0" anchor="ctr"/>
+          <a:lstStyle/>
+          <a:p>
+            <a:pPr algn="ctr"/>
+          </a:p>
+        </p:txBody>
+      </p:sp>
+      <p:sp>
+        <p:nvSpPr>
+          <p:cNvPr id="3" name="Rectangle 2"/>
+          <p:cNvSpPr/>
+          <p:nvPr/>
+        </p:nvSpPr>
+        <p:spPr>
+          <a:xfrm>
+            <a:off x="685800" y="1417320"/>
+            <a:ext cx="10789920" cy="1828800"/>
+          </a:xfrm>
+          <a:prstGeom prst="rect">
+            <a:avLst/>
+          </a:prstGeom>
+          <a:solidFill>
+            <a:srgbClr val="181D27"/>
+          </a:solidFill>
+          <a:ln>
+            <a:noFill/>
+          </a:ln>
+          <a:effectLst/>
+        </p:spPr>
+        <p:style>
+          <a:lnRef idx="1">
+            <a:schemeClr val="accent1"/>
+          </a:lnRef>
+          <a:fillRef idx="3">
+            <a:schemeClr val="accent1"/>
+          </a:fillRef>
+          <a:effectRef idx="2">
+            <a:schemeClr val="accent1"/>
+          </a:effectRef>
+          <a:fontRef idx="minor">
+            <a:schemeClr val="lt1"/>
+          </a:fontRef>
+        </p:style>
+        <p:txBody>
+          <a:bodyPr rtlCol="0" anchor="ctr"/>
+          <a:lstStyle/>
+          <a:p>
+            <a:pPr algn="ctr"/>
+          </a:p>
+        </p:txBody>
+      </p:sp>
+      <p:sp>
+        <p:nvSpPr>
+          <p:cNvPr id="4" name="Rectangle 3"/>
+          <p:cNvSpPr/>
+          <p:nvPr/>
+        </p:nvSpPr>
+        <p:spPr>
+          <a:xfrm>
+            <a:off x="685800" y="1417320"/>
+            <a:ext cx="50292" cy="1828800"/>
+          </a:xfrm>
+          <a:prstGeom prst="rect">
+            <a:avLst/>
+          </a:prstGeom>
+          <a:solidFill>
+            <a:srgbClr val="5B9BD5"/>
+          </a:solidFill>
+          <a:ln>
+            <a:noFill/>
+          </a:ln>
+          <a:effectLst/>
+        </p:spPr>
+        <p:style>
+          <a:lnRef idx="1">
+            <a:schemeClr val="accent1"/>
+          </a:lnRef>
+          <a:fillRef idx="3">
+            <a:schemeClr val="accent1"/>
+          </a:fillRef>
+          <a:effectRef idx="2">
+            <a:schemeClr val="accent1"/>
+          </a:effectRef>
+          <a:fontRef idx="minor">
+            <a:schemeClr val="lt1"/>
+          </a:fontRef>
+        </p:style>
+        <p:txBody>
+          <a:bodyPr rtlCol="0" anchor="ctr"/>
+          <a:lstStyle/>
+          <a:p>
+            <a:pPr algn="ctr"/>
+          </a:p>
+        </p:txBody>
+      </p:sp>
+      <p:sp>
+        <p:nvSpPr>
+          <p:cNvPr id="5" name="TextBox 4"/>
           <p:cNvSpPr txBox="1"/>
           <p:nvPr/>
         </p:nvSpPr>
         <p:spPr>
           <a:xfrm>
-            <a:off x="548640" y="320040"/>
-            <a:ext cx="11064240" cy="822960"/>
+            <a:off x="1051560" y="1783080"/>
+            <a:ext cx="10149840" cy="1280160"/>
           </a:xfrm>
           <a:prstGeom prst="rect">
             <a:avLst/>
@@ -4041,27 +7799,38 @@
           <a:lstStyle/>
           <a:p>
             <a:r>
-              <a:rPr sz="3000" b="1" i="0">
-                <a:solidFill>
-                  <a:srgbClr val="1F4E79"/>
-                </a:solidFill>
-                <a:latin typeface="Times New Roman"/>
-              </a:rPr>
-              <a:t>The question</a:t>
-            </a:r>
-          </a:p>
-        </p:txBody>
-      </p:sp>
-      <p:sp>
-        <p:nvSpPr>
-          <p:cNvPr id="3" name="TextBox 2"/>
+              <a:rPr sz="2700" b="0" i="1">
+                <a:solidFill>
+                  <a:srgbClr val="ECEFF4"/>
+                </a:solidFill>
+                <a:latin typeface="Times New Roman"/>
+              </a:rPr>
+              <a:t>“What can we understand about a person's disease</a:t>
+            </a:r>
+          </a:p>
+          <a:p>
+            <a:r>
+              <a:rPr sz="2700" b="0" i="1">
+                <a:solidFill>
+                  <a:srgbClr val="ECEFF4"/>
+                </a:solidFill>
+                <a:latin typeface="Times New Roman"/>
+              </a:rPr>
+              <a:t>by looking at their tumour's genetic material?”</a:t>
+            </a:r>
+          </a:p>
+        </p:txBody>
+      </p:sp>
+      <p:sp>
+        <p:nvSpPr>
+          <p:cNvPr id="6" name="TextBox 5"/>
           <p:cNvSpPr txBox="1"/>
           <p:nvPr/>
         </p:nvSpPr>
         <p:spPr>
           <a:xfrm>
-            <a:off x="1005840" y="1828800"/>
-            <a:ext cx="10058400" cy="1371600"/>
+            <a:off x="777240" y="3703320"/>
+            <a:ext cx="10607040" cy="2606040"/>
           </a:xfrm>
           <a:prstGeom prst="rect">
             <a:avLst/>
@@ -4074,28 +7843,92 @@
           </a:bodyPr>
           <a:lstStyle/>
           <a:p>
-            <a:r>
-              <a:rPr sz="2600" b="0" i="1">
-                <a:solidFill>
-                  <a:srgbClr val="1F4E79"/>
-                </a:solidFill>
-                <a:latin typeface="Times New Roman"/>
-              </a:rPr>
-              <a:t>“What can we understand about a person's disease by looking at their tumour's genetic material?”</a:t>
-            </a:r>
-          </a:p>
-        </p:txBody>
-      </p:sp>
-      <p:sp>
-        <p:nvSpPr>
-          <p:cNvPr id="4" name="TextBox 3"/>
+            <a:pPr>
+              <a:spcAft>
+                <a:spcPts val="1100"/>
+              </a:spcAft>
+            </a:pPr>
+            <a:r>
+              <a:rPr sz="1700" b="0" i="0">
+                <a:solidFill>
+                  <a:srgbClr val="5B9BD5"/>
+                </a:solidFill>
+                <a:latin typeface="Times New Roman"/>
+              </a:rPr>
+              <a:t>▪   </a:t>
+            </a:r>
+            <a:r>
+              <a:rPr sz="1700" b="0" i="0">
+                <a:solidFill>
+                  <a:srgbClr val="ECEFF4"/>
+                </a:solidFill>
+                <a:latin typeface="Times New Roman"/>
+              </a:rPr>
+              <a:t>A biopsy is sequenced and a two-page clinical report names a few mutations and the drugs that target them.</a:t>
+            </a:r>
+          </a:p>
+          <a:p>
+            <a:pPr>
+              <a:spcAft>
+                <a:spcPts val="1100"/>
+              </a:spcAft>
+            </a:pPr>
+            <a:r>
+              <a:rPr sz="1700" b="0" i="0">
+                <a:solidFill>
+                  <a:srgbClr val="5B9BD5"/>
+                </a:solidFill>
+                <a:latin typeface="Times New Roman"/>
+              </a:rPr>
+              <a:t>▪   </a:t>
+            </a:r>
+            <a:r>
+              <a:rPr sz="1700" b="0" i="0">
+                <a:solidFill>
+                  <a:srgbClr val="ECEFF4"/>
+                </a:solidFill>
+                <a:latin typeface="Times New Roman"/>
+              </a:rPr>
+              <a:t>What happens in between is invisible: the software is commercial and closed, the thresholds undocumented, the reasoning not shown.</a:t>
+            </a:r>
+          </a:p>
+          <a:p>
+            <a:pPr>
+              <a:spcAft>
+                <a:spcPts val="1100"/>
+              </a:spcAft>
+            </a:pPr>
+            <a:r>
+              <a:rPr sz="1700" b="0" i="0">
+                <a:solidFill>
+                  <a:srgbClr val="5B9BD5"/>
+                </a:solidFill>
+                <a:latin typeface="Times New Roman"/>
+              </a:rPr>
+              <a:t>▪   </a:t>
+            </a:r>
+            <a:r>
+              <a:rPr sz="1700" b="0" i="0">
+                <a:solidFill>
+                  <a:srgbClr val="ECEFF4"/>
+                </a:solidFill>
+                <a:latin typeface="Times New Roman"/>
+              </a:rPr>
+              <a:t>This project builds that chain in the open — then checks it against the real clinical report for the same specimen.</a:t>
+            </a:r>
+          </a:p>
+        </p:txBody>
+      </p:sp>
+      <p:sp>
+        <p:nvSpPr>
+          <p:cNvPr id="7" name="TextBox 6"/>
           <p:cNvSpPr txBox="1"/>
           <p:nvPr/>
         </p:nvSpPr>
         <p:spPr>
           <a:xfrm>
-            <a:off x="685800" y="3200400"/>
-            <a:ext cx="10881360" cy="4937760"/>
+            <a:off x="10607040" y="6382512"/>
+            <a:ext cx="1097280" cy="320040"/>
           </a:xfrm>
           <a:prstGeom prst="rect">
             <a:avLst/>
@@ -4108,51 +7941,15 @@
           </a:bodyPr>
           <a:lstStyle/>
           <a:p>
-            <a:pPr>
-              <a:spcAft>
-                <a:spcPts val="600"/>
-              </a:spcAft>
-            </a:pPr>
-            <a:r>
-              <a:rPr sz="1800" b="0" i="0">
-                <a:solidFill>
-                  <a:srgbClr val="1A1A1A"/>
-                </a:solidFill>
-                <a:latin typeface="Times New Roman"/>
-              </a:rPr>
-              <a:t>•  A tumour biopsy is sequenced, and a two-page clinical report names a few mutations and the drugs that target them.</a:t>
-            </a:r>
-          </a:p>
-          <a:p>
-            <a:pPr>
-              <a:spcAft>
-                <a:spcPts val="600"/>
-              </a:spcAft>
-            </a:pPr>
-            <a:r>
-              <a:rPr sz="1800" b="0" i="0">
-                <a:solidFill>
-                  <a:srgbClr val="1A1A1A"/>
-                </a:solidFill>
-                <a:latin typeface="Times New Roman"/>
-              </a:rPr>
-              <a:t>•  What happens in between is invisible: the software is commercial and closed, the thresholds are undocumented, and the reasoning is not shown.</a:t>
-            </a:r>
-          </a:p>
-          <a:p>
-            <a:pPr>
-              <a:spcAft>
-                <a:spcPts val="600"/>
-              </a:spcAft>
-            </a:pPr>
-            <a:r>
-              <a:rPr sz="1800" b="0" i="0">
-                <a:solidFill>
-                  <a:srgbClr val="1A1A1A"/>
-                </a:solidFill>
-                <a:latin typeface="Times New Roman"/>
-              </a:rPr>
-              <a:t>•  This project builds that chain in the open — and then checks it against the real clinical report for the same specimen.</a:t>
+            <a:pPr algn="r"/>
+            <a:r>
+              <a:rPr sz="1000" b="0" i="0">
+                <a:solidFill>
+                  <a:srgbClr val="9AA4B2"/>
+                </a:solidFill>
+                <a:latin typeface="Times New Roman"/>
+              </a:rPr>
+              <a:t>2 / 18</a:t>
             </a:r>
           </a:p>
         </p:txBody>
@@ -4177,14 +7974,102 @@
       <p:grpSpPr/>
       <p:sp>
         <p:nvSpPr>
-          <p:cNvPr id="2" name="TextBox 1"/>
+          <p:cNvPr id="2" name="Rectangle 1"/>
+          <p:cNvSpPr/>
+          <p:nvPr/>
+        </p:nvSpPr>
+        <p:spPr>
+          <a:xfrm>
+            <a:off x="0" y="0"/>
+            <a:ext cx="12191695" cy="6858000"/>
+          </a:xfrm>
+          <a:prstGeom prst="rect">
+            <a:avLst/>
+          </a:prstGeom>
+          <a:solidFill>
+            <a:srgbClr val="0E1117"/>
+          </a:solidFill>
+          <a:ln>
+            <a:noFill/>
+          </a:ln>
+          <a:effectLst/>
+        </p:spPr>
+        <p:style>
+          <a:lnRef idx="1">
+            <a:schemeClr val="accent1"/>
+          </a:lnRef>
+          <a:fillRef idx="3">
+            <a:schemeClr val="accent1"/>
+          </a:fillRef>
+          <a:effectRef idx="2">
+            <a:schemeClr val="accent1"/>
+          </a:effectRef>
+          <a:fontRef idx="minor">
+            <a:schemeClr val="lt1"/>
+          </a:fontRef>
+        </p:style>
+        <p:txBody>
+          <a:bodyPr rtlCol="0" anchor="ctr"/>
+          <a:lstStyle/>
+          <a:p>
+            <a:pPr algn="ctr"/>
+          </a:p>
+        </p:txBody>
+      </p:sp>
+      <p:sp>
+        <p:nvSpPr>
+          <p:cNvPr id="3" name="Rectangle 2"/>
+          <p:cNvSpPr/>
+          <p:nvPr/>
+        </p:nvSpPr>
+        <p:spPr>
+          <a:xfrm>
+            <a:off x="0" y="2331720"/>
+            <a:ext cx="12191695" cy="54864"/>
+          </a:xfrm>
+          <a:prstGeom prst="rect">
+            <a:avLst/>
+          </a:prstGeom>
+          <a:solidFill>
+            <a:srgbClr val="5B9BD5"/>
+          </a:solidFill>
+          <a:ln>
+            <a:noFill/>
+          </a:ln>
+          <a:effectLst/>
+        </p:spPr>
+        <p:style>
+          <a:lnRef idx="1">
+            <a:schemeClr val="accent1"/>
+          </a:lnRef>
+          <a:fillRef idx="3">
+            <a:schemeClr val="accent1"/>
+          </a:fillRef>
+          <a:effectRef idx="2">
+            <a:schemeClr val="accent1"/>
+          </a:effectRef>
+          <a:fontRef idx="minor">
+            <a:schemeClr val="lt1"/>
+          </a:fontRef>
+        </p:style>
+        <p:txBody>
+          <a:bodyPr rtlCol="0" anchor="ctr"/>
+          <a:lstStyle/>
+          <a:p>
+            <a:pPr algn="ctr"/>
+          </a:p>
+        </p:txBody>
+      </p:sp>
+      <p:sp>
+        <p:nvSpPr>
+          <p:cNvPr id="4" name="TextBox 3"/>
           <p:cNvSpPr txBox="1"/>
           <p:nvPr/>
         </p:nvSpPr>
         <p:spPr>
           <a:xfrm>
-            <a:off x="548640" y="320040"/>
-            <a:ext cx="11064240" cy="822960"/>
+            <a:off x="822960" y="2651760"/>
+            <a:ext cx="10515600" cy="822960"/>
           </a:xfrm>
           <a:prstGeom prst="rect">
             <a:avLst/>
@@ -4198,345 +8083,27 @@
           <a:lstStyle/>
           <a:p>
             <a:r>
-              <a:rPr sz="3000" b="1" i="0">
-                <a:solidFill>
-                  <a:srgbClr val="1F4E79"/>
-                </a:solidFill>
-                <a:latin typeface="Times New Roman"/>
-              </a:rPr>
-              <a:t>What we started with</a:t>
-            </a:r>
-          </a:p>
-          <a:p>
-            <a:r>
-              <a:rPr sz="1500" b="0" i="1">
-                <a:solidFill>
-                  <a:srgbClr val="555555"/>
-                </a:solidFill>
-                <a:latin typeface="Times New Roman"/>
-              </a:rPr>
-              <a:t>One biopsy, sequenced twice — and no documentation</a:t>
-            </a:r>
-          </a:p>
-        </p:txBody>
-      </p:sp>
-      <p:graphicFrame>
-        <p:nvGraphicFramePr>
-          <p:cNvPr id="3" name="Table 2"/>
-          <p:cNvGraphicFramePr>
-            <a:graphicFrameLocks noGrp="1"/>
-          </p:cNvGraphicFramePr>
-          <p:nvPr/>
-        </p:nvGraphicFramePr>
-        <p:xfrm>
-          <a:off x="822960" y="1737360"/>
-          <a:ext cx="10515600" cy="2194560"/>
-        </p:xfrm>
-        <a:graphic>
-          <a:graphicData uri="http://schemas.openxmlformats.org/drawingml/2006/table">
-            <a:tbl>
-              <a:tblPr firstRow="1" bandRow="1">
-                <a:tableStyleId>{5C22544A-7EE6-4342-B048-85BDC9FD1C3A}</a:tableStyleId>
-              </a:tblPr>
-              <a:tblGrid>
-                <a:gridCol w="3505200"/>
-                <a:gridCol w="3505200"/>
-                <a:gridCol w="3505200"/>
-              </a:tblGrid>
-              <a:tr h="438912">
-                <a:tc>
-                  <a:txBody>
-                    <a:bodyPr/>
-                    <a:lstStyle/>
-                    <a:p>
-                      <a:r>
-                        <a:rPr sz="1300" b="1" i="0">
-                          <a:solidFill>
-                            <a:srgbClr val="1A1A1A"/>
-                          </a:solidFill>
-                          <a:latin typeface="Times New Roman"/>
-                        </a:rPr>
-                        <a:t/>
-                      </a:r>
-                    </a:p>
-                  </a:txBody>
-                  <a:tcPr/>
-                </a:tc>
-                <a:tc>
-                  <a:txBody>
-                    <a:bodyPr/>
-                    <a:lstStyle/>
-                    <a:p>
-                      <a:r>
-                        <a:rPr sz="1300" b="1" i="0">
-                          <a:solidFill>
-                            <a:srgbClr val="1A1A1A"/>
-                          </a:solidFill>
-                          <a:latin typeface="Times New Roman"/>
-                        </a:rPr>
-                        <a:t>DNA</a:t>
-                      </a:r>
-                    </a:p>
-                  </a:txBody>
-                  <a:tcPr/>
-                </a:tc>
-                <a:tc>
-                  <a:txBody>
-                    <a:bodyPr/>
-                    <a:lstStyle/>
-                    <a:p>
-                      <a:r>
-                        <a:rPr sz="1300" b="1" i="0">
-                          <a:solidFill>
-                            <a:srgbClr val="1A1A1A"/>
-                          </a:solidFill>
-                          <a:latin typeface="Times New Roman"/>
-                        </a:rPr>
-                        <a:t>RNA</a:t>
-                      </a:r>
-                    </a:p>
-                  </a:txBody>
-                  <a:tcPr/>
-                </a:tc>
-              </a:tr>
-              <a:tr h="438912">
-                <a:tc>
-                  <a:txBody>
-                    <a:bodyPr/>
-                    <a:lstStyle/>
-                    <a:p>
-                      <a:r>
-                        <a:rPr sz="1300" b="0" i="0">
-                          <a:solidFill>
-                            <a:srgbClr val="1A1A1A"/>
-                          </a:solidFill>
-                          <a:latin typeface="Times New Roman"/>
-                        </a:rPr>
-                        <a:t>Read pairs</a:t>
-                      </a:r>
-                    </a:p>
-                  </a:txBody>
-                  <a:tcPr/>
-                </a:tc>
-                <a:tc>
-                  <a:txBody>
-                    <a:bodyPr/>
-                    <a:lstStyle/>
-                    <a:p>
-                      <a:r>
-                        <a:rPr sz="1300" b="0" i="0">
-                          <a:solidFill>
-                            <a:srgbClr val="1A1A1A"/>
-                          </a:solidFill>
-                          <a:latin typeface="Times New Roman"/>
-                        </a:rPr>
-                        <a:t>5,542,544</a:t>
-                      </a:r>
-                    </a:p>
-                  </a:txBody>
-                  <a:tcPr/>
-                </a:tc>
-                <a:tc>
-                  <a:txBody>
-                    <a:bodyPr/>
-                    <a:lstStyle/>
-                    <a:p>
-                      <a:r>
-                        <a:rPr sz="1300" b="0" i="0">
-                          <a:solidFill>
-                            <a:srgbClr val="1A1A1A"/>
-                          </a:solidFill>
-                          <a:latin typeface="Times New Roman"/>
-                        </a:rPr>
-                        <a:t>13,870,216</a:t>
-                      </a:r>
-                    </a:p>
-                  </a:txBody>
-                  <a:tcPr/>
-                </a:tc>
-              </a:tr>
-              <a:tr h="438912">
-                <a:tc>
-                  <a:txBody>
-                    <a:bodyPr/>
-                    <a:lstStyle/>
-                    <a:p>
-                      <a:r>
-                        <a:rPr sz="1300" b="0" i="0">
-                          <a:solidFill>
-                            <a:srgbClr val="1A1A1A"/>
-                          </a:solidFill>
-                          <a:latin typeface="Times New Roman"/>
-                        </a:rPr>
-                        <a:t>Read length</a:t>
-                      </a:r>
-                    </a:p>
-                  </a:txBody>
-                  <a:tcPr/>
-                </a:tc>
-                <a:tc>
-                  <a:txBody>
-                    <a:bodyPr/>
-                    <a:lstStyle/>
-                    <a:p>
-                      <a:r>
-                        <a:rPr sz="1300" b="0" i="0">
-                          <a:solidFill>
-                            <a:srgbClr val="1A1A1A"/>
-                          </a:solidFill>
-                          <a:latin typeface="Times New Roman"/>
-                        </a:rPr>
-                        <a:t>2 × 149 bp</a:t>
-                      </a:r>
-                    </a:p>
-                  </a:txBody>
-                  <a:tcPr/>
-                </a:tc>
-                <a:tc>
-                  <a:txBody>
-                    <a:bodyPr/>
-                    <a:lstStyle/>
-                    <a:p>
-                      <a:r>
-                        <a:rPr sz="1300" b="0" i="0">
-                          <a:solidFill>
-                            <a:srgbClr val="1A1A1A"/>
-                          </a:solidFill>
-                          <a:latin typeface="Times New Roman"/>
-                        </a:rPr>
-                        <a:t>2 × 151 bp</a:t>
-                      </a:r>
-                    </a:p>
-                  </a:txBody>
-                  <a:tcPr/>
-                </a:tc>
-              </a:tr>
-              <a:tr h="438912">
-                <a:tc>
-                  <a:txBody>
-                    <a:bodyPr/>
-                    <a:lstStyle/>
-                    <a:p>
-                      <a:r>
-                        <a:rPr sz="1300" b="0" i="0">
-                          <a:solidFill>
-                            <a:srgbClr val="1A1A1A"/>
-                          </a:solidFill>
-                          <a:latin typeface="Times New Roman"/>
-                        </a:rPr>
-                        <a:t>Instrument</a:t>
-                      </a:r>
-                    </a:p>
-                  </a:txBody>
-                  <a:tcPr/>
-                </a:tc>
-                <a:tc>
-                  <a:txBody>
-                    <a:bodyPr/>
-                    <a:lstStyle/>
-                    <a:p>
-                      <a:r>
-                        <a:rPr sz="1300" b="0" i="0">
-                          <a:solidFill>
-                            <a:srgbClr val="1A1A1A"/>
-                          </a:solidFill>
-                          <a:latin typeface="Times New Roman"/>
-                        </a:rPr>
-                        <a:t>NextSeq 550</a:t>
-                      </a:r>
-                    </a:p>
-                  </a:txBody>
-                  <a:tcPr/>
-                </a:tc>
-                <a:tc>
-                  <a:txBody>
-                    <a:bodyPr/>
-                    <a:lstStyle/>
-                    <a:p>
-                      <a:r>
-                        <a:rPr sz="1300" b="0" i="0">
-                          <a:solidFill>
-                            <a:srgbClr val="1A1A1A"/>
-                          </a:solidFill>
-                          <a:latin typeface="Times New Roman"/>
-                        </a:rPr>
-                        <a:t>NovaSeq 6000</a:t>
-                      </a:r>
-                    </a:p>
-                  </a:txBody>
-                  <a:tcPr/>
-                </a:tc>
-              </a:tr>
-              <a:tr h="438912">
-                <a:tc>
-                  <a:txBody>
-                    <a:bodyPr/>
-                    <a:lstStyle/>
-                    <a:p>
-                      <a:r>
-                        <a:rPr sz="1300" b="0" i="0">
-                          <a:solidFill>
-                            <a:srgbClr val="1A1A1A"/>
-                          </a:solidFill>
-                          <a:latin typeface="Times New Roman"/>
-                        </a:rPr>
-                        <a:t>Design</a:t>
-                      </a:r>
-                    </a:p>
-                  </a:txBody>
-                  <a:tcPr/>
-                </a:tc>
-                <a:tc>
-                  <a:txBody>
-                    <a:bodyPr/>
-                    <a:lstStyle/>
-                    <a:p>
-                      <a:r>
-                        <a:rPr sz="1300" b="0" i="0">
-                          <a:solidFill>
-                            <a:srgbClr val="1A1A1A"/>
-                          </a:solidFill>
-                          <a:latin typeface="Times New Roman"/>
-                        </a:rPr>
-                        <a:t>tumour only, no matched normal</a:t>
-                      </a:r>
-                    </a:p>
-                  </a:txBody>
-                  <a:tcPr/>
-                </a:tc>
-                <a:tc>
-                  <a:txBody>
-                    <a:bodyPr/>
-                    <a:lstStyle/>
-                    <a:p>
-                      <a:r>
-                        <a:rPr sz="1300" b="0" i="0">
-                          <a:solidFill>
-                            <a:srgbClr val="1A1A1A"/>
-                          </a:solidFill>
-                          <a:latin typeface="Times New Roman"/>
-                        </a:rPr>
-                        <a:t>small fusion panel</a:t>
-                      </a:r>
-                    </a:p>
-                  </a:txBody>
-                  <a:tcPr/>
-                </a:tc>
-              </a:tr>
-            </a:tbl>
-          </a:graphicData>
-        </a:graphic>
-      </p:graphicFrame>
-      <p:sp>
-        <p:nvSpPr>
-          <p:cNvPr id="4" name="TextBox 3"/>
+              <a:rPr sz="1500" b="1" i="0">
+                <a:solidFill>
+                  <a:srgbClr val="5B9BD5"/>
+                </a:solidFill>
+                <a:latin typeface="Times New Roman"/>
+              </a:rPr>
+              <a:t>01</a:t>
+            </a:r>
+          </a:p>
+        </p:txBody>
+      </p:sp>
+      <p:sp>
+        <p:nvSpPr>
+          <p:cNvPr id="5" name="TextBox 4"/>
           <p:cNvSpPr txBox="1"/>
           <p:nvPr/>
         </p:nvSpPr>
         <p:spPr>
           <a:xfrm>
-            <a:off x="685800" y="4206240"/>
-            <a:ext cx="10881360" cy="4937760"/>
+            <a:off x="822960" y="2926080"/>
+            <a:ext cx="10515600" cy="1005840"/>
           </a:xfrm>
           <a:prstGeom prst="rect">
             <a:avLst/>
@@ -4549,35 +8116,83 @@
           </a:bodyPr>
           <a:lstStyle/>
           <a:p>
-            <a:pPr>
-              <a:spcAft>
-                <a:spcPts val="600"/>
-              </a:spcAft>
-            </a:pPr>
-            <a:r>
-              <a:rPr sz="1700" b="0" i="0">
-                <a:solidFill>
-                  <a:srgbClr val="1A1A1A"/>
-                </a:solidFill>
-                <a:latin typeface="Times New Roman"/>
-              </a:rPr>
-              <a:t>•  Nothing stated which assay produced the files. The first task was not analysis but identification.</a:t>
-            </a:r>
-          </a:p>
-          <a:p>
-            <a:pPr>
-              <a:spcAft>
-                <a:spcPts val="600"/>
-              </a:spcAft>
-            </a:pPr>
-            <a:r>
-              <a:rPr sz="1700" b="0" i="0">
-                <a:solidFill>
-                  <a:srgbClr val="1A1A1A"/>
-                </a:solidFill>
-                <a:latin typeface="Times New Roman"/>
-              </a:rPr>
-              <a:t>•  A clinical report for the same specimen existed — which made honest validation possible.</a:t>
+            <a:r>
+              <a:rPr sz="3400" b="1" i="0">
+                <a:solidFill>
+                  <a:srgbClr val="ECEFF4"/>
+                </a:solidFill>
+                <a:latin typeface="Times New Roman"/>
+              </a:rPr>
+              <a:t>Identifying the data</a:t>
+            </a:r>
+          </a:p>
+        </p:txBody>
+      </p:sp>
+      <p:sp>
+        <p:nvSpPr>
+          <p:cNvPr id="6" name="TextBox 5"/>
+          <p:cNvSpPr txBox="1"/>
+          <p:nvPr/>
+        </p:nvSpPr>
+        <p:spPr>
+          <a:xfrm>
+            <a:off x="822960" y="3977639"/>
+            <a:ext cx="9601200" cy="822960"/>
+          </a:xfrm>
+          <a:prstGeom prst="rect">
+            <a:avLst/>
+          </a:prstGeom>
+          <a:noFill/>
+        </p:spPr>
+        <p:txBody>
+          <a:bodyPr wrap="square">
+            <a:spAutoFit/>
+          </a:bodyPr>
+          <a:lstStyle/>
+          <a:p>
+            <a:r>
+              <a:rPr sz="1500" b="0" i="1">
+                <a:solidFill>
+                  <a:srgbClr val="9AA4B2"/>
+                </a:solidFill>
+                <a:latin typeface="Times New Roman"/>
+              </a:rPr>
+              <a:t>Before any biology: which assay produced these reads?</a:t>
+            </a:r>
+          </a:p>
+        </p:txBody>
+      </p:sp>
+      <p:sp>
+        <p:nvSpPr>
+          <p:cNvPr id="7" name="TextBox 6"/>
+          <p:cNvSpPr txBox="1"/>
+          <p:nvPr/>
+        </p:nvSpPr>
+        <p:spPr>
+          <a:xfrm>
+            <a:off x="10607040" y="6382512"/>
+            <a:ext cx="1097280" cy="320040"/>
+          </a:xfrm>
+          <a:prstGeom prst="rect">
+            <a:avLst/>
+          </a:prstGeom>
+          <a:noFill/>
+        </p:spPr>
+        <p:txBody>
+          <a:bodyPr wrap="square">
+            <a:spAutoFit/>
+          </a:bodyPr>
+          <a:lstStyle/>
+          <a:p>
+            <a:pPr algn="r"/>
+            <a:r>
+              <a:rPr sz="1000" b="0" i="0">
+                <a:solidFill>
+                  <a:srgbClr val="9AA4B2"/>
+                </a:solidFill>
+                <a:latin typeface="Times New Roman"/>
+              </a:rPr>
+              <a:t>3 / 18</a:t>
             </a:r>
           </a:p>
         </p:txBody>
@@ -4602,14 +8217,58 @@
       <p:grpSpPr/>
       <p:sp>
         <p:nvSpPr>
-          <p:cNvPr id="2" name="TextBox 1"/>
+          <p:cNvPr id="2" name="Rectangle 1"/>
+          <p:cNvSpPr/>
+          <p:nvPr/>
+        </p:nvSpPr>
+        <p:spPr>
+          <a:xfrm>
+            <a:off x="0" y="0"/>
+            <a:ext cx="12191695" cy="6858000"/>
+          </a:xfrm>
+          <a:prstGeom prst="rect">
+            <a:avLst/>
+          </a:prstGeom>
+          <a:solidFill>
+            <a:srgbClr val="0E1117"/>
+          </a:solidFill>
+          <a:ln>
+            <a:noFill/>
+          </a:ln>
+          <a:effectLst/>
+        </p:spPr>
+        <p:style>
+          <a:lnRef idx="1">
+            <a:schemeClr val="accent1"/>
+          </a:lnRef>
+          <a:fillRef idx="3">
+            <a:schemeClr val="accent1"/>
+          </a:fillRef>
+          <a:effectRef idx="2">
+            <a:schemeClr val="accent1"/>
+          </a:effectRef>
+          <a:fontRef idx="minor">
+            <a:schemeClr val="lt1"/>
+          </a:fontRef>
+        </p:style>
+        <p:txBody>
+          <a:bodyPr rtlCol="0" anchor="ctr"/>
+          <a:lstStyle/>
+          <a:p>
+            <a:pPr algn="ctr"/>
+          </a:p>
+        </p:txBody>
+      </p:sp>
+      <p:sp>
+        <p:nvSpPr>
+          <p:cNvPr id="3" name="TextBox 2"/>
           <p:cNvSpPr txBox="1"/>
           <p:nvPr/>
         </p:nvSpPr>
         <p:spPr>
           <a:xfrm>
-            <a:off x="548640" y="320040"/>
-            <a:ext cx="11064240" cy="822960"/>
+            <a:off x="685800" y="384048"/>
+            <a:ext cx="10789920" cy="320040"/>
           </a:xfrm>
           <a:prstGeom prst="rect">
             <a:avLst/>
@@ -4623,38 +8282,27 @@
           <a:lstStyle/>
           <a:p>
             <a:r>
-              <a:rPr sz="3000" b="1" i="0">
-                <a:solidFill>
-                  <a:srgbClr val="1F4E79"/>
-                </a:solidFill>
-                <a:latin typeface="Times New Roman"/>
-              </a:rPr>
-              <a:t>Identifying the assay from the reads alone</a:t>
-            </a:r>
-          </a:p>
-          <a:p>
-            <a:r>
-              <a:rPr sz="1500" b="0" i="1">
-                <a:solidFill>
-                  <a:srgbClr val="555555"/>
-                </a:solidFill>
-                <a:latin typeface="Times New Roman"/>
-              </a:rPr>
-              <a:t>Base composition per position: random bases mark a barcode, a fixed base marks an adapter</a:t>
-            </a:r>
-          </a:p>
-        </p:txBody>
-      </p:sp>
-      <p:sp>
-        <p:nvSpPr>
-          <p:cNvPr id="3" name="TextBox 2"/>
+              <a:rPr sz="1200" b="1" i="0">
+                <a:solidFill>
+                  <a:srgbClr val="5B9BD5"/>
+                </a:solidFill>
+                <a:latin typeface="Times New Roman"/>
+              </a:rPr>
+              <a:t>READ STRUCTURE</a:t>
+            </a:r>
+          </a:p>
+        </p:txBody>
+      </p:sp>
+      <p:sp>
+        <p:nvSpPr>
+          <p:cNvPr id="4" name="TextBox 3"/>
           <p:cNvSpPr txBox="1"/>
           <p:nvPr/>
         </p:nvSpPr>
         <p:spPr>
           <a:xfrm>
-            <a:off x="822960" y="1737360"/>
-            <a:ext cx="10607040" cy="1280160"/>
+            <a:off x="685800" y="713232"/>
+            <a:ext cx="10789920" cy="777240"/>
           </a:xfrm>
           <a:prstGeom prst="rect">
             <a:avLst/>
@@ -4668,38 +8316,115 @@
           <a:lstStyle/>
           <a:p>
             <a:r>
-              <a:rPr sz="1800" b="1" i="0">
-                <a:solidFill>
-                  <a:srgbClr val="1A1A1A"/>
-                </a:solidFill>
-                <a:latin typeface="Times New Roman"/>
-              </a:rPr>
-              <a:t>Read 1:  [ 12 random bases = molecular barcode ][ fixed adapter sequence ][ patient DNA … ]</a:t>
-            </a:r>
-          </a:p>
-          <a:p>
-            <a:r>
-              <a:rPr sz="1800" b="1" i="0">
-                <a:solidFill>
-                  <a:srgbClr val="1A1A1A"/>
-                </a:solidFill>
-                <a:latin typeface="Times New Roman"/>
-              </a:rPr>
-              <a:t>Read 2:  [ gene-specific primer ][ patient DNA … ]</a:t>
-            </a:r>
-          </a:p>
-        </p:txBody>
-      </p:sp>
-      <p:sp>
-        <p:nvSpPr>
-          <p:cNvPr id="4" name="TextBox 3"/>
+              <a:rPr sz="3000" b="1" i="0">
+                <a:solidFill>
+                  <a:srgbClr val="ECEFF4"/>
+                </a:solidFill>
+                <a:latin typeface="Times New Roman"/>
+              </a:rPr>
+              <a:t>The assay is written into the reads</a:t>
+            </a:r>
+          </a:p>
+        </p:txBody>
+      </p:sp>
+      <p:sp>
+        <p:nvSpPr>
+          <p:cNvPr id="5" name="Rectangle 4"/>
+          <p:cNvSpPr/>
+          <p:nvPr/>
+        </p:nvSpPr>
+        <p:spPr>
+          <a:xfrm>
+            <a:off x="713232" y="1554480"/>
+            <a:ext cx="1371600" cy="41148"/>
+          </a:xfrm>
+          <a:prstGeom prst="rect">
+            <a:avLst/>
+          </a:prstGeom>
+          <a:solidFill>
+            <a:srgbClr val="5B9BD5"/>
+          </a:solidFill>
+          <a:ln>
+            <a:noFill/>
+          </a:ln>
+          <a:effectLst/>
+        </p:spPr>
+        <p:style>
+          <a:lnRef idx="1">
+            <a:schemeClr val="accent1"/>
+          </a:lnRef>
+          <a:fillRef idx="3">
+            <a:schemeClr val="accent1"/>
+          </a:fillRef>
+          <a:effectRef idx="2">
+            <a:schemeClr val="accent1"/>
+          </a:effectRef>
+          <a:fontRef idx="minor">
+            <a:schemeClr val="lt1"/>
+          </a:fontRef>
+        </p:style>
+        <p:txBody>
+          <a:bodyPr rtlCol="0" anchor="ctr"/>
+          <a:lstStyle/>
+          <a:p>
+            <a:pPr algn="ctr"/>
+          </a:p>
+        </p:txBody>
+      </p:sp>
+      <p:sp>
+        <p:nvSpPr>
+          <p:cNvPr id="6" name="Rectangle 5"/>
+          <p:cNvSpPr/>
+          <p:nvPr/>
+        </p:nvSpPr>
+        <p:spPr>
+          <a:xfrm>
+            <a:off x="685800" y="1856232"/>
+            <a:ext cx="10789920" cy="1234440"/>
+          </a:xfrm>
+          <a:prstGeom prst="rect">
+            <a:avLst/>
+          </a:prstGeom>
+          <a:solidFill>
+            <a:srgbClr val="181D27"/>
+          </a:solidFill>
+          <a:ln>
+            <a:noFill/>
+          </a:ln>
+          <a:effectLst/>
+        </p:spPr>
+        <p:style>
+          <a:lnRef idx="1">
+            <a:schemeClr val="accent1"/>
+          </a:lnRef>
+          <a:fillRef idx="3">
+            <a:schemeClr val="accent1"/>
+          </a:fillRef>
+          <a:effectRef idx="2">
+            <a:schemeClr val="accent1"/>
+          </a:effectRef>
+          <a:fontRef idx="minor">
+            <a:schemeClr val="lt1"/>
+          </a:fontRef>
+        </p:style>
+        <p:txBody>
+          <a:bodyPr rtlCol="0" anchor="ctr"/>
+          <a:lstStyle/>
+          <a:p>
+            <a:pPr algn="ctr"/>
+          </a:p>
+        </p:txBody>
+      </p:sp>
+      <p:sp>
+        <p:nvSpPr>
+          <p:cNvPr id="7" name="TextBox 6"/>
           <p:cNvSpPr txBox="1"/>
           <p:nvPr/>
         </p:nvSpPr>
         <p:spPr>
           <a:xfrm>
-            <a:off x="685800" y="3200400"/>
-            <a:ext cx="10881360" cy="4937760"/>
+            <a:off x="960120" y="2002536"/>
+            <a:ext cx="10241280" cy="1005840"/>
           </a:xfrm>
           <a:prstGeom prst="rect">
             <a:avLst/>
@@ -4712,67 +8437,499 @@
           </a:bodyPr>
           <a:lstStyle/>
           <a:p>
+            <a:r>
+              <a:rPr sz="1600" b="1" i="0">
+                <a:solidFill>
+                  <a:srgbClr val="ECEFF4"/>
+                </a:solidFill>
+                <a:latin typeface="Times New Roman"/>
+              </a:rPr>
+              <a:t>Read 1    [ 12 random bases = molecular barcode ][ fixed adapter ][ patient DNA … ]</a:t>
+            </a:r>
+          </a:p>
+          <a:p>
+            <a:pPr>
+              <a:spcBef>
+                <a:spcPts val="600"/>
+              </a:spcBef>
+            </a:pPr>
+            <a:r>
+              <a:rPr sz="1600" b="1" i="0">
+                <a:solidFill>
+                  <a:srgbClr val="ECEFF4"/>
+                </a:solidFill>
+                <a:latin typeface="Times New Roman"/>
+              </a:rPr>
+              <a:t>Read 2    [ gene-specific primer ][ patient DNA … ]</a:t>
+            </a:r>
+          </a:p>
+        </p:txBody>
+      </p:sp>
+      <p:sp>
+        <p:nvSpPr>
+          <p:cNvPr id="8" name="TextBox 7"/>
+          <p:cNvSpPr txBox="1"/>
+          <p:nvPr/>
+        </p:nvSpPr>
+        <p:spPr>
+          <a:xfrm>
+            <a:off x="777240" y="3319272"/>
+            <a:ext cx="10607040" cy="2990087"/>
+          </a:xfrm>
+          <a:prstGeom prst="rect">
+            <a:avLst/>
+          </a:prstGeom>
+          <a:noFill/>
+        </p:spPr>
+        <p:txBody>
+          <a:bodyPr wrap="square">
+            <a:spAutoFit/>
+          </a:bodyPr>
+          <a:lstStyle/>
+          <a:p>
             <a:pPr>
               <a:spcAft>
-                <a:spcPts val="600"/>
+                <a:spcPts val="1100"/>
               </a:spcAft>
             </a:pPr>
             <a:r>
-              <a:rPr sz="1700" b="0" i="0">
-                <a:solidFill>
-                  <a:srgbClr val="1A1A1A"/>
-                </a:solidFill>
-                <a:latin typeface="Times New Roman"/>
-              </a:rPr>
-              <a:t>•  Only ~2,200 distinct sequences account for 80 % of Read-2 starts → a primer-based targeted panel.</a:t>
+              <a:rPr sz="1600" b="0" i="0">
+                <a:solidFill>
+                  <a:srgbClr val="5B9BD5"/>
+                </a:solidFill>
+                <a:latin typeface="Times New Roman"/>
+              </a:rPr>
+              <a:t>▪   </a:t>
+            </a:r>
+            <a:r>
+              <a:rPr sz="1600" b="0" i="0">
+                <a:solidFill>
+                  <a:srgbClr val="ECEFF4"/>
+                </a:solidFill>
+                <a:latin typeface="Times New Roman"/>
+              </a:rPr>
+              <a:t>A position where all four bases occur equally is random; one base at &gt;98 % is synthetic. The transition marks the end of the barcode.</a:t>
             </a:r>
           </a:p>
           <a:p>
             <a:pPr>
               <a:spcAft>
-                <a:spcPts val="600"/>
+                <a:spcPts val="1100"/>
               </a:spcAft>
             </a:pPr>
             <a:r>
-              <a:rPr sz="1700" b="0" i="0">
-                <a:solidFill>
-                  <a:srgbClr val="1A1A1A"/>
-                </a:solidFill>
-                <a:latin typeface="Times New Roman"/>
-              </a:rPr>
-              <a:t>•  Index reads of 8 and 10 bases → a specific adapter kit.</a:t>
+              <a:rPr sz="1600" b="0" i="0">
+                <a:solidFill>
+                  <a:srgbClr val="5B9BD5"/>
+                </a:solidFill>
+                <a:latin typeface="Times New Roman"/>
+              </a:rPr>
+              <a:t>▪   </a:t>
+            </a:r>
+            <a:r>
+              <a:rPr sz="1600" b="0" i="0">
+                <a:solidFill>
+                  <a:srgbClr val="ECEFF4"/>
+                </a:solidFill>
+                <a:latin typeface="Times New Roman"/>
+              </a:rPr>
+              <a:t>Only ~2,200 distinct sequences start 80 % of Read 2 → a primer-based targeted panel.</a:t>
             </a:r>
           </a:p>
           <a:p>
             <a:pPr>
               <a:spcAft>
-                <a:spcPts val="600"/>
+                <a:spcPts val="1100"/>
               </a:spcAft>
             </a:pPr>
             <a:r>
-              <a:rPr sz="1700" b="0" i="0">
-                <a:solidFill>
-                  <a:srgbClr val="1A1A1A"/>
-                </a:solidFill>
-                <a:latin typeface="Times New Roman"/>
-              </a:rPr>
-              <a:t>•  Conclusion: anchored multiplex PCR. Confirmed afterwards by the clinical report: Archer VariantPlex Expanded Solid Tumor (DNA) and FusionPlex Lung v2 (RNA).</a:t>
-            </a:r>
-          </a:p>
-          <a:p>
-            <a:pPr lvl="1">
-              <a:spcAft>
-                <a:spcPts val="600"/>
-              </a:spcAft>
-            </a:pPr>
-            <a:r>
-              <a:rPr sz="1500" b="0" i="0">
-                <a:solidFill>
-                  <a:srgbClr val="555555"/>
-                </a:solidFill>
-                <a:latin typeface="Times New Roman"/>
-              </a:rPr>
-              <a:t>—  98.7 % of DNA reads and 98.7 % of RNA reads matched the predicted structure exactly.</a:t>
+              <a:rPr sz="1600" b="0" i="0">
+                <a:solidFill>
+                  <a:srgbClr val="5B9BD5"/>
+                </a:solidFill>
+                <a:latin typeface="Times New Roman"/>
+              </a:rPr>
+              <a:t>▪   </a:t>
+            </a:r>
+            <a:r>
+              <a:rPr sz="1600" b="0" i="0">
+                <a:solidFill>
+                  <a:srgbClr val="ECEFF4"/>
+                </a:solidFill>
+                <a:latin typeface="Times New Roman"/>
+              </a:rPr>
+              <a:t>Conclusion: anchored multiplex PCR — confirmed afterwards by the clinical report (Archer VariantPlex + FusionPlex).</a:t>
+            </a:r>
+          </a:p>
+        </p:txBody>
+      </p:sp>
+      <p:sp>
+        <p:nvSpPr>
+          <p:cNvPr id="9" name="Rectangle 8"/>
+          <p:cNvSpPr/>
+          <p:nvPr/>
+        </p:nvSpPr>
+        <p:spPr>
+          <a:xfrm>
+            <a:off x="685800" y="4709160"/>
+            <a:ext cx="3383280" cy="1600200"/>
+          </a:xfrm>
+          <a:prstGeom prst="rect">
+            <a:avLst/>
+          </a:prstGeom>
+          <a:solidFill>
+            <a:srgbClr val="181D27"/>
+          </a:solidFill>
+          <a:ln>
+            <a:noFill/>
+          </a:ln>
+          <a:effectLst/>
+        </p:spPr>
+        <p:style>
+          <a:lnRef idx="1">
+            <a:schemeClr val="accent1"/>
+          </a:lnRef>
+          <a:fillRef idx="3">
+            <a:schemeClr val="accent1"/>
+          </a:fillRef>
+          <a:effectRef idx="2">
+            <a:schemeClr val="accent1"/>
+          </a:effectRef>
+          <a:fontRef idx="minor">
+            <a:schemeClr val="lt1"/>
+          </a:fontRef>
+        </p:style>
+        <p:txBody>
+          <a:bodyPr rtlCol="0" anchor="ctr"/>
+          <a:lstStyle/>
+          <a:p>
+            <a:pPr algn="ctr"/>
+          </a:p>
+        </p:txBody>
+      </p:sp>
+      <p:sp>
+        <p:nvSpPr>
+          <p:cNvPr id="10" name="TextBox 9"/>
+          <p:cNvSpPr txBox="1"/>
+          <p:nvPr/>
+        </p:nvSpPr>
+        <p:spPr>
+          <a:xfrm>
+            <a:off x="914400" y="4873752"/>
+            <a:ext cx="2926080" cy="777240"/>
+          </a:xfrm>
+          <a:prstGeom prst="rect">
+            <a:avLst/>
+          </a:prstGeom>
+          <a:noFill/>
+        </p:spPr>
+        <p:txBody>
+          <a:bodyPr wrap="square">
+            <a:spAutoFit/>
+          </a:bodyPr>
+          <a:lstStyle/>
+          <a:p>
+            <a:r>
+              <a:rPr sz="4000" b="1" i="0">
+                <a:solidFill>
+                  <a:srgbClr val="5B9BD5"/>
+                </a:solidFill>
+                <a:latin typeface="Times New Roman"/>
+              </a:rPr>
+              <a:t>98.7 %</a:t>
+            </a:r>
+          </a:p>
+        </p:txBody>
+      </p:sp>
+      <p:sp>
+        <p:nvSpPr>
+          <p:cNvPr id="11" name="TextBox 10"/>
+          <p:cNvSpPr txBox="1"/>
+          <p:nvPr/>
+        </p:nvSpPr>
+        <p:spPr>
+          <a:xfrm>
+            <a:off x="914400" y="5696712"/>
+            <a:ext cx="2926080" cy="548640"/>
+          </a:xfrm>
+          <a:prstGeom prst="rect">
+            <a:avLst/>
+          </a:prstGeom>
+          <a:noFill/>
+        </p:spPr>
+        <p:txBody>
+          <a:bodyPr wrap="square">
+            <a:spAutoFit/>
+          </a:bodyPr>
+          <a:lstStyle/>
+          <a:p>
+            <a:r>
+              <a:rPr sz="1200" b="0" i="0">
+                <a:solidFill>
+                  <a:srgbClr val="9AA4B2"/>
+                </a:solidFill>
+                <a:latin typeface="Times New Roman"/>
+              </a:rPr>
+              <a:t>of DNA reads match the predicted structure</a:t>
+            </a:r>
+          </a:p>
+        </p:txBody>
+      </p:sp>
+      <p:sp>
+        <p:nvSpPr>
+          <p:cNvPr id="12" name="Rectangle 11"/>
+          <p:cNvSpPr/>
+          <p:nvPr/>
+        </p:nvSpPr>
+        <p:spPr>
+          <a:xfrm>
+            <a:off x="4389120" y="4709160"/>
+            <a:ext cx="3383280" cy="1600200"/>
+          </a:xfrm>
+          <a:prstGeom prst="rect">
+            <a:avLst/>
+          </a:prstGeom>
+          <a:solidFill>
+            <a:srgbClr val="181D27"/>
+          </a:solidFill>
+          <a:ln>
+            <a:noFill/>
+          </a:ln>
+          <a:effectLst/>
+        </p:spPr>
+        <p:style>
+          <a:lnRef idx="1">
+            <a:schemeClr val="accent1"/>
+          </a:lnRef>
+          <a:fillRef idx="3">
+            <a:schemeClr val="accent1"/>
+          </a:fillRef>
+          <a:effectRef idx="2">
+            <a:schemeClr val="accent1"/>
+          </a:effectRef>
+          <a:fontRef idx="minor">
+            <a:schemeClr val="lt1"/>
+          </a:fontRef>
+        </p:style>
+        <p:txBody>
+          <a:bodyPr rtlCol="0" anchor="ctr"/>
+          <a:lstStyle/>
+          <a:p>
+            <a:pPr algn="ctr"/>
+          </a:p>
+        </p:txBody>
+      </p:sp>
+      <p:sp>
+        <p:nvSpPr>
+          <p:cNvPr id="13" name="TextBox 12"/>
+          <p:cNvSpPr txBox="1"/>
+          <p:nvPr/>
+        </p:nvSpPr>
+        <p:spPr>
+          <a:xfrm>
+            <a:off x="4617720" y="4873752"/>
+            <a:ext cx="2926080" cy="777240"/>
+          </a:xfrm>
+          <a:prstGeom prst="rect">
+            <a:avLst/>
+          </a:prstGeom>
+          <a:noFill/>
+        </p:spPr>
+        <p:txBody>
+          <a:bodyPr wrap="square">
+            <a:spAutoFit/>
+          </a:bodyPr>
+          <a:lstStyle/>
+          <a:p>
+            <a:r>
+              <a:rPr sz="4000" b="1" i="0">
+                <a:solidFill>
+                  <a:srgbClr val="5B9BD5"/>
+                </a:solidFill>
+                <a:latin typeface="Times New Roman"/>
+              </a:rPr>
+              <a:t>98.7 %</a:t>
+            </a:r>
+          </a:p>
+        </p:txBody>
+      </p:sp>
+      <p:sp>
+        <p:nvSpPr>
+          <p:cNvPr id="14" name="TextBox 13"/>
+          <p:cNvSpPr txBox="1"/>
+          <p:nvPr/>
+        </p:nvSpPr>
+        <p:spPr>
+          <a:xfrm>
+            <a:off x="4617720" y="5696712"/>
+            <a:ext cx="2926080" cy="548640"/>
+          </a:xfrm>
+          <a:prstGeom prst="rect">
+            <a:avLst/>
+          </a:prstGeom>
+          <a:noFill/>
+        </p:spPr>
+        <p:txBody>
+          <a:bodyPr wrap="square">
+            <a:spAutoFit/>
+          </a:bodyPr>
+          <a:lstStyle/>
+          <a:p>
+            <a:r>
+              <a:rPr sz="1200" b="0" i="0">
+                <a:solidFill>
+                  <a:srgbClr val="9AA4B2"/>
+                </a:solidFill>
+                <a:latin typeface="Times New Roman"/>
+              </a:rPr>
+              <a:t>of RNA reads match it</a:t>
+            </a:r>
+          </a:p>
+        </p:txBody>
+      </p:sp>
+      <p:sp>
+        <p:nvSpPr>
+          <p:cNvPr id="15" name="Rectangle 14"/>
+          <p:cNvSpPr/>
+          <p:nvPr/>
+        </p:nvSpPr>
+        <p:spPr>
+          <a:xfrm>
+            <a:off x="8092440" y="4709160"/>
+            <a:ext cx="3383280" cy="1600200"/>
+          </a:xfrm>
+          <a:prstGeom prst="rect">
+            <a:avLst/>
+          </a:prstGeom>
+          <a:solidFill>
+            <a:srgbClr val="181D27"/>
+          </a:solidFill>
+          <a:ln>
+            <a:noFill/>
+          </a:ln>
+          <a:effectLst/>
+        </p:spPr>
+        <p:style>
+          <a:lnRef idx="1">
+            <a:schemeClr val="accent1"/>
+          </a:lnRef>
+          <a:fillRef idx="3">
+            <a:schemeClr val="accent1"/>
+          </a:fillRef>
+          <a:effectRef idx="2">
+            <a:schemeClr val="accent1"/>
+          </a:effectRef>
+          <a:fontRef idx="minor">
+            <a:schemeClr val="lt1"/>
+          </a:fontRef>
+        </p:style>
+        <p:txBody>
+          <a:bodyPr rtlCol="0" anchor="ctr"/>
+          <a:lstStyle/>
+          <a:p>
+            <a:pPr algn="ctr"/>
+          </a:p>
+        </p:txBody>
+      </p:sp>
+      <p:sp>
+        <p:nvSpPr>
+          <p:cNvPr id="16" name="TextBox 15"/>
+          <p:cNvSpPr txBox="1"/>
+          <p:nvPr/>
+        </p:nvSpPr>
+        <p:spPr>
+          <a:xfrm>
+            <a:off x="8321040" y="4873752"/>
+            <a:ext cx="2926080" cy="777240"/>
+          </a:xfrm>
+          <a:prstGeom prst="rect">
+            <a:avLst/>
+          </a:prstGeom>
+          <a:noFill/>
+        </p:spPr>
+        <p:txBody>
+          <a:bodyPr wrap="square">
+            <a:spAutoFit/>
+          </a:bodyPr>
+          <a:lstStyle/>
+          <a:p>
+            <a:r>
+              <a:rPr sz="4000" b="1" i="0">
+                <a:solidFill>
+                  <a:srgbClr val="5B9BD5"/>
+                </a:solidFill>
+                <a:latin typeface="Times New Roman"/>
+              </a:rPr>
+              <a:t>8 + 10 nt</a:t>
+            </a:r>
+          </a:p>
+        </p:txBody>
+      </p:sp>
+      <p:sp>
+        <p:nvSpPr>
+          <p:cNvPr id="17" name="TextBox 16"/>
+          <p:cNvSpPr txBox="1"/>
+          <p:nvPr/>
+        </p:nvSpPr>
+        <p:spPr>
+          <a:xfrm>
+            <a:off x="8321040" y="5696712"/>
+            <a:ext cx="2926080" cy="548640"/>
+          </a:xfrm>
+          <a:prstGeom prst="rect">
+            <a:avLst/>
+          </a:prstGeom>
+          <a:noFill/>
+        </p:spPr>
+        <p:txBody>
+          <a:bodyPr wrap="square">
+            <a:spAutoFit/>
+          </a:bodyPr>
+          <a:lstStyle/>
+          <a:p>
+            <a:r>
+              <a:rPr sz="1200" b="0" i="0">
+                <a:solidFill>
+                  <a:srgbClr val="9AA4B2"/>
+                </a:solidFill>
+                <a:latin typeface="Times New Roman"/>
+              </a:rPr>
+              <a:t>index reads — the adapter kit's signature</a:t>
+            </a:r>
+          </a:p>
+        </p:txBody>
+      </p:sp>
+      <p:sp>
+        <p:nvSpPr>
+          <p:cNvPr id="18" name="TextBox 17"/>
+          <p:cNvSpPr txBox="1"/>
+          <p:nvPr/>
+        </p:nvSpPr>
+        <p:spPr>
+          <a:xfrm>
+            <a:off x="10607040" y="6382512"/>
+            <a:ext cx="1097280" cy="320040"/>
+          </a:xfrm>
+          <a:prstGeom prst="rect">
+            <a:avLst/>
+          </a:prstGeom>
+          <a:noFill/>
+        </p:spPr>
+        <p:txBody>
+          <a:bodyPr wrap="square">
+            <a:spAutoFit/>
+          </a:bodyPr>
+          <a:lstStyle/>
+          <a:p>
+            <a:pPr algn="r"/>
+            <a:r>
+              <a:rPr sz="1000" b="0" i="0">
+                <a:solidFill>
+                  <a:srgbClr val="9AA4B2"/>
+                </a:solidFill>
+                <a:latin typeface="Times New Roman"/>
+              </a:rPr>
+              <a:t>4 / 18</a:t>
             </a:r>
           </a:p>
         </p:txBody>
@@ -4797,14 +8954,58 @@
       <p:grpSpPr/>
       <p:sp>
         <p:nvSpPr>
-          <p:cNvPr id="2" name="TextBox 1"/>
+          <p:cNvPr id="2" name="Rectangle 1"/>
+          <p:cNvSpPr/>
+          <p:nvPr/>
+        </p:nvSpPr>
+        <p:spPr>
+          <a:xfrm>
+            <a:off x="0" y="0"/>
+            <a:ext cx="12191695" cy="6858000"/>
+          </a:xfrm>
+          <a:prstGeom prst="rect">
+            <a:avLst/>
+          </a:prstGeom>
+          <a:solidFill>
+            <a:srgbClr val="0E1117"/>
+          </a:solidFill>
+          <a:ln>
+            <a:noFill/>
+          </a:ln>
+          <a:effectLst/>
+        </p:spPr>
+        <p:style>
+          <a:lnRef idx="1">
+            <a:schemeClr val="accent1"/>
+          </a:lnRef>
+          <a:fillRef idx="3">
+            <a:schemeClr val="accent1"/>
+          </a:fillRef>
+          <a:effectRef idx="2">
+            <a:schemeClr val="accent1"/>
+          </a:effectRef>
+          <a:fontRef idx="minor">
+            <a:schemeClr val="lt1"/>
+          </a:fontRef>
+        </p:style>
+        <p:txBody>
+          <a:bodyPr rtlCol="0" anchor="ctr"/>
+          <a:lstStyle/>
+          <a:p>
+            <a:pPr algn="ctr"/>
+          </a:p>
+        </p:txBody>
+      </p:sp>
+      <p:sp>
+        <p:nvSpPr>
+          <p:cNvPr id="3" name="TextBox 2"/>
           <p:cNvSpPr txBox="1"/>
           <p:nvPr/>
         </p:nvSpPr>
         <p:spPr>
           <a:xfrm>
-            <a:off x="548640" y="320040"/>
-            <a:ext cx="11064240" cy="822960"/>
+            <a:off x="685800" y="292608"/>
+            <a:ext cx="10789920" cy="274320"/>
           </a:xfrm>
           <a:prstGeom prst="rect">
             <a:avLst/>
@@ -4818,447 +9019,17 @@
           <a:lstStyle/>
           <a:p>
             <a:r>
-              <a:rPr sz="3000" b="1" i="0">
-                <a:solidFill>
-                  <a:srgbClr val="1F4E79"/>
-                </a:solidFill>
-                <a:latin typeface="Times New Roman"/>
-              </a:rPr>
-              <a:t>Pipeline architecture</a:t>
-            </a:r>
-          </a:p>
-          <a:p>
-            <a:r>
-              <a:rPr sz="1500" b="0" i="1">
-                <a:solidFill>
-                  <a:srgbClr val="555555"/>
-                </a:solidFill>
-                <a:latin typeface="Times New Roman"/>
-              </a:rPr>
-              <a:t>Split by memory, not by convenience</a:t>
-            </a:r>
-          </a:p>
-        </p:txBody>
-      </p:sp>
-      <p:graphicFrame>
-        <p:nvGraphicFramePr>
-          <p:cNvPr id="3" name="Table 2"/>
-          <p:cNvGraphicFramePr>
-            <a:graphicFrameLocks noGrp="1"/>
-          </p:cNvGraphicFramePr>
-          <p:nvPr/>
-        </p:nvGraphicFramePr>
-        <p:xfrm>
-          <a:off x="822960" y="1600200"/>
-          <a:ext cx="10515600" cy="2834640"/>
-        </p:xfrm>
-        <a:graphic>
-          <a:graphicData uri="http://schemas.openxmlformats.org/drawingml/2006/table">
-            <a:tbl>
-              <a:tblPr firstRow="1" bandRow="1">
-                <a:tableStyleId>{5C22544A-7EE6-4342-B048-85BDC9FD1C3A}</a:tableStyleId>
-              </a:tblPr>
-              <a:tblGrid>
-                <a:gridCol w="3505200"/>
-                <a:gridCol w="3505200"/>
-                <a:gridCol w="3505200"/>
-              </a:tblGrid>
-              <a:tr h="404948">
-                <a:tc>
-                  <a:txBody>
-                    <a:bodyPr/>
-                    <a:lstStyle/>
-                    <a:p>
-                      <a:r>
-                        <a:rPr sz="1300" b="1" i="0">
-                          <a:solidFill>
-                            <a:srgbClr val="1A1A1A"/>
-                          </a:solidFill>
-                          <a:latin typeface="Times New Roman"/>
-                        </a:rPr>
-                        <a:t>Stage</a:t>
-                      </a:r>
-                    </a:p>
-                  </a:txBody>
-                  <a:tcPr/>
-                </a:tc>
-                <a:tc>
-                  <a:txBody>
-                    <a:bodyPr/>
-                    <a:lstStyle/>
-                    <a:p>
-                      <a:r>
-                        <a:rPr sz="1300" b="1" i="0">
-                          <a:solidFill>
-                            <a:srgbClr val="1A1A1A"/>
-                          </a:solidFill>
-                          <a:latin typeface="Times New Roman"/>
-                        </a:rPr>
-                        <a:t>Tool</a:t>
-                      </a:r>
-                    </a:p>
-                  </a:txBody>
-                  <a:tcPr/>
-                </a:tc>
-                <a:tc>
-                  <a:txBody>
-                    <a:bodyPr/>
-                    <a:lstStyle/>
-                    <a:p>
-                      <a:r>
-                        <a:rPr sz="1300" b="1" i="0">
-                          <a:solidFill>
-                            <a:srgbClr val="1A1A1A"/>
-                          </a:solidFill>
-                          <a:latin typeface="Times New Roman"/>
-                        </a:rPr>
-                        <a:t>Runs on</a:t>
-                      </a:r>
-                    </a:p>
-                  </a:txBody>
-                  <a:tcPr/>
-                </a:tc>
-              </a:tr>
-              <a:tr h="404948">
-                <a:tc>
-                  <a:txBody>
-                    <a:bodyPr/>
-                    <a:lstStyle/>
-                    <a:p>
-                      <a:r>
-                        <a:rPr sz="1300" b="0" i="0">
-                          <a:solidFill>
-                            <a:srgbClr val="1A1A1A"/>
-                          </a:solidFill>
-                          <a:latin typeface="Times New Roman"/>
-                        </a:rPr>
-                        <a:t>Read structure, primer inference</a:t>
-                      </a:r>
-                    </a:p>
-                  </a:txBody>
-                  <a:tcPr/>
-                </a:tc>
-                <a:tc>
-                  <a:txBody>
-                    <a:bodyPr/>
-                    <a:lstStyle/>
-                    <a:p>
-                      <a:r>
-                        <a:rPr sz="1300" b="0" i="0">
-                          <a:solidFill>
-                            <a:srgbClr val="1A1A1A"/>
-                          </a:solidFill>
-                          <a:latin typeface="Times New Roman"/>
-                        </a:rPr>
-                        <a:t>project scripts</a:t>
-                      </a:r>
-                    </a:p>
-                  </a:txBody>
-                  <a:tcPr/>
-                </a:tc>
-                <a:tc>
-                  <a:txBody>
-                    <a:bodyPr/>
-                    <a:lstStyle/>
-                    <a:p>
-                      <a:r>
-                        <a:rPr sz="1300" b="0" i="0">
-                          <a:solidFill>
-                            <a:srgbClr val="1A1A1A"/>
-                          </a:solidFill>
-                          <a:latin typeface="Times New Roman"/>
-                        </a:rPr>
-                        <a:t>laptop</a:t>
-                      </a:r>
-                    </a:p>
-                  </a:txBody>
-                  <a:tcPr/>
-                </a:tc>
-              </a:tr>
-              <a:tr h="404948">
-                <a:tc>
-                  <a:txBody>
-                    <a:bodyPr/>
-                    <a:lstStyle/>
-                    <a:p>
-                      <a:r>
-                        <a:rPr sz="1300" b="0" i="0">
-                          <a:solidFill>
-                            <a:srgbClr val="1A1A1A"/>
-                          </a:solidFill>
-                          <a:latin typeface="Times New Roman"/>
-                        </a:rPr>
-                        <a:t>Barcode extraction, alignment, deduplication</a:t>
-                      </a:r>
-                    </a:p>
-                  </a:txBody>
-                  <a:tcPr/>
-                </a:tc>
-                <a:tc>
-                  <a:txBody>
-                    <a:bodyPr/>
-                    <a:lstStyle/>
-                    <a:p>
-                      <a:r>
-                        <a:rPr sz="1300" b="0" i="0">
-                          <a:solidFill>
-                            <a:srgbClr val="1A1A1A"/>
-                          </a:solidFill>
-                          <a:latin typeface="Times New Roman"/>
-                        </a:rPr>
-                        <a:t>UMI-tools, BWA-MEM</a:t>
-                      </a:r>
-                    </a:p>
-                  </a:txBody>
-                  <a:tcPr/>
-                </a:tc>
-                <a:tc>
-                  <a:txBody>
-                    <a:bodyPr/>
-                    <a:lstStyle/>
-                    <a:p>
-                      <a:r>
-                        <a:rPr sz="1300" b="0" i="0">
-                          <a:solidFill>
-                            <a:srgbClr val="1A1A1A"/>
-                          </a:solidFill>
-                          <a:latin typeface="Times New Roman"/>
-                        </a:rPr>
-                        <a:t>Galaxy</a:t>
-                      </a:r>
-                    </a:p>
-                  </a:txBody>
-                  <a:tcPr/>
-                </a:tc>
-              </a:tr>
-              <a:tr h="404948">
-                <a:tc>
-                  <a:txBody>
-                    <a:bodyPr/>
-                    <a:lstStyle/>
-                    <a:p>
-                      <a:r>
-                        <a:rPr sz="1300" b="0" i="0">
-                          <a:solidFill>
-                            <a:srgbClr val="1A1A1A"/>
-                          </a:solidFill>
-                          <a:latin typeface="Times New Roman"/>
-                        </a:rPr>
-                        <a:t>Primer clipping, coverage</a:t>
-                      </a:r>
-                    </a:p>
-                  </a:txBody>
-                  <a:tcPr/>
-                </a:tc>
-                <a:tc>
-                  <a:txBody>
-                    <a:bodyPr/>
-                    <a:lstStyle/>
-                    <a:p>
-                      <a:r>
-                        <a:rPr sz="1300" b="0" i="0">
-                          <a:solidFill>
-                            <a:srgbClr val="1A1A1A"/>
-                          </a:solidFill>
-                          <a:latin typeface="Times New Roman"/>
-                        </a:rPr>
-                        <a:t>samtools, mosdepth</a:t>
-                      </a:r>
-                    </a:p>
-                  </a:txBody>
-                  <a:tcPr/>
-                </a:tc>
-                <a:tc>
-                  <a:txBody>
-                    <a:bodyPr/>
-                    <a:lstStyle/>
-                    <a:p>
-                      <a:r>
-                        <a:rPr sz="1300" b="0" i="0">
-                          <a:solidFill>
-                            <a:srgbClr val="1A1A1A"/>
-                          </a:solidFill>
-                          <a:latin typeface="Times New Roman"/>
-                        </a:rPr>
-                        <a:t>Galaxy</a:t>
-                      </a:r>
-                    </a:p>
-                  </a:txBody>
-                  <a:tcPr/>
-                </a:tc>
-              </a:tr>
-              <a:tr h="404948">
-                <a:tc>
-                  <a:txBody>
-                    <a:bodyPr/>
-                    <a:lstStyle/>
-                    <a:p>
-                      <a:r>
-                        <a:rPr sz="1300" b="0" i="0">
-                          <a:solidFill>
-                            <a:srgbClr val="1A1A1A"/>
-                          </a:solidFill>
-                          <a:latin typeface="Times New Roman"/>
-                        </a:rPr>
-                        <a:t>Somatic calling ×3</a:t>
-                      </a:r>
-                    </a:p>
-                  </a:txBody>
-                  <a:tcPr/>
-                </a:tc>
-                <a:tc>
-                  <a:txBody>
-                    <a:bodyPr/>
-                    <a:lstStyle/>
-                    <a:p>
-                      <a:r>
-                        <a:rPr sz="1300" b="0" i="0">
-                          <a:solidFill>
-                            <a:srgbClr val="1A1A1A"/>
-                          </a:solidFill>
-                          <a:latin typeface="Times New Roman"/>
-                        </a:rPr>
-                        <a:t>Mutect2, LoFreq, FreeBayes</a:t>
-                      </a:r>
-                    </a:p>
-                  </a:txBody>
-                  <a:tcPr/>
-                </a:tc>
-                <a:tc>
-                  <a:txBody>
-                    <a:bodyPr/>
-                    <a:lstStyle/>
-                    <a:p>
-                      <a:r>
-                        <a:rPr sz="1300" b="0" i="0">
-                          <a:solidFill>
-                            <a:srgbClr val="1A1A1A"/>
-                          </a:solidFill>
-                          <a:latin typeface="Times New Roman"/>
-                        </a:rPr>
-                        <a:t>Galaxy</a:t>
-                      </a:r>
-                    </a:p>
-                  </a:txBody>
-                  <a:tcPr/>
-                </a:tc>
-              </a:tr>
-              <a:tr h="404948">
-                <a:tc>
-                  <a:txBody>
-                    <a:bodyPr/>
-                    <a:lstStyle/>
-                    <a:p>
-                      <a:r>
-                        <a:rPr sz="1300" b="0" i="0">
-                          <a:solidFill>
-                            <a:srgbClr val="1A1A1A"/>
-                          </a:solidFill>
-                          <a:latin typeface="Times New Roman"/>
-                        </a:rPr>
-                        <a:t>RNA alignment and fusions</a:t>
-                      </a:r>
-                    </a:p>
-                  </a:txBody>
-                  <a:tcPr/>
-                </a:tc>
-                <a:tc>
-                  <a:txBody>
-                    <a:bodyPr/>
-                    <a:lstStyle/>
-                    <a:p>
-                      <a:r>
-                        <a:rPr sz="1300" b="0" i="0">
-                          <a:solidFill>
-                            <a:srgbClr val="1A1A1A"/>
-                          </a:solidFill>
-                          <a:latin typeface="Times New Roman"/>
-                        </a:rPr>
-                        <a:t>STAR, Arriba</a:t>
-                      </a:r>
-                    </a:p>
-                  </a:txBody>
-                  <a:tcPr/>
-                </a:tc>
-                <a:tc>
-                  <a:txBody>
-                    <a:bodyPr/>
-                    <a:lstStyle/>
-                    <a:p>
-                      <a:r>
-                        <a:rPr sz="1300" b="0" i="0">
-                          <a:solidFill>
-                            <a:srgbClr val="1A1A1A"/>
-                          </a:solidFill>
-                          <a:latin typeface="Times New Roman"/>
-                        </a:rPr>
-                        <a:t>Galaxy</a:t>
-                      </a:r>
-                    </a:p>
-                  </a:txBody>
-                  <a:tcPr/>
-                </a:tc>
-              </a:tr>
-              <a:tr h="404952">
-                <a:tc>
-                  <a:txBody>
-                    <a:bodyPr/>
-                    <a:lstStyle/>
-                    <a:p>
-                      <a:r>
-                        <a:rPr sz="1300" b="0" i="0">
-                          <a:solidFill>
-                            <a:srgbClr val="1A1A1A"/>
-                          </a:solidFill>
-                          <a:latin typeface="Times New Roman"/>
-                        </a:rPr>
-                        <a:t>Annotation, tiering, biomarkers, report</a:t>
-                      </a:r>
-                    </a:p>
-                  </a:txBody>
-                  <a:tcPr/>
-                </a:tc>
-                <a:tc>
-                  <a:txBody>
-                    <a:bodyPr/>
-                    <a:lstStyle/>
-                    <a:p>
-                      <a:r>
-                        <a:rPr sz="1300" b="0" i="0">
-                          <a:solidFill>
-                            <a:srgbClr val="1A1A1A"/>
-                          </a:solidFill>
-                          <a:latin typeface="Times New Roman"/>
-                        </a:rPr>
-                        <a:t>VEP REST, CIViC, project scripts</a:t>
-                      </a:r>
-                    </a:p>
-                  </a:txBody>
-                  <a:tcPr/>
-                </a:tc>
-                <a:tc>
-                  <a:txBody>
-                    <a:bodyPr/>
-                    <a:lstStyle/>
-                    <a:p>
-                      <a:r>
-                        <a:rPr sz="1300" b="0" i="0">
-                          <a:solidFill>
-                            <a:srgbClr val="1A1A1A"/>
-                          </a:solidFill>
-                          <a:latin typeface="Times New Roman"/>
-                        </a:rPr>
-                        <a:t>laptop</a:t>
-                      </a:r>
-                    </a:p>
-                  </a:txBody>
-                  <a:tcPr/>
-                </a:tc>
-              </a:tr>
-            </a:tbl>
-          </a:graphicData>
-        </a:graphic>
-      </p:graphicFrame>
+              <a:rPr sz="1100" b="1" i="0">
+                <a:solidFill>
+                  <a:srgbClr val="5B9BD5"/>
+                </a:solidFill>
+                <a:latin typeface="Times New Roman"/>
+              </a:rPr>
+              <a:t>DASHBOARD · QUALITY CONTROL</a:t>
+            </a:r>
+          </a:p>
+        </p:txBody>
+      </p:sp>
       <p:sp>
         <p:nvSpPr>
           <p:cNvPr id="4" name="TextBox 3"/>
@@ -5267,8 +9038,8 @@
         </p:nvSpPr>
         <p:spPr>
           <a:xfrm>
-            <a:off x="685800" y="4754880"/>
-            <a:ext cx="10881360" cy="502920"/>
+            <a:off x="685800" y="548640"/>
+            <a:ext cx="10789920" cy="530352"/>
           </a:xfrm>
           <a:prstGeom prst="rect">
             <a:avLst/>
@@ -5282,13 +9053,151 @@
           <a:lstStyle/>
           <a:p>
             <a:r>
-              <a:rPr sz="1300" b="0" i="1">
-                <a:solidFill>
-                  <a:srgbClr val="555555"/>
-                </a:solidFill>
-                <a:latin typeface="Times New Roman"/>
-              </a:rPr>
-              <a:t>Human genome alignment needs ~6 GB (BWA) and ~31 GB (STAR); the available machine had 8 GB. The heavy half runs on the free public Galaxy service, the interpretation locally.</a:t>
+              <a:rPr sz="2500" b="1" i="0">
+                <a:solidFill>
+                  <a:srgbClr val="ECEFF4"/>
+                </a:solidFill>
+                <a:latin typeface="Times New Roman"/>
+              </a:rPr>
+              <a:t>The barcode is visible in the base composition</a:t>
+            </a:r>
+          </a:p>
+        </p:txBody>
+      </p:sp>
+      <p:pic>
+        <p:nvPicPr>
+          <p:cNvPr id="5" name="Picture 4" descr="crop_02_qc_library.png"/>
+          <p:cNvPicPr>
+            <a:picLocks noChangeAspect="1"/>
+          </p:cNvPicPr>
+          <p:nvPr/>
+        </p:nvPicPr>
+        <p:blipFill>
+          <a:blip r:embed="rId2"/>
+          <a:stretch>
+            <a:fillRect/>
+          </a:stretch>
+        </p:blipFill>
+        <p:spPr>
+          <a:xfrm>
+            <a:off x="777240" y="1471337"/>
+            <a:ext cx="10607040" cy="4198789"/>
+          </a:xfrm>
+          <a:prstGeom prst="rect">
+            <a:avLst/>
+          </a:prstGeom>
+        </p:spPr>
+      </p:pic>
+      <p:sp>
+        <p:nvSpPr>
+          <p:cNvPr id="6" name="Rectangle 5"/>
+          <p:cNvSpPr/>
+          <p:nvPr/>
+        </p:nvSpPr>
+        <p:spPr>
+          <a:xfrm>
+            <a:off x="777240" y="1471337"/>
+            <a:ext cx="10607040" cy="4198789"/>
+          </a:xfrm>
+          <a:prstGeom prst="rect">
+            <a:avLst/>
+          </a:prstGeom>
+          <a:noFill/>
+          <a:ln w="15875">
+            <a:solidFill>
+              <a:srgbClr val="181D27"/>
+            </a:solidFill>
+          </a:ln>
+          <a:effectLst/>
+        </p:spPr>
+        <p:style>
+          <a:lnRef idx="1">
+            <a:schemeClr val="accent1"/>
+          </a:lnRef>
+          <a:fillRef idx="3">
+            <a:schemeClr val="accent1"/>
+          </a:fillRef>
+          <a:effectRef idx="2">
+            <a:schemeClr val="accent1"/>
+          </a:effectRef>
+          <a:fontRef idx="minor">
+            <a:schemeClr val="lt1"/>
+          </a:fontRef>
+        </p:style>
+        <p:txBody>
+          <a:bodyPr rtlCol="0" anchor="ctr"/>
+          <a:lstStyle/>
+          <a:p>
+            <a:pPr algn="ctr"/>
+          </a:p>
+        </p:txBody>
+      </p:sp>
+      <p:sp>
+        <p:nvSpPr>
+          <p:cNvPr id="7" name="TextBox 6"/>
+          <p:cNvSpPr txBox="1"/>
+          <p:nvPr/>
+        </p:nvSpPr>
+        <p:spPr>
+          <a:xfrm>
+            <a:off x="777240" y="6007608"/>
+            <a:ext cx="10607040" cy="384048"/>
+          </a:xfrm>
+          <a:prstGeom prst="rect">
+            <a:avLst/>
+          </a:prstGeom>
+          <a:noFill/>
+        </p:spPr>
+        <p:txBody>
+          <a:bodyPr wrap="square">
+            <a:spAutoFit/>
+          </a:bodyPr>
+          <a:lstStyle/>
+          <a:p>
+            <a:pPr algn="ctr"/>
+            <a:r>
+              <a:rPr sz="1150" b="0" i="1">
+                <a:solidFill>
+                  <a:srgbClr val="9AA4B2"/>
+                </a:solidFill>
+                <a:latin typeface="Times New Roman"/>
+              </a:rPr>
+              <a:t>Positions 1–12 carry all four bases; positions 13–26 are a single fixed base per position — the adapter. The insert begins at base 27.</a:t>
+            </a:r>
+          </a:p>
+        </p:txBody>
+      </p:sp>
+      <p:sp>
+        <p:nvSpPr>
+          <p:cNvPr id="8" name="TextBox 7"/>
+          <p:cNvSpPr txBox="1"/>
+          <p:nvPr/>
+        </p:nvSpPr>
+        <p:spPr>
+          <a:xfrm>
+            <a:off x="10607040" y="6382512"/>
+            <a:ext cx="1097280" cy="320040"/>
+          </a:xfrm>
+          <a:prstGeom prst="rect">
+            <a:avLst/>
+          </a:prstGeom>
+          <a:noFill/>
+        </p:spPr>
+        <p:txBody>
+          <a:bodyPr wrap="square">
+            <a:spAutoFit/>
+          </a:bodyPr>
+          <a:lstStyle/>
+          <a:p>
+            <a:pPr algn="r"/>
+            <a:r>
+              <a:rPr sz="1000" b="0" i="0">
+                <a:solidFill>
+                  <a:srgbClr val="9AA4B2"/>
+                </a:solidFill>
+                <a:latin typeface="Times New Roman"/>
+              </a:rPr>
+              <a:t>5 / 18</a:t>
             </a:r>
           </a:p>
         </p:txBody>
@@ -5313,14 +9222,102 @@
       <p:grpSpPr/>
       <p:sp>
         <p:nvSpPr>
-          <p:cNvPr id="2" name="TextBox 1"/>
+          <p:cNvPr id="2" name="Rectangle 1"/>
+          <p:cNvSpPr/>
+          <p:nvPr/>
+        </p:nvSpPr>
+        <p:spPr>
+          <a:xfrm>
+            <a:off x="0" y="0"/>
+            <a:ext cx="12191695" cy="6858000"/>
+          </a:xfrm>
+          <a:prstGeom prst="rect">
+            <a:avLst/>
+          </a:prstGeom>
+          <a:solidFill>
+            <a:srgbClr val="0E1117"/>
+          </a:solidFill>
+          <a:ln>
+            <a:noFill/>
+          </a:ln>
+          <a:effectLst/>
+        </p:spPr>
+        <p:style>
+          <a:lnRef idx="1">
+            <a:schemeClr val="accent1"/>
+          </a:lnRef>
+          <a:fillRef idx="3">
+            <a:schemeClr val="accent1"/>
+          </a:fillRef>
+          <a:effectRef idx="2">
+            <a:schemeClr val="accent1"/>
+          </a:effectRef>
+          <a:fontRef idx="minor">
+            <a:schemeClr val="lt1"/>
+          </a:fontRef>
+        </p:style>
+        <p:txBody>
+          <a:bodyPr rtlCol="0" anchor="ctr"/>
+          <a:lstStyle/>
+          <a:p>
+            <a:pPr algn="ctr"/>
+          </a:p>
+        </p:txBody>
+      </p:sp>
+      <p:sp>
+        <p:nvSpPr>
+          <p:cNvPr id="3" name="Rectangle 2"/>
+          <p:cNvSpPr/>
+          <p:nvPr/>
+        </p:nvSpPr>
+        <p:spPr>
+          <a:xfrm>
+            <a:off x="0" y="2331720"/>
+            <a:ext cx="12191695" cy="54864"/>
+          </a:xfrm>
+          <a:prstGeom prst="rect">
+            <a:avLst/>
+          </a:prstGeom>
+          <a:solidFill>
+            <a:srgbClr val="5B9BD5"/>
+          </a:solidFill>
+          <a:ln>
+            <a:noFill/>
+          </a:ln>
+          <a:effectLst/>
+        </p:spPr>
+        <p:style>
+          <a:lnRef idx="1">
+            <a:schemeClr val="accent1"/>
+          </a:lnRef>
+          <a:fillRef idx="3">
+            <a:schemeClr val="accent1"/>
+          </a:fillRef>
+          <a:effectRef idx="2">
+            <a:schemeClr val="accent1"/>
+          </a:effectRef>
+          <a:fontRef idx="minor">
+            <a:schemeClr val="lt1"/>
+          </a:fontRef>
+        </p:style>
+        <p:txBody>
+          <a:bodyPr rtlCol="0" anchor="ctr"/>
+          <a:lstStyle/>
+          <a:p>
+            <a:pPr algn="ctr"/>
+          </a:p>
+        </p:txBody>
+      </p:sp>
+      <p:sp>
+        <p:nvSpPr>
+          <p:cNvPr id="4" name="TextBox 3"/>
           <p:cNvSpPr txBox="1"/>
           <p:nvPr/>
         </p:nvSpPr>
         <p:spPr>
           <a:xfrm>
-            <a:off x="548640" y="320040"/>
-            <a:ext cx="11064240" cy="822960"/>
+            <a:off x="822960" y="2651760"/>
+            <a:ext cx="10515600" cy="822960"/>
           </a:xfrm>
           <a:prstGeom prst="rect">
             <a:avLst/>
@@ -5334,27 +9331,27 @@
           <a:lstStyle/>
           <a:p>
             <a:r>
-              <a:rPr sz="3000" b="1" i="0">
-                <a:solidFill>
-                  <a:srgbClr val="1F4E79"/>
-                </a:solidFill>
-                <a:latin typeface="Times New Roman"/>
-              </a:rPr>
-              <a:t>Counting molecules, not reads</a:t>
-            </a:r>
-          </a:p>
-        </p:txBody>
-      </p:sp>
-      <p:sp>
-        <p:nvSpPr>
-          <p:cNvPr id="3" name="TextBox 2"/>
+              <a:rPr sz="1500" b="1" i="0">
+                <a:solidFill>
+                  <a:srgbClr val="5B9BD5"/>
+                </a:solidFill>
+                <a:latin typeface="Times New Roman"/>
+              </a:rPr>
+              <a:t>02</a:t>
+            </a:r>
+          </a:p>
+        </p:txBody>
+      </p:sp>
+      <p:sp>
+        <p:nvSpPr>
+          <p:cNvPr id="5" name="TextBox 4"/>
           <p:cNvSpPr txBox="1"/>
           <p:nvPr/>
         </p:nvSpPr>
         <p:spPr>
           <a:xfrm>
-            <a:off x="685800" y="1737360"/>
-            <a:ext cx="10881360" cy="4937760"/>
+            <a:off x="822960" y="2926080"/>
+            <a:ext cx="10515600" cy="1005840"/>
           </a:xfrm>
           <a:prstGeom prst="rect">
             <a:avLst/>
@@ -5367,67 +9364,83 @@
           </a:bodyPr>
           <a:lstStyle/>
           <a:p>
-            <a:pPr>
-              <a:spcAft>
-                <a:spcPts val="600"/>
-              </a:spcAft>
-            </a:pPr>
-            <a:r>
-              <a:rPr sz="1900" b="0" i="0">
-                <a:solidFill>
-                  <a:srgbClr val="1A1A1A"/>
-                </a:solidFill>
-                <a:latin typeface="Times New Roman"/>
-              </a:rPr>
-              <a:t>•  5,680,954 reads collapse to 2,859,626 unique molecules (1.99 reads per molecule).</a:t>
-            </a:r>
-          </a:p>
-          <a:p>
-            <a:pPr>
-              <a:spcAft>
-                <a:spcPts val="600"/>
-              </a:spcAft>
-            </a:pPr>
-            <a:r>
-              <a:rPr sz="1900" b="0" i="0">
-                <a:solidFill>
-                  <a:srgbClr val="1A1A1A"/>
-                </a:solidFill>
-                <a:latin typeface="Times New Roman"/>
-              </a:rPr>
-              <a:t>•  Only 2.09 distinct molecules per amplicon start position.</a:t>
-            </a:r>
-          </a:p>
-          <a:p>
-            <a:pPr>
-              <a:spcAft>
-                <a:spcPts val="600"/>
-              </a:spcAft>
-            </a:pPr>
-            <a:r>
-              <a:rPr sz="1900" b="0" i="0">
-                <a:solidFill>
-                  <a:srgbClr val="1A1A1A"/>
-                </a:solidFill>
-                <a:latin typeface="Times New Roman"/>
-              </a:rPr>
-              <a:t>•  That second number is why barcodes matter: every molecule from one amplicon starts at the same coordinate, so ordinary duplicate marking would collapse them all into one.</a:t>
-            </a:r>
-          </a:p>
-          <a:p>
-            <a:pPr>
-              <a:spcAft>
-                <a:spcPts val="600"/>
-              </a:spcAft>
-            </a:pPr>
-            <a:r>
-              <a:rPr sz="1900" b="0" i="0">
-                <a:solidFill>
-                  <a:srgbClr val="1A1A1A"/>
-                </a:solidFill>
-                <a:latin typeface="Times New Roman"/>
-              </a:rPr>
-              <a:t>•  The experiment is a 2.9-million-molecule measurement, not a 5.5-million-read one.</a:t>
+            <a:r>
+              <a:rPr sz="3400" b="1" i="0">
+                <a:solidFill>
+                  <a:srgbClr val="ECEFF4"/>
+                </a:solidFill>
+                <a:latin typeface="Times New Roman"/>
+              </a:rPr>
+              <a:t>The pipeline</a:t>
+            </a:r>
+          </a:p>
+        </p:txBody>
+      </p:sp>
+      <p:sp>
+        <p:nvSpPr>
+          <p:cNvPr id="6" name="TextBox 5"/>
+          <p:cNvSpPr txBox="1"/>
+          <p:nvPr/>
+        </p:nvSpPr>
+        <p:spPr>
+          <a:xfrm>
+            <a:off x="822960" y="3977639"/>
+            <a:ext cx="9601200" cy="822960"/>
+          </a:xfrm>
+          <a:prstGeom prst="rect">
+            <a:avLst/>
+          </a:prstGeom>
+          <a:noFill/>
+        </p:spPr>
+        <p:txBody>
+          <a:bodyPr wrap="square">
+            <a:spAutoFit/>
+          </a:bodyPr>
+          <a:lstStyle/>
+          <a:p>
+            <a:r>
+              <a:rPr sz="1500" b="0" i="1">
+                <a:solidFill>
+                  <a:srgbClr val="9AA4B2"/>
+                </a:solidFill>
+                <a:latin typeface="Times New Roman"/>
+              </a:rPr>
+              <a:t>Split by memory, not by convenience</a:t>
+            </a:r>
+          </a:p>
+        </p:txBody>
+      </p:sp>
+      <p:sp>
+        <p:nvSpPr>
+          <p:cNvPr id="7" name="TextBox 6"/>
+          <p:cNvSpPr txBox="1"/>
+          <p:nvPr/>
+        </p:nvSpPr>
+        <p:spPr>
+          <a:xfrm>
+            <a:off x="10607040" y="6382512"/>
+            <a:ext cx="1097280" cy="320040"/>
+          </a:xfrm>
+          <a:prstGeom prst="rect">
+            <a:avLst/>
+          </a:prstGeom>
+          <a:noFill/>
+        </p:spPr>
+        <p:txBody>
+          <a:bodyPr wrap="square">
+            <a:spAutoFit/>
+          </a:bodyPr>
+          <a:lstStyle/>
+          <a:p>
+            <a:pPr algn="r"/>
+            <a:r>
+              <a:rPr sz="1000" b="0" i="0">
+                <a:solidFill>
+                  <a:srgbClr val="9AA4B2"/>
+                </a:solidFill>
+                <a:latin typeface="Times New Roman"/>
+              </a:rPr>
+              <a:t>6 / 18</a:t>
             </a:r>
           </a:p>
         </p:txBody>
@@ -5452,14 +9465,58 @@
       <p:grpSpPr/>
       <p:sp>
         <p:nvSpPr>
-          <p:cNvPr id="2" name="TextBox 1"/>
+          <p:cNvPr id="2" name="Rectangle 1"/>
+          <p:cNvSpPr/>
+          <p:nvPr/>
+        </p:nvSpPr>
+        <p:spPr>
+          <a:xfrm>
+            <a:off x="0" y="0"/>
+            <a:ext cx="12191695" cy="6858000"/>
+          </a:xfrm>
+          <a:prstGeom prst="rect">
+            <a:avLst/>
+          </a:prstGeom>
+          <a:solidFill>
+            <a:srgbClr val="0E1117"/>
+          </a:solidFill>
+          <a:ln>
+            <a:noFill/>
+          </a:ln>
+          <a:effectLst/>
+        </p:spPr>
+        <p:style>
+          <a:lnRef idx="1">
+            <a:schemeClr val="accent1"/>
+          </a:lnRef>
+          <a:fillRef idx="3">
+            <a:schemeClr val="accent1"/>
+          </a:fillRef>
+          <a:effectRef idx="2">
+            <a:schemeClr val="accent1"/>
+          </a:effectRef>
+          <a:fontRef idx="minor">
+            <a:schemeClr val="lt1"/>
+          </a:fontRef>
+        </p:style>
+        <p:txBody>
+          <a:bodyPr rtlCol="0" anchor="ctr"/>
+          <a:lstStyle/>
+          <a:p>
+            <a:pPr algn="ctr"/>
+          </a:p>
+        </p:txBody>
+      </p:sp>
+      <p:sp>
+        <p:nvSpPr>
+          <p:cNvPr id="3" name="TextBox 2"/>
           <p:cNvSpPr txBox="1"/>
           <p:nvPr/>
         </p:nvSpPr>
         <p:spPr>
           <a:xfrm>
-            <a:off x="548640" y="320040"/>
-            <a:ext cx="11064240" cy="822960"/>
+            <a:off x="685800" y="384048"/>
+            <a:ext cx="10789920" cy="320040"/>
           </a:xfrm>
           <a:prstGeom prst="rect">
             <a:avLst/>
@@ -5473,39 +9530,106 @@
           <a:lstStyle/>
           <a:p>
             <a:r>
+              <a:rPr sz="1200" b="1" i="0">
+                <a:solidFill>
+                  <a:srgbClr val="5B9BD5"/>
+                </a:solidFill>
+                <a:latin typeface="Times New Roman"/>
+              </a:rPr>
+              <a:t>ARCHITECTURE</a:t>
+            </a:r>
+          </a:p>
+        </p:txBody>
+      </p:sp>
+      <p:sp>
+        <p:nvSpPr>
+          <p:cNvPr id="4" name="TextBox 3"/>
+          <p:cNvSpPr txBox="1"/>
+          <p:nvPr/>
+        </p:nvSpPr>
+        <p:spPr>
+          <a:xfrm>
+            <a:off x="685800" y="713232"/>
+            <a:ext cx="10789920" cy="777240"/>
+          </a:xfrm>
+          <a:prstGeom prst="rect">
+            <a:avLst/>
+          </a:prstGeom>
+          <a:noFill/>
+        </p:spPr>
+        <p:txBody>
+          <a:bodyPr wrap="square">
+            <a:spAutoFit/>
+          </a:bodyPr>
+          <a:lstStyle/>
+          <a:p>
+            <a:r>
               <a:rPr sz="3000" b="1" i="0">
                 <a:solidFill>
-                  <a:srgbClr val="1F4E79"/>
-                </a:solidFill>
-                <a:latin typeface="Times New Roman"/>
-              </a:rPr>
-              <a:t>Somatic calling without a matched normal</a:t>
-            </a:r>
-          </a:p>
-          <a:p>
-            <a:r>
-              <a:rPr sz="1500" b="0" i="1">
-                <a:solidFill>
-                  <a:srgbClr val="555555"/>
-                </a:solidFill>
-                <a:latin typeface="Times New Roman"/>
-              </a:rPr>
-              <a:t>Every variant could in principle be inherited</a:t>
-            </a:r>
+                  <a:srgbClr val="ECEFF4"/>
+                </a:solidFill>
+                <a:latin typeface="Times New Roman"/>
+              </a:rPr>
+              <a:t>Where each step runs</a:t>
+            </a:r>
+          </a:p>
+        </p:txBody>
+      </p:sp>
+      <p:sp>
+        <p:nvSpPr>
+          <p:cNvPr id="5" name="Rectangle 4"/>
+          <p:cNvSpPr/>
+          <p:nvPr/>
+        </p:nvSpPr>
+        <p:spPr>
+          <a:xfrm>
+            <a:off x="713232" y="1554480"/>
+            <a:ext cx="1371600" cy="41148"/>
+          </a:xfrm>
+          <a:prstGeom prst="rect">
+            <a:avLst/>
+          </a:prstGeom>
+          <a:solidFill>
+            <a:srgbClr val="5B9BD5"/>
+          </a:solidFill>
+          <a:ln>
+            <a:noFill/>
+          </a:ln>
+          <a:effectLst/>
+        </p:spPr>
+        <p:style>
+          <a:lnRef idx="1">
+            <a:schemeClr val="accent1"/>
+          </a:lnRef>
+          <a:fillRef idx="3">
+            <a:schemeClr val="accent1"/>
+          </a:fillRef>
+          <a:effectRef idx="2">
+            <a:schemeClr val="accent1"/>
+          </a:effectRef>
+          <a:fontRef idx="minor">
+            <a:schemeClr val="lt1"/>
+          </a:fontRef>
+        </p:style>
+        <p:txBody>
+          <a:bodyPr rtlCol="0" anchor="ctr"/>
+          <a:lstStyle/>
+          <a:p>
+            <a:pPr algn="ctr"/>
           </a:p>
         </p:txBody>
       </p:sp>
       <p:graphicFrame>
         <p:nvGraphicFramePr>
-          <p:cNvPr id="3" name="Table 2"/>
+          <p:cNvPr id="6" name="Table 5"/>
           <p:cNvGraphicFramePr>
             <a:graphicFrameLocks noGrp="1"/>
           </p:cNvGraphicFramePr>
           <p:nvPr/>
         </p:nvGraphicFramePr>
         <p:xfrm>
-          <a:off x="822960" y="1645920"/>
-          <a:ext cx="4572000" cy="1645920"/>
+          <a:off x="777240" y="1856232"/>
+          <a:ext cx="10607040" cy="2688336"/>
         </p:xfrm>
         <a:graphic>
           <a:graphicData uri="http://schemas.openxmlformats.org/drawingml/2006/table">
@@ -5514,23 +9638,24 @@
                 <a:tableStyleId>{5C22544A-7EE6-4342-B048-85BDC9FD1C3A}</a:tableStyleId>
               </a:tblPr>
               <a:tblGrid>
-                <a:gridCol w="2286000"/>
-                <a:gridCol w="2286000"/>
+                <a:gridCol w="3535680"/>
+                <a:gridCol w="3535680"/>
+                <a:gridCol w="3535680"/>
               </a:tblGrid>
-              <a:tr h="411480">
+              <a:tr h="384048">
                 <a:tc>
                   <a:txBody>
                     <a:bodyPr/>
                     <a:lstStyle/>
                     <a:p>
                       <a:r>
-                        <a:rPr sz="1300" b="1" i="0">
+                        <a:rPr sz="1400" b="1" i="0">
                           <a:solidFill>
                             <a:srgbClr val="1A1A1A"/>
                           </a:solidFill>
                           <a:latin typeface="Times New Roman"/>
                         </a:rPr>
-                        <a:t>Callers agreeing</a:t>
+                        <a:t>Stage</a:t>
                       </a:r>
                     </a:p>
                   </a:txBody>
@@ -5542,33 +9667,13 @@
                     <a:lstStyle/>
                     <a:p>
                       <a:r>
-                        <a:rPr sz="1300" b="1" i="0">
+                        <a:rPr sz="1400" b="1" i="0">
                           <a:solidFill>
                             <a:srgbClr val="1A1A1A"/>
                           </a:solidFill>
                           <a:latin typeface="Times New Roman"/>
                         </a:rPr>
-                        <a:t>Variants</a:t>
-                      </a:r>
-                    </a:p>
-                  </a:txBody>
-                  <a:tcPr/>
-                </a:tc>
-              </a:tr>
-              <a:tr h="411480">
-                <a:tc>
-                  <a:txBody>
-                    <a:bodyPr/>
-                    <a:lstStyle/>
-                    <a:p>
-                      <a:r>
-                        <a:rPr sz="1300" b="0" i="0">
-                          <a:solidFill>
-                            <a:srgbClr val="1A1A1A"/>
-                          </a:solidFill>
-                          <a:latin typeface="Times New Roman"/>
-                        </a:rPr>
-                        <a:t>1</a:t>
+                        <a:t>Tool</a:t>
                       </a:r>
                     </a:p>
                   </a:txBody>
@@ -5580,33 +9685,33 @@
                     <a:lstStyle/>
                     <a:p>
                       <a:r>
-                        <a:rPr sz="1300" b="0" i="0">
+                        <a:rPr sz="1400" b="1" i="0">
                           <a:solidFill>
                             <a:srgbClr val="1A1A1A"/>
                           </a:solidFill>
                           <a:latin typeface="Times New Roman"/>
                         </a:rPr>
-                        <a:t>1,573</a:t>
+                        <a:t>Runs on</a:t>
                       </a:r>
                     </a:p>
                   </a:txBody>
                   <a:tcPr/>
                 </a:tc>
               </a:tr>
-              <a:tr h="411480">
+              <a:tr h="384048">
                 <a:tc>
                   <a:txBody>
                     <a:bodyPr/>
                     <a:lstStyle/>
                     <a:p>
                       <a:r>
-                        <a:rPr sz="1300" b="0" i="0">
+                        <a:rPr sz="1400" b="0" i="0">
                           <a:solidFill>
                             <a:srgbClr val="1A1A1A"/>
                           </a:solidFill>
                           <a:latin typeface="Times New Roman"/>
                         </a:rPr>
-                        <a:t>2</a:t>
+                        <a:t>Read structure, primer inference</a:t>
                       </a:r>
                     </a:p>
                   </a:txBody>
@@ -5618,33 +9723,13 @@
                     <a:lstStyle/>
                     <a:p>
                       <a:r>
-                        <a:rPr sz="1300" b="0" i="0">
+                        <a:rPr sz="1400" b="0" i="0">
                           <a:solidFill>
                             <a:srgbClr val="1A1A1A"/>
                           </a:solidFill>
                           <a:latin typeface="Times New Roman"/>
                         </a:rPr>
-                        <a:t>54</a:t>
-                      </a:r>
-                    </a:p>
-                  </a:txBody>
-                  <a:tcPr/>
-                </a:tc>
-              </a:tr>
-              <a:tr h="411480">
-                <a:tc>
-                  <a:txBody>
-                    <a:bodyPr/>
-                    <a:lstStyle/>
-                    <a:p>
-                      <a:r>
-                        <a:rPr sz="1300" b="0" i="0">
-                          <a:solidFill>
-                            <a:srgbClr val="1A1A1A"/>
-                          </a:solidFill>
-                          <a:latin typeface="Times New Roman"/>
-                        </a:rPr>
-                        <a:t>3</a:t>
+                        <a:t>project scripts</a:t>
                       </a:r>
                     </a:p>
                   </a:txBody>
@@ -5656,13 +9741,293 @@
                     <a:lstStyle/>
                     <a:p>
                       <a:r>
-                        <a:rPr sz="1300" b="0" i="0">
+                        <a:rPr sz="1400" b="0" i="0">
                           <a:solidFill>
                             <a:srgbClr val="1A1A1A"/>
                           </a:solidFill>
                           <a:latin typeface="Times New Roman"/>
                         </a:rPr>
-                        <a:t>91</a:t>
+                        <a:t>laptop</a:t>
+                      </a:r>
+                    </a:p>
+                  </a:txBody>
+                  <a:tcPr/>
+                </a:tc>
+              </a:tr>
+              <a:tr h="384048">
+                <a:tc>
+                  <a:txBody>
+                    <a:bodyPr/>
+                    <a:lstStyle/>
+                    <a:p>
+                      <a:r>
+                        <a:rPr sz="1400" b="0" i="0">
+                          <a:solidFill>
+                            <a:srgbClr val="1A1A1A"/>
+                          </a:solidFill>
+                          <a:latin typeface="Times New Roman"/>
+                        </a:rPr>
+                        <a:t>Barcode extraction, alignment, deduplication</a:t>
+                      </a:r>
+                    </a:p>
+                  </a:txBody>
+                  <a:tcPr/>
+                </a:tc>
+                <a:tc>
+                  <a:txBody>
+                    <a:bodyPr/>
+                    <a:lstStyle/>
+                    <a:p>
+                      <a:r>
+                        <a:rPr sz="1400" b="0" i="0">
+                          <a:solidFill>
+                            <a:srgbClr val="1A1A1A"/>
+                          </a:solidFill>
+                          <a:latin typeface="Times New Roman"/>
+                        </a:rPr>
+                        <a:t>UMI-tools, BWA-MEM</a:t>
+                      </a:r>
+                    </a:p>
+                  </a:txBody>
+                  <a:tcPr/>
+                </a:tc>
+                <a:tc>
+                  <a:txBody>
+                    <a:bodyPr/>
+                    <a:lstStyle/>
+                    <a:p>
+                      <a:r>
+                        <a:rPr sz="1400" b="0" i="0">
+                          <a:solidFill>
+                            <a:srgbClr val="1A1A1A"/>
+                          </a:solidFill>
+                          <a:latin typeface="Times New Roman"/>
+                        </a:rPr>
+                        <a:t>Galaxy</a:t>
+                      </a:r>
+                    </a:p>
+                  </a:txBody>
+                  <a:tcPr/>
+                </a:tc>
+              </a:tr>
+              <a:tr h="384048">
+                <a:tc>
+                  <a:txBody>
+                    <a:bodyPr/>
+                    <a:lstStyle/>
+                    <a:p>
+                      <a:r>
+                        <a:rPr sz="1400" b="0" i="0">
+                          <a:solidFill>
+                            <a:srgbClr val="1A1A1A"/>
+                          </a:solidFill>
+                          <a:latin typeface="Times New Roman"/>
+                        </a:rPr>
+                        <a:t>Primer clipping, coverage</a:t>
+                      </a:r>
+                    </a:p>
+                  </a:txBody>
+                  <a:tcPr/>
+                </a:tc>
+                <a:tc>
+                  <a:txBody>
+                    <a:bodyPr/>
+                    <a:lstStyle/>
+                    <a:p>
+                      <a:r>
+                        <a:rPr sz="1400" b="0" i="0">
+                          <a:solidFill>
+                            <a:srgbClr val="1A1A1A"/>
+                          </a:solidFill>
+                          <a:latin typeface="Times New Roman"/>
+                        </a:rPr>
+                        <a:t>samtools, mosdepth</a:t>
+                      </a:r>
+                    </a:p>
+                  </a:txBody>
+                  <a:tcPr/>
+                </a:tc>
+                <a:tc>
+                  <a:txBody>
+                    <a:bodyPr/>
+                    <a:lstStyle/>
+                    <a:p>
+                      <a:r>
+                        <a:rPr sz="1400" b="0" i="0">
+                          <a:solidFill>
+                            <a:srgbClr val="1A1A1A"/>
+                          </a:solidFill>
+                          <a:latin typeface="Times New Roman"/>
+                        </a:rPr>
+                        <a:t>Galaxy</a:t>
+                      </a:r>
+                    </a:p>
+                  </a:txBody>
+                  <a:tcPr/>
+                </a:tc>
+              </a:tr>
+              <a:tr h="384048">
+                <a:tc>
+                  <a:txBody>
+                    <a:bodyPr/>
+                    <a:lstStyle/>
+                    <a:p>
+                      <a:r>
+                        <a:rPr sz="1400" b="0" i="0">
+                          <a:solidFill>
+                            <a:srgbClr val="1A1A1A"/>
+                          </a:solidFill>
+                          <a:latin typeface="Times New Roman"/>
+                        </a:rPr>
+                        <a:t>Somatic calling ×3</a:t>
+                      </a:r>
+                    </a:p>
+                  </a:txBody>
+                  <a:tcPr/>
+                </a:tc>
+                <a:tc>
+                  <a:txBody>
+                    <a:bodyPr/>
+                    <a:lstStyle/>
+                    <a:p>
+                      <a:r>
+                        <a:rPr sz="1400" b="0" i="0">
+                          <a:solidFill>
+                            <a:srgbClr val="1A1A1A"/>
+                          </a:solidFill>
+                          <a:latin typeface="Times New Roman"/>
+                        </a:rPr>
+                        <a:t>Mutect2, LoFreq, FreeBayes</a:t>
+                      </a:r>
+                    </a:p>
+                  </a:txBody>
+                  <a:tcPr/>
+                </a:tc>
+                <a:tc>
+                  <a:txBody>
+                    <a:bodyPr/>
+                    <a:lstStyle/>
+                    <a:p>
+                      <a:r>
+                        <a:rPr sz="1400" b="0" i="0">
+                          <a:solidFill>
+                            <a:srgbClr val="1A1A1A"/>
+                          </a:solidFill>
+                          <a:latin typeface="Times New Roman"/>
+                        </a:rPr>
+                        <a:t>Galaxy</a:t>
+                      </a:r>
+                    </a:p>
+                  </a:txBody>
+                  <a:tcPr/>
+                </a:tc>
+              </a:tr>
+              <a:tr h="384048">
+                <a:tc>
+                  <a:txBody>
+                    <a:bodyPr/>
+                    <a:lstStyle/>
+                    <a:p>
+                      <a:r>
+                        <a:rPr sz="1400" b="0" i="0">
+                          <a:solidFill>
+                            <a:srgbClr val="1A1A1A"/>
+                          </a:solidFill>
+                          <a:latin typeface="Times New Roman"/>
+                        </a:rPr>
+                        <a:t>RNA alignment and fusions</a:t>
+                      </a:r>
+                    </a:p>
+                  </a:txBody>
+                  <a:tcPr/>
+                </a:tc>
+                <a:tc>
+                  <a:txBody>
+                    <a:bodyPr/>
+                    <a:lstStyle/>
+                    <a:p>
+                      <a:r>
+                        <a:rPr sz="1400" b="0" i="0">
+                          <a:solidFill>
+                            <a:srgbClr val="1A1A1A"/>
+                          </a:solidFill>
+                          <a:latin typeface="Times New Roman"/>
+                        </a:rPr>
+                        <a:t>STAR, Arriba</a:t>
+                      </a:r>
+                    </a:p>
+                  </a:txBody>
+                  <a:tcPr/>
+                </a:tc>
+                <a:tc>
+                  <a:txBody>
+                    <a:bodyPr/>
+                    <a:lstStyle/>
+                    <a:p>
+                      <a:r>
+                        <a:rPr sz="1400" b="0" i="0">
+                          <a:solidFill>
+                            <a:srgbClr val="1A1A1A"/>
+                          </a:solidFill>
+                          <a:latin typeface="Times New Roman"/>
+                        </a:rPr>
+                        <a:t>Galaxy</a:t>
+                      </a:r>
+                    </a:p>
+                  </a:txBody>
+                  <a:tcPr/>
+                </a:tc>
+              </a:tr>
+              <a:tr h="384048">
+                <a:tc>
+                  <a:txBody>
+                    <a:bodyPr/>
+                    <a:lstStyle/>
+                    <a:p>
+                      <a:r>
+                        <a:rPr sz="1400" b="0" i="0">
+                          <a:solidFill>
+                            <a:srgbClr val="1A1A1A"/>
+                          </a:solidFill>
+                          <a:latin typeface="Times New Roman"/>
+                        </a:rPr>
+                        <a:t>Annotation, tiering, report, dashboard</a:t>
+                      </a:r>
+                    </a:p>
+                  </a:txBody>
+                  <a:tcPr/>
+                </a:tc>
+                <a:tc>
+                  <a:txBody>
+                    <a:bodyPr/>
+                    <a:lstStyle/>
+                    <a:p>
+                      <a:r>
+                        <a:rPr sz="1400" b="0" i="0">
+                          <a:solidFill>
+                            <a:srgbClr val="1A1A1A"/>
+                          </a:solidFill>
+                          <a:latin typeface="Times New Roman"/>
+                        </a:rPr>
+                        <a:t>VEP REST, CIViC, project scripts</a:t>
+                      </a:r>
+                    </a:p>
+                  </a:txBody>
+                  <a:tcPr/>
+                </a:tc>
+                <a:tc>
+                  <a:txBody>
+                    <a:bodyPr/>
+                    <a:lstStyle/>
+                    <a:p>
+                      <a:r>
+                        <a:rPr sz="1400" b="0" i="0">
+                          <a:solidFill>
+                            <a:srgbClr val="1A1A1A"/>
+                          </a:solidFill>
+                          <a:latin typeface="Times New Roman"/>
+                        </a:rPr>
+                        <a:t>laptop</a:t>
                       </a:r>
                     </a:p>
                   </a:txBody>
@@ -5675,14 +10040,102 @@
       </p:graphicFrame>
       <p:sp>
         <p:nvSpPr>
-          <p:cNvPr id="4" name="TextBox 3"/>
+          <p:cNvPr id="7" name="Rectangle 6"/>
+          <p:cNvSpPr/>
+          <p:nvPr/>
+        </p:nvSpPr>
+        <p:spPr>
+          <a:xfrm>
+            <a:off x="685800" y="5074920"/>
+            <a:ext cx="10789920" cy="777240"/>
+          </a:xfrm>
+          <a:prstGeom prst="rect">
+            <a:avLst/>
+          </a:prstGeom>
+          <a:solidFill>
+            <a:srgbClr val="181D27"/>
+          </a:solidFill>
+          <a:ln>
+            <a:noFill/>
+          </a:ln>
+          <a:effectLst/>
+        </p:spPr>
+        <p:style>
+          <a:lnRef idx="1">
+            <a:schemeClr val="accent1"/>
+          </a:lnRef>
+          <a:fillRef idx="3">
+            <a:schemeClr val="accent1"/>
+          </a:fillRef>
+          <a:effectRef idx="2">
+            <a:schemeClr val="accent1"/>
+          </a:effectRef>
+          <a:fontRef idx="minor">
+            <a:schemeClr val="lt1"/>
+          </a:fontRef>
+        </p:style>
+        <p:txBody>
+          <a:bodyPr rtlCol="0" anchor="ctr"/>
+          <a:lstStyle/>
+          <a:p>
+            <a:pPr algn="ctr"/>
+          </a:p>
+        </p:txBody>
+      </p:sp>
+      <p:sp>
+        <p:nvSpPr>
+          <p:cNvPr id="8" name="Rectangle 7"/>
+          <p:cNvSpPr/>
+          <p:nvPr/>
+        </p:nvSpPr>
+        <p:spPr>
+          <a:xfrm>
+            <a:off x="685800" y="5074920"/>
+            <a:ext cx="50292" cy="777240"/>
+          </a:xfrm>
+          <a:prstGeom prst="rect">
+            <a:avLst/>
+          </a:prstGeom>
+          <a:solidFill>
+            <a:srgbClr val="5B9BD5"/>
+          </a:solidFill>
+          <a:ln>
+            <a:noFill/>
+          </a:ln>
+          <a:effectLst/>
+        </p:spPr>
+        <p:style>
+          <a:lnRef idx="1">
+            <a:schemeClr val="accent1"/>
+          </a:lnRef>
+          <a:fillRef idx="3">
+            <a:schemeClr val="accent1"/>
+          </a:fillRef>
+          <a:effectRef idx="2">
+            <a:schemeClr val="accent1"/>
+          </a:effectRef>
+          <a:fontRef idx="minor">
+            <a:schemeClr val="lt1"/>
+          </a:fontRef>
+        </p:style>
+        <p:txBody>
+          <a:bodyPr rtlCol="0" anchor="ctr"/>
+          <a:lstStyle/>
+          <a:p>
+            <a:pPr algn="ctr"/>
+          </a:p>
+        </p:txBody>
+      </p:sp>
+      <p:sp>
+        <p:nvSpPr>
+          <p:cNvPr id="9" name="TextBox 8"/>
           <p:cNvSpPr txBox="1"/>
           <p:nvPr/>
         </p:nvSpPr>
         <p:spPr>
           <a:xfrm>
-            <a:off x="6035040" y="1645920"/>
-            <a:ext cx="5486400" cy="3108960"/>
+            <a:off x="932688" y="5193792"/>
+            <a:ext cx="10424160" cy="594359"/>
           </a:xfrm>
           <a:prstGeom prst="rect">
             <a:avLst/>
@@ -5695,97 +10148,28 @@
           </a:bodyPr>
           <a:lstStyle/>
           <a:p>
-            <a:pPr>
-              <a:spcAft>
-                <a:spcPts val="800"/>
-              </a:spcAft>
-            </a:pPr>
             <a:r>
               <a:rPr sz="1600" b="0" i="0">
                 <a:solidFill>
-                  <a:srgbClr val="1A1A1A"/>
-                </a:solidFill>
-                <a:latin typeface="Times New Roman"/>
-              </a:rPr>
-              <a:t>•  No single caller is reliable here.</a:t>
-            </a:r>
-          </a:p>
-          <a:p>
-            <a:pPr>
-              <a:spcAft>
-                <a:spcPts val="800"/>
-              </a:spcAft>
-            </a:pPr>
-            <a:r>
-              <a:rPr sz="1600" b="0" i="0">
-                <a:solidFill>
-                  <a:srgbClr val="1A1A1A"/>
-                </a:solidFill>
-                <a:latin typeface="Times New Roman"/>
-              </a:rPr>
-              <a:t>•  1,573 of 1,718 positions were seen by one caller only.</a:t>
-            </a:r>
-          </a:p>
-          <a:p>
-            <a:pPr>
-              <a:spcAft>
-                <a:spcPts val="800"/>
-              </a:spcAft>
-            </a:pPr>
-            <a:r>
-              <a:rPr sz="1600" b="0" i="0">
-                <a:solidFill>
-                  <a:srgbClr val="1A1A1A"/>
-                </a:solidFill>
-                <a:latin typeface="Times New Roman"/>
-              </a:rPr>
-              <a:t>•  Agreement between independent callers is used as the filter.</a:t>
-            </a:r>
-          </a:p>
-          <a:p>
-            <a:pPr>
-              <a:spcAft>
-                <a:spcPts val="800"/>
-              </a:spcAft>
-            </a:pPr>
-            <a:r>
-              <a:rPr sz="1600" b="0" i="0">
-                <a:solidFill>
-                  <a:srgbClr val="1A1A1A"/>
-                </a:solidFill>
-                <a:latin typeface="Times New Roman"/>
-              </a:rPr>
-              <a:t>•  Population frequency, ClinVar and allele fraction then separate likely germline.</a:t>
-            </a:r>
-          </a:p>
-          <a:p>
-            <a:pPr>
-              <a:spcAft>
-                <a:spcPts val="800"/>
-              </a:spcAft>
-            </a:pPr>
-            <a:r>
-              <a:rPr sz="1600" b="0" i="0">
-                <a:solidFill>
-                  <a:srgbClr val="1A1A1A"/>
-                </a:solidFill>
-                <a:latin typeface="Times New Roman"/>
-              </a:rPr>
-              <a:t>•  Variants that cannot be resolved are flagged, never silently deleted.</a:t>
-            </a:r>
-          </a:p>
-        </p:txBody>
-      </p:sp>
-      <p:sp>
-        <p:nvSpPr>
-          <p:cNvPr id="5" name="TextBox 4"/>
+                  <a:srgbClr val="ECEFF4"/>
+                </a:solidFill>
+                <a:latin typeface="Times New Roman"/>
+              </a:rPr>
+              <a:t>Aligning to the human genome needs ~6 GB (BWA) and ~31 GB (STAR). The machine had 8 GB — so the heavy half runs on the free public Galaxy service and the interpretation locally.</a:t>
+            </a:r>
+          </a:p>
+        </p:txBody>
+      </p:sp>
+      <p:sp>
+        <p:nvSpPr>
+          <p:cNvPr id="10" name="TextBox 9"/>
           <p:cNvSpPr txBox="1"/>
           <p:nvPr/>
         </p:nvSpPr>
         <p:spPr>
           <a:xfrm>
-            <a:off x="685800" y="5029200"/>
-            <a:ext cx="10881360" cy="502920"/>
+            <a:off x="10607040" y="6382512"/>
+            <a:ext cx="1097280" cy="320040"/>
           </a:xfrm>
           <a:prstGeom prst="rect">
             <a:avLst/>
@@ -5798,14 +10182,15 @@
           </a:bodyPr>
           <a:lstStyle/>
           <a:p>
-            <a:r>
-              <a:rPr sz="1500" b="0" i="1">
-                <a:solidFill>
-                  <a:srgbClr val="1A1A1A"/>
-                </a:solidFill>
-                <a:latin typeface="Times New Roman"/>
-              </a:rPr>
-              <a:t>Result: 39 likely somatic · 136 likely germline · 1543 insufficient evidence</a:t>
+            <a:pPr algn="r"/>
+            <a:r>
+              <a:rPr sz="1000" b="0" i="0">
+                <a:solidFill>
+                  <a:srgbClr val="9AA4B2"/>
+                </a:solidFill>
+                <a:latin typeface="Times New Roman"/>
+              </a:rPr>
+              <a:t>7 / 18</a:t>
             </a:r>
           </a:p>
         </p:txBody>
@@ -5830,14 +10215,58 @@
       <p:grpSpPr/>
       <p:sp>
         <p:nvSpPr>
-          <p:cNvPr id="2" name="TextBox 1"/>
+          <p:cNvPr id="2" name="Rectangle 1"/>
+          <p:cNvSpPr/>
+          <p:nvPr/>
+        </p:nvSpPr>
+        <p:spPr>
+          <a:xfrm>
+            <a:off x="0" y="0"/>
+            <a:ext cx="12191695" cy="6858000"/>
+          </a:xfrm>
+          <a:prstGeom prst="rect">
+            <a:avLst/>
+          </a:prstGeom>
+          <a:solidFill>
+            <a:srgbClr val="0E1117"/>
+          </a:solidFill>
+          <a:ln>
+            <a:noFill/>
+          </a:ln>
+          <a:effectLst/>
+        </p:spPr>
+        <p:style>
+          <a:lnRef idx="1">
+            <a:schemeClr val="accent1"/>
+          </a:lnRef>
+          <a:fillRef idx="3">
+            <a:schemeClr val="accent1"/>
+          </a:fillRef>
+          <a:effectRef idx="2">
+            <a:schemeClr val="accent1"/>
+          </a:effectRef>
+          <a:fontRef idx="minor">
+            <a:schemeClr val="lt1"/>
+          </a:fontRef>
+        </p:style>
+        <p:txBody>
+          <a:bodyPr rtlCol="0" anchor="ctr"/>
+          <a:lstStyle/>
+          <a:p>
+            <a:pPr algn="ctr"/>
+          </a:p>
+        </p:txBody>
+      </p:sp>
+      <p:sp>
+        <p:nvSpPr>
+          <p:cNvPr id="3" name="TextBox 2"/>
           <p:cNvSpPr txBox="1"/>
           <p:nvPr/>
         </p:nvSpPr>
         <p:spPr>
           <a:xfrm>
-            <a:off x="548640" y="320040"/>
-            <a:ext cx="11064240" cy="822960"/>
+            <a:off x="685800" y="384048"/>
+            <a:ext cx="10789920" cy="320040"/>
           </a:xfrm>
           <a:prstGeom prst="rect">
             <a:avLst/>
@@ -5851,391 +10280,17 @@
           <a:lstStyle/>
           <a:p>
             <a:r>
-              <a:rPr sz="3000" b="1" i="0">
-                <a:solidFill>
-                  <a:srgbClr val="1F4E79"/>
-                </a:solidFill>
-                <a:latin typeface="Times New Roman"/>
-              </a:rPr>
-              <a:t>The result</a:t>
-            </a:r>
-          </a:p>
-          <a:p>
-            <a:r>
-              <a:rPr sz="1500" b="0" i="1">
-                <a:solidFill>
-                  <a:srgbClr val="555555"/>
-                </a:solidFill>
-                <a:latin typeface="Times New Roman"/>
-              </a:rPr>
-              <a:t>Two independent workflows, one specimen</a:t>
-            </a:r>
-          </a:p>
-        </p:txBody>
-      </p:sp>
-      <p:graphicFrame>
-        <p:nvGraphicFramePr>
-          <p:cNvPr id="3" name="Table 2"/>
-          <p:cNvGraphicFramePr>
-            <a:graphicFrameLocks noGrp="1"/>
-          </p:cNvGraphicFramePr>
-          <p:nvPr/>
-        </p:nvGraphicFramePr>
-        <p:xfrm>
-          <a:off x="822960" y="1737360"/>
-          <a:ext cx="10515600" cy="2377440"/>
-        </p:xfrm>
-        <a:graphic>
-          <a:graphicData uri="http://schemas.openxmlformats.org/drawingml/2006/table">
-            <a:tbl>
-              <a:tblPr firstRow="1" bandRow="1">
-                <a:tableStyleId>{5C22544A-7EE6-4342-B048-85BDC9FD1C3A}</a:tableStyleId>
-              </a:tblPr>
-              <a:tblGrid>
-                <a:gridCol w="3505200"/>
-                <a:gridCol w="3505200"/>
-                <a:gridCol w="3505200"/>
-              </a:tblGrid>
-              <a:tr h="396240">
-                <a:tc>
-                  <a:txBody>
-                    <a:bodyPr/>
-                    <a:lstStyle/>
-                    <a:p>
-                      <a:r>
-                        <a:rPr sz="1500" b="1" i="0">
-                          <a:solidFill>
-                            <a:srgbClr val="1A1A1A"/>
-                          </a:solidFill>
-                          <a:latin typeface="Times New Roman"/>
-                        </a:rPr>
-                        <a:t/>
-                      </a:r>
-                    </a:p>
-                  </a:txBody>
-                  <a:tcPr/>
-                </a:tc>
-                <a:tc>
-                  <a:txBody>
-                    <a:bodyPr/>
-                    <a:lstStyle/>
-                    <a:p>
-                      <a:r>
-                        <a:rPr sz="1500" b="1" i="0">
-                          <a:solidFill>
-                            <a:srgbClr val="1A1A1A"/>
-                          </a:solidFill>
-                          <a:latin typeface="Times New Roman"/>
-                        </a:rPr>
-                        <a:t>Accredited laboratory</a:t>
-                      </a:r>
-                    </a:p>
-                  </a:txBody>
-                  <a:tcPr/>
-                </a:tc>
-                <a:tc>
-                  <a:txBody>
-                    <a:bodyPr/>
-                    <a:lstStyle/>
-                    <a:p>
-                      <a:r>
-                        <a:rPr sz="1500" b="1" i="0">
-                          <a:solidFill>
-                            <a:srgbClr val="1A1A1A"/>
-                          </a:solidFill>
-                          <a:latin typeface="Times New Roman"/>
-                        </a:rPr>
-                        <a:t>This pipeline</a:t>
-                      </a:r>
-                    </a:p>
-                  </a:txBody>
-                  <a:tcPr/>
-                </a:tc>
-              </a:tr>
-              <a:tr h="396240">
-                <a:tc>
-                  <a:txBody>
-                    <a:bodyPr/>
-                    <a:lstStyle/>
-                    <a:p>
-                      <a:r>
-                        <a:rPr sz="1500" b="0" i="0">
-                          <a:solidFill>
-                            <a:srgbClr val="1A1A1A"/>
-                          </a:solidFill>
-                          <a:latin typeface="Times New Roman"/>
-                        </a:rPr>
-                        <a:t>Variant</a:t>
-                      </a:r>
-                    </a:p>
-                  </a:txBody>
-                  <a:tcPr/>
-                </a:tc>
-                <a:tc>
-                  <a:txBody>
-                    <a:bodyPr/>
-                    <a:lstStyle/>
-                    <a:p>
-                      <a:r>
-                        <a:rPr sz="1500" b="0" i="0">
-                          <a:solidFill>
-                            <a:srgbClr val="1A1A1A"/>
-                          </a:solidFill>
-                          <a:latin typeface="Times New Roman"/>
-                        </a:rPr>
-                        <a:t>IDH1 p.Arg132Cys</a:t>
-                      </a:r>
-                    </a:p>
-                  </a:txBody>
-                  <a:tcPr/>
-                </a:tc>
-                <a:tc>
-                  <a:txBody>
-                    <a:bodyPr/>
-                    <a:lstStyle/>
-                    <a:p>
-                      <a:r>
-                        <a:rPr sz="1500" b="0" i="0">
-                          <a:solidFill>
-                            <a:srgbClr val="1A1A1A"/>
-                          </a:solidFill>
-                          <a:latin typeface="Times New Roman"/>
-                        </a:rPr>
-                        <a:t>IDH1 p.Arg132Cys</a:t>
-                      </a:r>
-                    </a:p>
-                  </a:txBody>
-                  <a:tcPr/>
-                </a:tc>
-              </a:tr>
-              <a:tr h="396240">
-                <a:tc>
-                  <a:txBody>
-                    <a:bodyPr/>
-                    <a:lstStyle/>
-                    <a:p>
-                      <a:r>
-                        <a:rPr sz="1500" b="0" i="0">
-                          <a:solidFill>
-                            <a:srgbClr val="1A1A1A"/>
-                          </a:solidFill>
-                          <a:latin typeface="Times New Roman"/>
-                        </a:rPr>
-                        <a:t>Allele fraction</a:t>
-                      </a:r>
-                    </a:p>
-                  </a:txBody>
-                  <a:tcPr/>
-                </a:tc>
-                <a:tc>
-                  <a:txBody>
-                    <a:bodyPr/>
-                    <a:lstStyle/>
-                    <a:p>
-                      <a:r>
-                        <a:rPr sz="1500" b="0" i="0">
-                          <a:solidFill>
-                            <a:srgbClr val="1A1A1A"/>
-                          </a:solidFill>
-                          <a:latin typeface="Times New Roman"/>
-                        </a:rPr>
-                        <a:t>0.281</a:t>
-                      </a:r>
-                    </a:p>
-                  </a:txBody>
-                  <a:tcPr/>
-                </a:tc>
-                <a:tc>
-                  <a:txBody>
-                    <a:bodyPr/>
-                    <a:lstStyle/>
-                    <a:p>
-                      <a:r>
-                        <a:rPr sz="1500" b="0" i="0">
-                          <a:solidFill>
-                            <a:srgbClr val="1A1A1A"/>
-                          </a:solidFill>
-                          <a:latin typeface="Times New Roman"/>
-                        </a:rPr>
-                        <a:t>0.2814</a:t>
-                      </a:r>
-                    </a:p>
-                  </a:txBody>
-                  <a:tcPr/>
-                </a:tc>
-              </a:tr>
-              <a:tr h="396240">
-                <a:tc>
-                  <a:txBody>
-                    <a:bodyPr/>
-                    <a:lstStyle/>
-                    <a:p>
-                      <a:r>
-                        <a:rPr sz="1500" b="0" i="0">
-                          <a:solidFill>
-                            <a:srgbClr val="1A1A1A"/>
-                          </a:solidFill>
-                          <a:latin typeface="Times New Roman"/>
-                        </a:rPr>
-                        <a:t>Supported by</a:t>
-                      </a:r>
-                    </a:p>
-                  </a:txBody>
-                  <a:tcPr/>
-                </a:tc>
-                <a:tc>
-                  <a:txBody>
-                    <a:bodyPr/>
-                    <a:lstStyle/>
-                    <a:p>
-                      <a:r>
-                        <a:rPr sz="1500" b="0" i="0">
-                          <a:solidFill>
-                            <a:srgbClr val="1A1A1A"/>
-                          </a:solidFill>
-                          <a:latin typeface="Times New Roman"/>
-                        </a:rPr>
-                        <a:t>vendor software</a:t>
-                      </a:r>
-                    </a:p>
-                  </a:txBody>
-                  <a:tcPr/>
-                </a:tc>
-                <a:tc>
-                  <a:txBody>
-                    <a:bodyPr/>
-                    <a:lstStyle/>
-                    <a:p>
-                      <a:r>
-                        <a:rPr sz="1500" b="0" i="0">
-                          <a:solidFill>
-                            <a:srgbClr val="1A1A1A"/>
-                          </a:solidFill>
-                          <a:latin typeface="Times New Roman"/>
-                        </a:rPr>
-                        <a:t>3 of 3 callers</a:t>
-                      </a:r>
-                    </a:p>
-                  </a:txBody>
-                  <a:tcPr/>
-                </a:tc>
-              </a:tr>
-              <a:tr h="396240">
-                <a:tc>
-                  <a:txBody>
-                    <a:bodyPr/>
-                    <a:lstStyle/>
-                    <a:p>
-                      <a:r>
-                        <a:rPr sz="1500" b="0" i="0">
-                          <a:solidFill>
-                            <a:srgbClr val="1A1A1A"/>
-                          </a:solidFill>
-                          <a:latin typeface="Times New Roman"/>
-                        </a:rPr>
-                        <a:t>Reference build</a:t>
-                      </a:r>
-                    </a:p>
-                  </a:txBody>
-                  <a:tcPr/>
-                </a:tc>
-                <a:tc>
-                  <a:txBody>
-                    <a:bodyPr/>
-                    <a:lstStyle/>
-                    <a:p>
-                      <a:r>
-                        <a:rPr sz="1500" b="0" i="0">
-                          <a:solidFill>
-                            <a:srgbClr val="1A1A1A"/>
-                          </a:solidFill>
-                          <a:latin typeface="Times New Roman"/>
-                        </a:rPr>
-                        <a:t>GRCh37 / hg19</a:t>
-                      </a:r>
-                    </a:p>
-                  </a:txBody>
-                  <a:tcPr/>
-                </a:tc>
-                <a:tc>
-                  <a:txBody>
-                    <a:bodyPr/>
-                    <a:lstStyle/>
-                    <a:p>
-                      <a:r>
-                        <a:rPr sz="1500" b="0" i="0">
-                          <a:solidFill>
-                            <a:srgbClr val="1A1A1A"/>
-                          </a:solidFill>
-                          <a:latin typeface="Times New Roman"/>
-                        </a:rPr>
-                        <a:t>GRCh38</a:t>
-                      </a:r>
-                    </a:p>
-                  </a:txBody>
-                  <a:tcPr/>
-                </a:tc>
-              </a:tr>
-              <a:tr h="396240">
-                <a:tc>
-                  <a:txBody>
-                    <a:bodyPr/>
-                    <a:lstStyle/>
-                    <a:p>
-                      <a:r>
-                        <a:rPr sz="1500" b="0" i="0">
-                          <a:solidFill>
-                            <a:srgbClr val="1A1A1A"/>
-                          </a:solidFill>
-                          <a:latin typeface="Times New Roman"/>
-                        </a:rPr>
-                        <a:t>Reported variants recovered</a:t>
-                      </a:r>
-                    </a:p>
-                  </a:txBody>
-                  <a:tcPr/>
-                </a:tc>
-                <a:tc>
-                  <a:txBody>
-                    <a:bodyPr/>
-                    <a:lstStyle/>
-                    <a:p>
-                      <a:r>
-                        <a:rPr sz="1500" b="0" i="0">
-                          <a:solidFill>
-                            <a:srgbClr val="1A1A1A"/>
-                          </a:solidFill>
-                          <a:latin typeface="Times New Roman"/>
-                        </a:rPr>
-                        <a:t>—</a:t>
-                      </a:r>
-                    </a:p>
-                  </a:txBody>
-                  <a:tcPr/>
-                </a:tc>
-                <a:tc>
-                  <a:txBody>
-                    <a:bodyPr/>
-                    <a:lstStyle/>
-                    <a:p>
-                      <a:r>
-                        <a:rPr sz="1500" b="0" i="0">
-                          <a:solidFill>
-                            <a:srgbClr val="1A1A1A"/>
-                          </a:solidFill>
-                          <a:latin typeface="Times New Roman"/>
-                        </a:rPr>
-                        <a:t>1 of 1</a:t>
-                      </a:r>
-                    </a:p>
-                  </a:txBody>
-                  <a:tcPr/>
-                </a:tc>
-              </a:tr>
-            </a:tbl>
-          </a:graphicData>
-        </a:graphic>
-      </p:graphicFrame>
+              <a:rPr sz="1200" b="1" i="0">
+                <a:solidFill>
+                  <a:srgbClr val="5B9BD5"/>
+                </a:solidFill>
+                <a:latin typeface="Times New Roman"/>
+              </a:rPr>
+              <a:t>DEDUPLICATION</a:t>
+            </a:r>
+          </a:p>
+        </p:txBody>
+      </p:sp>
       <p:sp>
         <p:nvSpPr>
           <p:cNvPr id="4" name="TextBox 3"/>
@@ -6244,8 +10299,8 @@
         </p:nvSpPr>
         <p:spPr>
           <a:xfrm>
-            <a:off x="822960" y="4480560"/>
-            <a:ext cx="10607040" cy="1280160"/>
+            <a:off x="685800" y="713232"/>
+            <a:ext cx="10789920" cy="777240"/>
           </a:xfrm>
           <a:prstGeom prst="rect">
             <a:avLst/>
@@ -6259,13 +10314,526 @@
           <a:lstStyle/>
           <a:p>
             <a:r>
-              <a:rPr sz="1900" b="1" i="0">
-                <a:solidFill>
-                  <a:srgbClr val="1F4E79"/>
-                </a:solidFill>
-                <a:latin typeface="Times New Roman"/>
-              </a:rPr>
-              <a:t>Different aligners, different callers, different reference builds, different deduplication — the same answer to three decimal places.</a:t>
+              <a:rPr sz="3000" b="1" i="0">
+                <a:solidFill>
+                  <a:srgbClr val="ECEFF4"/>
+                </a:solidFill>
+                <a:latin typeface="Times New Roman"/>
+              </a:rPr>
+              <a:t>Counting molecules, not reads</a:t>
+            </a:r>
+          </a:p>
+        </p:txBody>
+      </p:sp>
+      <p:sp>
+        <p:nvSpPr>
+          <p:cNvPr id="5" name="Rectangle 4"/>
+          <p:cNvSpPr/>
+          <p:nvPr/>
+        </p:nvSpPr>
+        <p:spPr>
+          <a:xfrm>
+            <a:off x="713232" y="1554480"/>
+            <a:ext cx="1371600" cy="41148"/>
+          </a:xfrm>
+          <a:prstGeom prst="rect">
+            <a:avLst/>
+          </a:prstGeom>
+          <a:solidFill>
+            <a:srgbClr val="5B9BD5"/>
+          </a:solidFill>
+          <a:ln>
+            <a:noFill/>
+          </a:ln>
+          <a:effectLst/>
+        </p:spPr>
+        <p:style>
+          <a:lnRef idx="1">
+            <a:schemeClr val="accent1"/>
+          </a:lnRef>
+          <a:fillRef idx="3">
+            <a:schemeClr val="accent1"/>
+          </a:fillRef>
+          <a:effectRef idx="2">
+            <a:schemeClr val="accent1"/>
+          </a:effectRef>
+          <a:fontRef idx="minor">
+            <a:schemeClr val="lt1"/>
+          </a:fontRef>
+        </p:style>
+        <p:txBody>
+          <a:bodyPr rtlCol="0" anchor="ctr"/>
+          <a:lstStyle/>
+          <a:p>
+            <a:pPr algn="ctr"/>
+          </a:p>
+        </p:txBody>
+      </p:sp>
+      <p:sp>
+        <p:nvSpPr>
+          <p:cNvPr id="6" name="Rectangle 5"/>
+          <p:cNvSpPr/>
+          <p:nvPr/>
+        </p:nvSpPr>
+        <p:spPr>
+          <a:xfrm>
+            <a:off x="685800" y="1856232"/>
+            <a:ext cx="3383280" cy="1600200"/>
+          </a:xfrm>
+          <a:prstGeom prst="rect">
+            <a:avLst/>
+          </a:prstGeom>
+          <a:solidFill>
+            <a:srgbClr val="181D27"/>
+          </a:solidFill>
+          <a:ln>
+            <a:noFill/>
+          </a:ln>
+          <a:effectLst/>
+        </p:spPr>
+        <p:style>
+          <a:lnRef idx="1">
+            <a:schemeClr val="accent1"/>
+          </a:lnRef>
+          <a:fillRef idx="3">
+            <a:schemeClr val="accent1"/>
+          </a:fillRef>
+          <a:effectRef idx="2">
+            <a:schemeClr val="accent1"/>
+          </a:effectRef>
+          <a:fontRef idx="minor">
+            <a:schemeClr val="lt1"/>
+          </a:fontRef>
+        </p:style>
+        <p:txBody>
+          <a:bodyPr rtlCol="0" anchor="ctr"/>
+          <a:lstStyle/>
+          <a:p>
+            <a:pPr algn="ctr"/>
+          </a:p>
+        </p:txBody>
+      </p:sp>
+      <p:sp>
+        <p:nvSpPr>
+          <p:cNvPr id="7" name="TextBox 6"/>
+          <p:cNvSpPr txBox="1"/>
+          <p:nvPr/>
+        </p:nvSpPr>
+        <p:spPr>
+          <a:xfrm>
+            <a:off x="914400" y="2020824"/>
+            <a:ext cx="2926080" cy="777240"/>
+          </a:xfrm>
+          <a:prstGeom prst="rect">
+            <a:avLst/>
+          </a:prstGeom>
+          <a:noFill/>
+        </p:spPr>
+        <p:txBody>
+          <a:bodyPr wrap="square">
+            <a:spAutoFit/>
+          </a:bodyPr>
+          <a:lstStyle/>
+          <a:p>
+            <a:r>
+              <a:rPr sz="4000" b="1" i="0">
+                <a:solidFill>
+                  <a:srgbClr val="5B9BD5"/>
+                </a:solidFill>
+                <a:latin typeface="Times New Roman"/>
+              </a:rPr>
+              <a:t>5.7 M</a:t>
+            </a:r>
+          </a:p>
+        </p:txBody>
+      </p:sp>
+      <p:sp>
+        <p:nvSpPr>
+          <p:cNvPr id="8" name="TextBox 7"/>
+          <p:cNvSpPr txBox="1"/>
+          <p:nvPr/>
+        </p:nvSpPr>
+        <p:spPr>
+          <a:xfrm>
+            <a:off x="914400" y="2843784"/>
+            <a:ext cx="2926080" cy="548640"/>
+          </a:xfrm>
+          <a:prstGeom prst="rect">
+            <a:avLst/>
+          </a:prstGeom>
+          <a:noFill/>
+        </p:spPr>
+        <p:txBody>
+          <a:bodyPr wrap="square">
+            <a:spAutoFit/>
+          </a:bodyPr>
+          <a:lstStyle/>
+          <a:p>
+            <a:r>
+              <a:rPr sz="1200" b="0" i="0">
+                <a:solidFill>
+                  <a:srgbClr val="9AA4B2"/>
+                </a:solidFill>
+                <a:latin typeface="Times New Roman"/>
+              </a:rPr>
+              <a:t>sequencing reads</a:t>
+            </a:r>
+          </a:p>
+        </p:txBody>
+      </p:sp>
+      <p:sp>
+        <p:nvSpPr>
+          <p:cNvPr id="9" name="Rectangle 8"/>
+          <p:cNvSpPr/>
+          <p:nvPr/>
+        </p:nvSpPr>
+        <p:spPr>
+          <a:xfrm>
+            <a:off x="4389120" y="1856232"/>
+            <a:ext cx="3383280" cy="1600200"/>
+          </a:xfrm>
+          <a:prstGeom prst="rect">
+            <a:avLst/>
+          </a:prstGeom>
+          <a:solidFill>
+            <a:srgbClr val="181D27"/>
+          </a:solidFill>
+          <a:ln>
+            <a:noFill/>
+          </a:ln>
+          <a:effectLst/>
+        </p:spPr>
+        <p:style>
+          <a:lnRef idx="1">
+            <a:schemeClr val="accent1"/>
+          </a:lnRef>
+          <a:fillRef idx="3">
+            <a:schemeClr val="accent1"/>
+          </a:fillRef>
+          <a:effectRef idx="2">
+            <a:schemeClr val="accent1"/>
+          </a:effectRef>
+          <a:fontRef idx="minor">
+            <a:schemeClr val="lt1"/>
+          </a:fontRef>
+        </p:style>
+        <p:txBody>
+          <a:bodyPr rtlCol="0" anchor="ctr"/>
+          <a:lstStyle/>
+          <a:p>
+            <a:pPr algn="ctr"/>
+          </a:p>
+        </p:txBody>
+      </p:sp>
+      <p:sp>
+        <p:nvSpPr>
+          <p:cNvPr id="10" name="TextBox 9"/>
+          <p:cNvSpPr txBox="1"/>
+          <p:nvPr/>
+        </p:nvSpPr>
+        <p:spPr>
+          <a:xfrm>
+            <a:off x="4617720" y="2020824"/>
+            <a:ext cx="2926080" cy="777240"/>
+          </a:xfrm>
+          <a:prstGeom prst="rect">
+            <a:avLst/>
+          </a:prstGeom>
+          <a:noFill/>
+        </p:spPr>
+        <p:txBody>
+          <a:bodyPr wrap="square">
+            <a:spAutoFit/>
+          </a:bodyPr>
+          <a:lstStyle/>
+          <a:p>
+            <a:r>
+              <a:rPr sz="4000" b="1" i="0">
+                <a:solidFill>
+                  <a:srgbClr val="5B9BD5"/>
+                </a:solidFill>
+                <a:latin typeface="Times New Roman"/>
+              </a:rPr>
+              <a:t>2.9 M</a:t>
+            </a:r>
+          </a:p>
+        </p:txBody>
+      </p:sp>
+      <p:sp>
+        <p:nvSpPr>
+          <p:cNvPr id="11" name="TextBox 10"/>
+          <p:cNvSpPr txBox="1"/>
+          <p:nvPr/>
+        </p:nvSpPr>
+        <p:spPr>
+          <a:xfrm>
+            <a:off x="4617720" y="2843784"/>
+            <a:ext cx="2926080" cy="548640"/>
+          </a:xfrm>
+          <a:prstGeom prst="rect">
+            <a:avLst/>
+          </a:prstGeom>
+          <a:noFill/>
+        </p:spPr>
+        <p:txBody>
+          <a:bodyPr wrap="square">
+            <a:spAutoFit/>
+          </a:bodyPr>
+          <a:lstStyle/>
+          <a:p>
+            <a:r>
+              <a:rPr sz="1200" b="0" i="0">
+                <a:solidFill>
+                  <a:srgbClr val="9AA4B2"/>
+                </a:solidFill>
+                <a:latin typeface="Times New Roman"/>
+              </a:rPr>
+              <a:t>unique molecules</a:t>
+            </a:r>
+          </a:p>
+        </p:txBody>
+      </p:sp>
+      <p:sp>
+        <p:nvSpPr>
+          <p:cNvPr id="12" name="Rectangle 11"/>
+          <p:cNvSpPr/>
+          <p:nvPr/>
+        </p:nvSpPr>
+        <p:spPr>
+          <a:xfrm>
+            <a:off x="8092440" y="1856232"/>
+            <a:ext cx="3383280" cy="1600200"/>
+          </a:xfrm>
+          <a:prstGeom prst="rect">
+            <a:avLst/>
+          </a:prstGeom>
+          <a:solidFill>
+            <a:srgbClr val="181D27"/>
+          </a:solidFill>
+          <a:ln>
+            <a:noFill/>
+          </a:ln>
+          <a:effectLst/>
+        </p:spPr>
+        <p:style>
+          <a:lnRef idx="1">
+            <a:schemeClr val="accent1"/>
+          </a:lnRef>
+          <a:fillRef idx="3">
+            <a:schemeClr val="accent1"/>
+          </a:fillRef>
+          <a:effectRef idx="2">
+            <a:schemeClr val="accent1"/>
+          </a:effectRef>
+          <a:fontRef idx="minor">
+            <a:schemeClr val="lt1"/>
+          </a:fontRef>
+        </p:style>
+        <p:txBody>
+          <a:bodyPr rtlCol="0" anchor="ctr"/>
+          <a:lstStyle/>
+          <a:p>
+            <a:pPr algn="ctr"/>
+          </a:p>
+        </p:txBody>
+      </p:sp>
+      <p:sp>
+        <p:nvSpPr>
+          <p:cNvPr id="13" name="TextBox 12"/>
+          <p:cNvSpPr txBox="1"/>
+          <p:nvPr/>
+        </p:nvSpPr>
+        <p:spPr>
+          <a:xfrm>
+            <a:off x="8321040" y="2020824"/>
+            <a:ext cx="2926080" cy="777240"/>
+          </a:xfrm>
+          <a:prstGeom prst="rect">
+            <a:avLst/>
+          </a:prstGeom>
+          <a:noFill/>
+        </p:spPr>
+        <p:txBody>
+          <a:bodyPr wrap="square">
+            <a:spAutoFit/>
+          </a:bodyPr>
+          <a:lstStyle/>
+          <a:p>
+            <a:r>
+              <a:rPr sz="4000" b="1" i="0">
+                <a:solidFill>
+                  <a:srgbClr val="5B9BD5"/>
+                </a:solidFill>
+                <a:latin typeface="Times New Roman"/>
+              </a:rPr>
+              <a:t>2.09</a:t>
+            </a:r>
+          </a:p>
+        </p:txBody>
+      </p:sp>
+      <p:sp>
+        <p:nvSpPr>
+          <p:cNvPr id="14" name="TextBox 13"/>
+          <p:cNvSpPr txBox="1"/>
+          <p:nvPr/>
+        </p:nvSpPr>
+        <p:spPr>
+          <a:xfrm>
+            <a:off x="8321040" y="2843784"/>
+            <a:ext cx="2926080" cy="548640"/>
+          </a:xfrm>
+          <a:prstGeom prst="rect">
+            <a:avLst/>
+          </a:prstGeom>
+          <a:noFill/>
+        </p:spPr>
+        <p:txBody>
+          <a:bodyPr wrap="square">
+            <a:spAutoFit/>
+          </a:bodyPr>
+          <a:lstStyle/>
+          <a:p>
+            <a:r>
+              <a:rPr sz="1200" b="0" i="0">
+                <a:solidFill>
+                  <a:srgbClr val="9AA4B2"/>
+                </a:solidFill>
+                <a:latin typeface="Times New Roman"/>
+              </a:rPr>
+              <a:t>molecules per amplicon start</a:t>
+            </a:r>
+          </a:p>
+        </p:txBody>
+      </p:sp>
+      <p:sp>
+        <p:nvSpPr>
+          <p:cNvPr id="15" name="TextBox 14"/>
+          <p:cNvSpPr txBox="1"/>
+          <p:nvPr/>
+        </p:nvSpPr>
+        <p:spPr>
+          <a:xfrm>
+            <a:off x="777240" y="3822191"/>
+            <a:ext cx="10607040" cy="2487168"/>
+          </a:xfrm>
+          <a:prstGeom prst="rect">
+            <a:avLst/>
+          </a:prstGeom>
+          <a:noFill/>
+        </p:spPr>
+        <p:txBody>
+          <a:bodyPr wrap="square">
+            <a:spAutoFit/>
+          </a:bodyPr>
+          <a:lstStyle/>
+          <a:p>
+            <a:pPr>
+              <a:spcAft>
+                <a:spcPts val="1100"/>
+              </a:spcAft>
+            </a:pPr>
+            <a:r>
+              <a:rPr sz="1700" b="0" i="0">
+                <a:solidFill>
+                  <a:srgbClr val="5B9BD5"/>
+                </a:solidFill>
+                <a:latin typeface="Times New Roman"/>
+              </a:rPr>
+              <a:t>▪   </a:t>
+            </a:r>
+            <a:r>
+              <a:rPr sz="1700" b="0" i="0">
+                <a:solidFill>
+                  <a:srgbClr val="ECEFF4"/>
+                </a:solidFill>
+                <a:latin typeface="Times New Roman"/>
+              </a:rPr>
+              <a:t>Every molecule from one amplicon starts at the same coordinate, so coordinate-based duplicate marking would collapse them all into one.</a:t>
+            </a:r>
+          </a:p>
+          <a:p>
+            <a:pPr>
+              <a:spcAft>
+                <a:spcPts val="1100"/>
+              </a:spcAft>
+            </a:pPr>
+            <a:r>
+              <a:rPr sz="1700" b="0" i="0">
+                <a:solidFill>
+                  <a:srgbClr val="5B9BD5"/>
+                </a:solidFill>
+                <a:latin typeface="Times New Roman"/>
+              </a:rPr>
+              <a:t>▪   </a:t>
+            </a:r>
+            <a:r>
+              <a:rPr sz="1700" b="0" i="0">
+                <a:solidFill>
+                  <a:srgbClr val="ECEFF4"/>
+                </a:solidFill>
+                <a:latin typeface="Times New Roman"/>
+              </a:rPr>
+              <a:t>With only ~2 distinct molecules per start position, that would discard most of the evidence.</a:t>
+            </a:r>
+          </a:p>
+          <a:p>
+            <a:pPr>
+              <a:spcAft>
+                <a:spcPts val="1100"/>
+              </a:spcAft>
+            </a:pPr>
+            <a:r>
+              <a:rPr sz="1700" b="0" i="0">
+                <a:solidFill>
+                  <a:srgbClr val="5B9BD5"/>
+                </a:solidFill>
+                <a:latin typeface="Times New Roman"/>
+              </a:rPr>
+              <a:t>▪   </a:t>
+            </a:r>
+            <a:r>
+              <a:rPr sz="1700" b="0" i="0">
+                <a:solidFill>
+                  <a:srgbClr val="ECEFF4"/>
+                </a:solidFill>
+                <a:latin typeface="Times New Roman"/>
+              </a:rPr>
+              <a:t>The experiment is a 2.9-million-molecule measurement, not a 5.5-million-read one — and the confidence in every variant follows from the smaller number.</a:t>
+            </a:r>
+          </a:p>
+        </p:txBody>
+      </p:sp>
+      <p:sp>
+        <p:nvSpPr>
+          <p:cNvPr id="16" name="TextBox 15"/>
+          <p:cNvSpPr txBox="1"/>
+          <p:nvPr/>
+        </p:nvSpPr>
+        <p:spPr>
+          <a:xfrm>
+            <a:off x="10607040" y="6382512"/>
+            <a:ext cx="1097280" cy="320040"/>
+          </a:xfrm>
+          <a:prstGeom prst="rect">
+            <a:avLst/>
+          </a:prstGeom>
+          <a:noFill/>
+        </p:spPr>
+        <p:txBody>
+          <a:bodyPr wrap="square">
+            <a:spAutoFit/>
+          </a:bodyPr>
+          <a:lstStyle/>
+          <a:p>
+            <a:pPr algn="r"/>
+            <a:r>
+              <a:rPr sz="1000" b="0" i="0">
+                <a:solidFill>
+                  <a:srgbClr val="9AA4B2"/>
+                </a:solidFill>
+                <a:latin typeface="Times New Roman"/>
+              </a:rPr>
+              <a:t>8 / 18</a:t>
             </a:r>
           </a:p>
         </p:txBody>
@@ -6290,14 +10858,102 @@
       <p:grpSpPr/>
       <p:sp>
         <p:nvSpPr>
-          <p:cNvPr id="2" name="TextBox 1"/>
+          <p:cNvPr id="2" name="Rectangle 1"/>
+          <p:cNvSpPr/>
+          <p:nvPr/>
+        </p:nvSpPr>
+        <p:spPr>
+          <a:xfrm>
+            <a:off x="0" y="0"/>
+            <a:ext cx="12191695" cy="6858000"/>
+          </a:xfrm>
+          <a:prstGeom prst="rect">
+            <a:avLst/>
+          </a:prstGeom>
+          <a:solidFill>
+            <a:srgbClr val="0E1117"/>
+          </a:solidFill>
+          <a:ln>
+            <a:noFill/>
+          </a:ln>
+          <a:effectLst/>
+        </p:spPr>
+        <p:style>
+          <a:lnRef idx="1">
+            <a:schemeClr val="accent1"/>
+          </a:lnRef>
+          <a:fillRef idx="3">
+            <a:schemeClr val="accent1"/>
+          </a:fillRef>
+          <a:effectRef idx="2">
+            <a:schemeClr val="accent1"/>
+          </a:effectRef>
+          <a:fontRef idx="minor">
+            <a:schemeClr val="lt1"/>
+          </a:fontRef>
+        </p:style>
+        <p:txBody>
+          <a:bodyPr rtlCol="0" anchor="ctr"/>
+          <a:lstStyle/>
+          <a:p>
+            <a:pPr algn="ctr"/>
+          </a:p>
+        </p:txBody>
+      </p:sp>
+      <p:sp>
+        <p:nvSpPr>
+          <p:cNvPr id="3" name="Rectangle 2"/>
+          <p:cNvSpPr/>
+          <p:nvPr/>
+        </p:nvSpPr>
+        <p:spPr>
+          <a:xfrm>
+            <a:off x="0" y="2331720"/>
+            <a:ext cx="12191695" cy="54864"/>
+          </a:xfrm>
+          <a:prstGeom prst="rect">
+            <a:avLst/>
+          </a:prstGeom>
+          <a:solidFill>
+            <a:srgbClr val="5B9BD5"/>
+          </a:solidFill>
+          <a:ln>
+            <a:noFill/>
+          </a:ln>
+          <a:effectLst/>
+        </p:spPr>
+        <p:style>
+          <a:lnRef idx="1">
+            <a:schemeClr val="accent1"/>
+          </a:lnRef>
+          <a:fillRef idx="3">
+            <a:schemeClr val="accent1"/>
+          </a:fillRef>
+          <a:effectRef idx="2">
+            <a:schemeClr val="accent1"/>
+          </a:effectRef>
+          <a:fontRef idx="minor">
+            <a:schemeClr val="lt1"/>
+          </a:fontRef>
+        </p:style>
+        <p:txBody>
+          <a:bodyPr rtlCol="0" anchor="ctr"/>
+          <a:lstStyle/>
+          <a:p>
+            <a:pPr algn="ctr"/>
+          </a:p>
+        </p:txBody>
+      </p:sp>
+      <p:sp>
+        <p:nvSpPr>
+          <p:cNvPr id="4" name="TextBox 3"/>
           <p:cNvSpPr txBox="1"/>
           <p:nvPr/>
         </p:nvSpPr>
         <p:spPr>
           <a:xfrm>
-            <a:off x="548640" y="320040"/>
-            <a:ext cx="11064240" cy="822960"/>
+            <a:off x="822960" y="2651760"/>
+            <a:ext cx="10515600" cy="822960"/>
           </a:xfrm>
           <a:prstGeom prst="rect">
             <a:avLst/>
@@ -6311,27 +10967,27 @@
           <a:lstStyle/>
           <a:p>
             <a:r>
-              <a:rPr sz="3000" b="1" i="0">
-                <a:solidFill>
-                  <a:srgbClr val="1F4E79"/>
-                </a:solidFill>
-                <a:latin typeface="Times New Roman"/>
-              </a:rPr>
-              <a:t>Where the two disagree — and why that is the interesting part</a:t>
-            </a:r>
-          </a:p>
-        </p:txBody>
-      </p:sp>
-      <p:sp>
-        <p:nvSpPr>
-          <p:cNvPr id="3" name="TextBox 2"/>
+              <a:rPr sz="1500" b="1" i="0">
+                <a:solidFill>
+                  <a:srgbClr val="5B9BD5"/>
+                </a:solidFill>
+                <a:latin typeface="Times New Roman"/>
+              </a:rPr>
+              <a:t>03</a:t>
+            </a:r>
+          </a:p>
+        </p:txBody>
+      </p:sp>
+      <p:sp>
+        <p:nvSpPr>
+          <p:cNvPr id="5" name="TextBox 4"/>
           <p:cNvSpPr txBox="1"/>
           <p:nvPr/>
         </p:nvSpPr>
         <p:spPr>
           <a:xfrm>
-            <a:off x="685800" y="1645920"/>
-            <a:ext cx="10881360" cy="4937760"/>
+            <a:off x="822960" y="2926080"/>
+            <a:ext cx="10515600" cy="1005840"/>
           </a:xfrm>
           <a:prstGeom prst="rect">
             <a:avLst/>
@@ -6344,83 +11000,83 @@
           </a:bodyPr>
           <a:lstStyle/>
           <a:p>
-            <a:pPr>
-              <a:spcAft>
-                <a:spcPts val="600"/>
-              </a:spcAft>
-            </a:pPr>
-            <a:r>
-              <a:rPr sz="1700" b="0" i="0">
-                <a:solidFill>
-                  <a:srgbClr val="1A1A1A"/>
-                </a:solidFill>
-                <a:latin typeface="Times New Roman"/>
-              </a:rPr>
-              <a:t>•  Clinical tier: the laboratory says Tier I-A, this pipeline says Tier II.</a:t>
-            </a:r>
-          </a:p>
-          <a:p>
-            <a:pPr lvl="1">
-              <a:spcAft>
-                <a:spcPts val="600"/>
-              </a:spcAft>
-            </a:pPr>
-            <a:r>
-              <a:rPr sz="1500" b="0" i="0">
-                <a:solidFill>
-                  <a:srgbClr val="555555"/>
-                </a:solidFill>
-                <a:latin typeface="Times New Roman"/>
-              </a:rPr>
-              <a:t>—  The laboratory cited a clinical guideline recording an approved therapy in this tumour type. The open knowledge bases hold that evidence only for other tumour types, and the tiering rule refuses Tier I on evidence from a different disease.</a:t>
-            </a:r>
-          </a:p>
-          <a:p>
-            <a:pPr lvl="1">
-              <a:spcAft>
-                <a:spcPts val="600"/>
-              </a:spcAft>
-            </a:pPr>
-            <a:r>
-              <a:rPr sz="1500" b="0" i="0">
-                <a:solidFill>
-                  <a:srgbClr val="555555"/>
-                </a:solidFill>
-                <a:latin typeface="Times New Roman"/>
-              </a:rPr>
-              <a:t>—  The gap measures the uneven tumour-type coverage of free evidence sources — not a disagreement about biology.</a:t>
-            </a:r>
-          </a:p>
-          <a:p>
-            <a:pPr>
-              <a:spcAft>
-                <a:spcPts val="600"/>
-              </a:spcAft>
-            </a:pPr>
-            <a:r>
-              <a:rPr sz="1700" b="0" i="0">
-                <a:solidFill>
-                  <a:srgbClr val="1A1A1A"/>
-                </a:solidFill>
-                <a:latin typeface="Times New Roman"/>
-              </a:rPr>
-              <a:t>•  Candidate count: 39 likely somatic against one reported.</a:t>
-            </a:r>
-          </a:p>
-          <a:p>
-            <a:pPr lvl="1">
-              <a:spcAft>
-                <a:spcPts val="600"/>
-              </a:spcAft>
-            </a:pPr>
-            <a:r>
-              <a:rPr sz="1500" b="0" i="0">
-                <a:solidFill>
-                  <a:srgbClr val="555555"/>
-                </a:solidFill>
-                <a:latin typeface="Times New Roman"/>
-              </a:rPr>
-              <a:t>—  Partly expected — the laboratory reports only what passes its clinical thresholds. The rest is technical, and measurable.</a:t>
+            <a:r>
+              <a:rPr sz="3400" b="1" i="0">
+                <a:solidFill>
+                  <a:srgbClr val="ECEFF4"/>
+                </a:solidFill>
+                <a:latin typeface="Times New Roman"/>
+              </a:rPr>
+              <a:t>Results</a:t>
+            </a:r>
+          </a:p>
+        </p:txBody>
+      </p:sp>
+      <p:sp>
+        <p:nvSpPr>
+          <p:cNvPr id="6" name="TextBox 5"/>
+          <p:cNvSpPr txBox="1"/>
+          <p:nvPr/>
+        </p:nvSpPr>
+        <p:spPr>
+          <a:xfrm>
+            <a:off x="822960" y="3977639"/>
+            <a:ext cx="9601200" cy="822960"/>
+          </a:xfrm>
+          <a:prstGeom prst="rect">
+            <a:avLst/>
+          </a:prstGeom>
+          <a:noFill/>
+        </p:spPr>
+        <p:txBody>
+          <a:bodyPr wrap="square">
+            <a:spAutoFit/>
+          </a:bodyPr>
+          <a:lstStyle/>
+          <a:p>
+            <a:r>
+              <a:rPr sz="1500" b="0" i="1">
+                <a:solidFill>
+                  <a:srgbClr val="9AA4B2"/>
+                </a:solidFill>
+                <a:latin typeface="Times New Roman"/>
+              </a:rPr>
+              <a:t>Measured against an accredited laboratory</a:t>
+            </a:r>
+          </a:p>
+        </p:txBody>
+      </p:sp>
+      <p:sp>
+        <p:nvSpPr>
+          <p:cNvPr id="7" name="TextBox 6"/>
+          <p:cNvSpPr txBox="1"/>
+          <p:nvPr/>
+        </p:nvSpPr>
+        <p:spPr>
+          <a:xfrm>
+            <a:off x="10607040" y="6382512"/>
+            <a:ext cx="1097280" cy="320040"/>
+          </a:xfrm>
+          <a:prstGeom prst="rect">
+            <a:avLst/>
+          </a:prstGeom>
+          <a:noFill/>
+        </p:spPr>
+        <p:txBody>
+          <a:bodyPr wrap="square">
+            <a:spAutoFit/>
+          </a:bodyPr>
+          <a:lstStyle/>
+          <a:p>
+            <a:pPr algn="r"/>
+            <a:r>
+              <a:rPr sz="1000" b="0" i="0">
+                <a:solidFill>
+                  <a:srgbClr val="9AA4B2"/>
+                </a:solidFill>
+                <a:latin typeface="Times New Roman"/>
+              </a:rPr>
+              <a:t>9 / 18</a:t>
             </a:r>
           </a:p>
         </p:txBody>
